--- a/statistics_01_probability.pptx
+++ b/statistics_01_probability.pptx
@@ -5,7 +5,7 @@
     <p:sldMasterId id="2147483659" r:id="rId1"/>
   </p:sldMasterIdLst>
   <p:notesMasterIdLst>
-    <p:notesMasterId r:id="rId12"/>
+    <p:notesMasterId r:id="rId15"/>
   </p:notesMasterIdLst>
   <p:sldIdLst>
     <p:sldId id="298" r:id="rId2"/>
@@ -18,6 +18,9 @@
     <p:sldId id="296" r:id="rId9"/>
     <p:sldId id="297" r:id="rId10"/>
     <p:sldId id="265" r:id="rId11"/>
+    <p:sldId id="301" r:id="rId12"/>
+    <p:sldId id="257" r:id="rId13"/>
+    <p:sldId id="299" r:id="rId14"/>
   </p:sldIdLst>
   <p:sldSz cx="12192000" cy="6858000"/>
   <p:notesSz cx="6858000" cy="9144000"/>
@@ -1551,6 +1554,161 @@
     <p:extLst>
       <p:ext uri="{BB962C8B-B14F-4D97-AF65-F5344CB8AC3E}">
         <p14:creationId xmlns:p14="http://schemas.microsoft.com/office/powerpoint/2010/main" val="1751070861"/>
+      </p:ext>
+    </p:extLst>
+  </p:cSld>
+  <p:clrMapOvr>
+    <a:masterClrMapping/>
+  </p:clrMapOvr>
+</p:notes>
+</file>
+
+<file path=ppt/notesSlides/notesSlide2.xml><?xml version="1.0" encoding="utf-8"?>
+<p:notes xmlns:a="http://schemas.openxmlformats.org/drawingml/2006/main" xmlns:r="http://schemas.openxmlformats.org/officeDocument/2006/relationships" xmlns:p="http://schemas.openxmlformats.org/presentationml/2006/main" showMasterSp="0" showMasterPhAnim="0">
+  <p:cSld>
+    <p:spTree>
+      <p:nvGrpSpPr>
+        <p:cNvPr id="1" name="Shape 90"/>
+        <p:cNvGrpSpPr/>
+        <p:nvPr/>
+      </p:nvGrpSpPr>
+      <p:grpSpPr>
+        <a:xfrm>
+          <a:off x="0" y="0"/>
+          <a:ext cx="0" cy="0"/>
+          <a:chOff x="0" y="0"/>
+          <a:chExt cx="0" cy="0"/>
+        </a:xfrm>
+      </p:grpSpPr>
+      <p:sp>
+        <p:nvSpPr>
+          <p:cNvPr id="91" name="Google Shape;91;g60bda0dc20_0_7:notes"/>
+          <p:cNvSpPr>
+            <a:spLocks noGrp="1" noRot="1" noChangeAspect="1"/>
+          </p:cNvSpPr>
+          <p:nvPr>
+            <p:ph type="sldImg" idx="2"/>
+          </p:nvPr>
+        </p:nvSpPr>
+        <p:spPr>
+          <a:xfrm>
+            <a:off x="685800" y="1143000"/>
+            <a:ext cx="5486400" cy="3086100"/>
+          </a:xfrm>
+          <a:custGeom>
+            <a:avLst/>
+            <a:gdLst/>
+            <a:ahLst/>
+            <a:cxnLst/>
+            <a:rect l="l" t="t" r="r" b="b"/>
+            <a:pathLst>
+              <a:path w="120000" h="120000" extrusionOk="0">
+                <a:moveTo>
+                  <a:pt x="0" y="0"/>
+                </a:moveTo>
+                <a:lnTo>
+                  <a:pt x="120000" y="0"/>
+                </a:lnTo>
+                <a:lnTo>
+                  <a:pt x="120000" y="120000"/>
+                </a:lnTo>
+                <a:lnTo>
+                  <a:pt x="0" y="120000"/>
+                </a:lnTo>
+                <a:close/>
+              </a:path>
+            </a:pathLst>
+          </a:custGeom>
+        </p:spPr>
+      </p:sp>
+      <p:sp>
+        <p:nvSpPr>
+          <p:cNvPr id="92" name="Google Shape;92;g60bda0dc20_0_7:notes"/>
+          <p:cNvSpPr txBox="1">
+            <a:spLocks noGrp="1"/>
+          </p:cNvSpPr>
+          <p:nvPr>
+            <p:ph type="body" idx="1"/>
+          </p:nvPr>
+        </p:nvSpPr>
+        <p:spPr>
+          <a:xfrm>
+            <a:off x="685800" y="4400550"/>
+            <a:ext cx="5486400" cy="3600600"/>
+          </a:xfrm>
+          <a:prstGeom prst="rect">
+            <a:avLst/>
+          </a:prstGeom>
+        </p:spPr>
+        <p:txBody>
+          <a:bodyPr spcFirstLastPara="1" wrap="square" lIns="91425" tIns="91425" rIns="91425" bIns="91425" anchor="t" anchorCtr="0">
+            <a:noAutofit/>
+          </a:bodyPr>
+          <a:lstStyle/>
+          <a:p>
+            <a:pPr marL="0" lvl="0" indent="0" algn="l" rtl="0">
+              <a:spcBef>
+                <a:spcPts val="0"/>
+              </a:spcBef>
+              <a:spcAft>
+                <a:spcPts val="0"/>
+              </a:spcAft>
+              <a:buNone/>
+            </a:pPr>
+            <a:endParaRPr/>
+          </a:p>
+        </p:txBody>
+      </p:sp>
+      <p:sp>
+        <p:nvSpPr>
+          <p:cNvPr id="93" name="Google Shape;93;g60bda0dc20_0_7:notes"/>
+          <p:cNvSpPr txBox="1">
+            <a:spLocks noGrp="1"/>
+          </p:cNvSpPr>
+          <p:nvPr>
+            <p:ph type="sldNum" idx="12"/>
+          </p:nvPr>
+        </p:nvSpPr>
+        <p:spPr>
+          <a:xfrm>
+            <a:off x="3884613" y="8685213"/>
+            <a:ext cx="2971800" cy="458700"/>
+          </a:xfrm>
+          <a:prstGeom prst="rect">
+            <a:avLst/>
+          </a:prstGeom>
+        </p:spPr>
+        <p:txBody>
+          <a:bodyPr spcFirstLastPara="1" wrap="square" lIns="91425" tIns="45700" rIns="91425" bIns="45700" anchor="b" anchorCtr="0">
+            <a:noAutofit/>
+          </a:bodyPr>
+          <a:lstStyle/>
+          <a:p>
+            <a:pPr marL="0" lvl="0" indent="0" algn="r" rtl="0">
+              <a:spcBef>
+                <a:spcPts val="0"/>
+              </a:spcBef>
+              <a:spcAft>
+                <a:spcPts val="0"/>
+              </a:spcAft>
+              <a:buClr>
+                <a:srgbClr val="000000"/>
+              </a:buClr>
+              <a:buFont typeface="Arial"/>
+              <a:buNone/>
+            </a:pPr>
+            <a:fld id="{00000000-1234-1234-1234-123412341234}" type="slidenum">
+              <a:rPr lang="en-US"/>
+              <a:t>12</a:t>
+            </a:fld>
+            <a:endParaRPr/>
+          </a:p>
+        </p:txBody>
+      </p:sp>
+    </p:spTree>
+    <p:extLst>
+      <p:ext uri="{BB962C8B-B14F-4D97-AF65-F5344CB8AC3E}">
+        <p14:creationId xmlns:p14="http://schemas.microsoft.com/office/powerpoint/2010/main" val="2246438932"/>
       </p:ext>
     </p:extLst>
   </p:cSld>
@@ -14306,6 +14464,58 @@
       </p:grpSpPr>
       <p:sp>
         <p:nvSpPr>
+          <p:cNvPr id="11" name="Rectangle 10">
+            <a:extLst>
+              <a:ext uri="{FF2B5EF4-FFF2-40B4-BE49-F238E27FC236}">
+                <a16:creationId xmlns:a16="http://schemas.microsoft.com/office/drawing/2014/main" id="{FA6B1060-DCF7-C167-AABC-47472161A881}"/>
+              </a:ext>
+            </a:extLst>
+          </p:cNvPr>
+          <p:cNvSpPr/>
+          <p:nvPr/>
+        </p:nvSpPr>
+        <p:spPr>
+          <a:xfrm>
+            <a:off x="3750366" y="3310437"/>
+            <a:ext cx="8362122" cy="3324316"/>
+          </a:xfrm>
+          <a:prstGeom prst="rect">
+            <a:avLst/>
+          </a:prstGeom>
+          <a:solidFill>
+            <a:schemeClr val="accent4">
+              <a:lumMod val="20000"/>
+              <a:lumOff val="80000"/>
+            </a:schemeClr>
+          </a:solidFill>
+        </p:spPr>
+        <p:style>
+          <a:lnRef idx="2">
+            <a:schemeClr val="accent1">
+              <a:shade val="50000"/>
+            </a:schemeClr>
+          </a:lnRef>
+          <a:fillRef idx="1">
+            <a:schemeClr val="accent1"/>
+          </a:fillRef>
+          <a:effectRef idx="0">
+            <a:schemeClr val="accent1"/>
+          </a:effectRef>
+          <a:fontRef idx="minor">
+            <a:schemeClr val="lt1"/>
+          </a:fontRef>
+        </p:style>
+        <p:txBody>
+          <a:bodyPr rtlCol="0" anchor="ctr"/>
+          <a:lstStyle/>
+          <a:p>
+            <a:pPr algn="ctr"/>
+            <a:endParaRPr lang="en-US"/>
+          </a:p>
+        </p:txBody>
+      </p:sp>
+      <p:sp>
+        <p:nvSpPr>
           <p:cNvPr id="3" name="TextBox 2">
             <a:extLst>
               <a:ext uri="{FF2B5EF4-FFF2-40B4-BE49-F238E27FC236}">
@@ -14318,8 +14528,8 @@
         </p:nvSpPr>
         <p:spPr>
           <a:xfrm>
-            <a:off x="808556" y="1840321"/>
-            <a:ext cx="5630778" cy="4616648"/>
+            <a:off x="65801" y="1054545"/>
+            <a:ext cx="5630778" cy="1600438"/>
           </a:xfrm>
           <a:prstGeom prst="rect">
             <a:avLst/>
@@ -14382,7 +14592,7 @@
             </a:br>
             <a:r>
               <a:rPr lang="en-US"/>
-              <a:t>and we try to make some </a:t>
+              <a:t>and we are trying to make some </a:t>
             </a:r>
             <a:r>
               <a:rPr lang="en-US" b="1">
@@ -14402,116 +14612,6 @@
             <a:r>
               <a:rPr lang="en-US"/>
               <a:t>based on this particular sample of data.</a:t>
-            </a:r>
-          </a:p>
-          <a:p>
-            <a:endParaRPr lang="en-US"/>
-          </a:p>
-          <a:p>
-            <a:r>
-              <a:rPr lang="en-US"/>
-              <a:t>Statistics: Descriptive vs Inferential</a:t>
-            </a:r>
-          </a:p>
-          <a:p>
-            <a:endParaRPr lang="en-US"/>
-          </a:p>
-          <a:p>
-            <a:r>
-              <a:rPr lang="en-US"/>
-              <a:t>Vocabulary of Statistics:</a:t>
-            </a:r>
-          </a:p>
-          <a:p>
-            <a:endParaRPr lang="en-US"/>
-          </a:p>
-          <a:p>
-            <a:pPr marL="342900" indent="-342900">
-              <a:buFont typeface="+mj-lt"/>
-              <a:buAutoNum type="arabicPeriod"/>
-            </a:pPr>
-            <a:r>
-              <a:rPr lang="en-US"/>
-              <a:t>Measures of Frequency (how often something occurs):</a:t>
-            </a:r>
-            <a:br>
-              <a:rPr lang="en-US"/>
-            </a:br>
-            <a:r>
-              <a:rPr lang="en-US" b="1">
-                <a:solidFill>
-                  <a:srgbClr val="FF0000"/>
-                </a:solidFill>
-              </a:rPr>
-              <a:t>Count, Percent, Frequency</a:t>
-            </a:r>
-            <a:endParaRPr lang="en-US"/>
-          </a:p>
-          <a:p>
-            <a:pPr marL="342900" indent="-342900">
-              <a:buFont typeface="+mj-lt"/>
-              <a:buAutoNum type="arabicPeriod"/>
-            </a:pPr>
-            <a:r>
-              <a:rPr lang="en-US"/>
-              <a:t>Measures of Central Tendency (where the data mostly is):</a:t>
-            </a:r>
-            <a:br>
-              <a:rPr lang="en-US"/>
-            </a:br>
-            <a:r>
-              <a:rPr lang="en-US" b="1">
-                <a:solidFill>
-                  <a:srgbClr val="FF0000"/>
-                </a:solidFill>
-              </a:rPr>
-              <a:t>Mean, Median, and Mode </a:t>
-            </a:r>
-            <a:r>
-              <a:rPr lang="en-US"/>
-              <a:t>(The mode is the value that appears most often in a set of data values)</a:t>
-            </a:r>
-          </a:p>
-          <a:p>
-            <a:pPr marL="342900" indent="-342900">
-              <a:buFont typeface="+mj-lt"/>
-              <a:buAutoNum type="arabicPeriod"/>
-            </a:pPr>
-            <a:r>
-              <a:rPr lang="en-US"/>
-              <a:t>Measures of Dispersion or Variation (how is data "spread out"): </a:t>
-            </a:r>
-            <a:br>
-              <a:rPr lang="en-US"/>
-            </a:br>
-            <a:r>
-              <a:rPr lang="en-US" b="1">
-                <a:solidFill>
-                  <a:srgbClr val="FF0000"/>
-                </a:solidFill>
-              </a:rPr>
-              <a:t>Range, Variance, Standard Deviation</a:t>
-            </a:r>
-          </a:p>
-          <a:p>
-            <a:pPr marL="342900" indent="-342900">
-              <a:buFont typeface="+mj-lt"/>
-              <a:buAutoNum type="arabicPeriod"/>
-            </a:pPr>
-            <a:r>
-              <a:rPr lang="en-US"/>
-              <a:t>Measures of Position (standard scores):</a:t>
-            </a:r>
-            <a:br>
-              <a:rPr lang="en-US"/>
-            </a:br>
-            <a:r>
-              <a:rPr lang="en-US" b="1">
-                <a:solidFill>
-                  <a:srgbClr val="FF0000"/>
-                </a:solidFill>
-              </a:rPr>
-              <a:t>Percentile Ranks, Quartile Ranks</a:t>
             </a:r>
           </a:p>
         </p:txBody>
@@ -14596,21 +14696,505 @@
           <p:nvPr/>
         </p:nvPicPr>
         <p:blipFill>
-          <a:blip r:embed="rId2"/>
+          <a:blip r:embed="rId2" cstate="email">
+            <a:extLst>
+              <a:ext uri="{28A0092B-C50C-407E-A947-70E740481C1C}">
+                <a14:useLocalDpi xmlns:a14="http://schemas.microsoft.com/office/drawing/2010/main"/>
+              </a:ext>
+            </a:extLst>
+          </a:blip>
           <a:stretch>
             <a:fillRect/>
           </a:stretch>
         </p:blipFill>
         <p:spPr>
           <a:xfrm>
-            <a:off x="7268647" y="139700"/>
+            <a:off x="7268647" y="106740"/>
             <a:ext cx="4839132" cy="2928353"/>
+          </a:xfrm>
+          <a:prstGeom prst="rect">
+            <a:avLst/>
+          </a:prstGeom>
+          <a:ln>
+            <a:solidFill>
+              <a:schemeClr val="accent1"/>
+            </a:solidFill>
+          </a:ln>
+        </p:spPr>
+      </p:pic>
+      <p:sp>
+        <p:nvSpPr>
+          <p:cNvPr id="4" name="TextBox 3">
+            <a:extLst>
+              <a:ext uri="{FF2B5EF4-FFF2-40B4-BE49-F238E27FC236}">
+                <a16:creationId xmlns:a16="http://schemas.microsoft.com/office/drawing/2014/main" id="{076957E4-DBB9-0C88-8C92-A98960E64F4E}"/>
+              </a:ext>
+            </a:extLst>
+          </p:cNvPr>
+          <p:cNvSpPr txBox="1"/>
+          <p:nvPr/>
+        </p:nvSpPr>
+        <p:spPr>
+          <a:xfrm>
+            <a:off x="3929875" y="4087983"/>
+            <a:ext cx="4252737" cy="738664"/>
+          </a:xfrm>
+          <a:prstGeom prst="rect">
+            <a:avLst/>
+          </a:prstGeom>
+          <a:noFill/>
+          <a:ln>
+            <a:solidFill>
+              <a:schemeClr val="accent1"/>
+            </a:solidFill>
+          </a:ln>
+        </p:spPr>
+        <p:txBody>
+          <a:bodyPr wrap="square" rtlCol="0">
+            <a:spAutoFit/>
+          </a:bodyPr>
+          <a:lstStyle/>
+          <a:p>
+            <a:pPr marL="285750" indent="-285750">
+              <a:buFont typeface="Arial" panose="020B0604020202020204" pitchFamily="34" charset="0"/>
+              <a:buChar char="•"/>
+            </a:pPr>
+            <a:r>
+              <a:rPr lang="en-US" b="1">
+                <a:solidFill>
+                  <a:srgbClr val="FF0000"/>
+                </a:solidFill>
+              </a:rPr>
+              <a:t>mean</a:t>
+            </a:r>
+            <a:r>
+              <a:rPr lang="en-US"/>
+              <a:t> = the average of a data set</a:t>
+            </a:r>
+          </a:p>
+          <a:p>
+            <a:pPr marL="285750" indent="-285750">
+              <a:buFont typeface="Arial" panose="020B0604020202020204" pitchFamily="34" charset="0"/>
+              <a:buChar char="•"/>
+            </a:pPr>
+            <a:r>
+              <a:rPr lang="en-US" b="1">
+                <a:solidFill>
+                  <a:srgbClr val="FF0000"/>
+                </a:solidFill>
+              </a:rPr>
+              <a:t>median</a:t>
+            </a:r>
+            <a:r>
+              <a:rPr lang="en-US"/>
+              <a:t> = the middle of the set of numbers</a:t>
+            </a:r>
+          </a:p>
+          <a:p>
+            <a:pPr marL="285750" indent="-285750">
+              <a:buFont typeface="Arial" panose="020B0604020202020204" pitchFamily="34" charset="0"/>
+              <a:buChar char="•"/>
+            </a:pPr>
+            <a:r>
+              <a:rPr lang="en-US" b="1">
+                <a:solidFill>
+                  <a:srgbClr val="FF0000"/>
+                </a:solidFill>
+              </a:rPr>
+              <a:t>mode</a:t>
+            </a:r>
+            <a:r>
+              <a:rPr lang="en-US"/>
+              <a:t> = the most common number in a data set</a:t>
+            </a:r>
+          </a:p>
+        </p:txBody>
+      </p:sp>
+      <p:sp>
+        <p:nvSpPr>
+          <p:cNvPr id="6" name="TextBox 5">
+            <a:extLst>
+              <a:ext uri="{FF2B5EF4-FFF2-40B4-BE49-F238E27FC236}">
+                <a16:creationId xmlns:a16="http://schemas.microsoft.com/office/drawing/2014/main" id="{1EE18733-4169-72E8-0A73-595A28519447}"/>
+              </a:ext>
+            </a:extLst>
+          </p:cNvPr>
+          <p:cNvSpPr txBox="1"/>
+          <p:nvPr/>
+        </p:nvSpPr>
+        <p:spPr>
+          <a:xfrm>
+            <a:off x="8745542" y="4355954"/>
+            <a:ext cx="3124591" cy="738664"/>
+          </a:xfrm>
+          <a:prstGeom prst="rect">
+            <a:avLst/>
+          </a:prstGeom>
+          <a:noFill/>
+          <a:ln>
+            <a:solidFill>
+              <a:schemeClr val="accent1"/>
+            </a:solidFill>
+          </a:ln>
+        </p:spPr>
+        <p:txBody>
+          <a:bodyPr wrap="square" rtlCol="0">
+            <a:spAutoFit/>
+          </a:bodyPr>
+          <a:lstStyle/>
+          <a:p>
+            <a:pPr marL="285750" indent="-285750">
+              <a:buFont typeface="Arial" panose="020B0604020202020204" pitchFamily="34" charset="0"/>
+              <a:buChar char="•"/>
+            </a:pPr>
+            <a:r>
+              <a:rPr lang="en-US">
+                <a:solidFill>
+                  <a:schemeClr val="tx1"/>
+                </a:solidFill>
+              </a:rPr>
+              <a:t>The 25th percentile = 1</a:t>
+            </a:r>
+            <a:r>
+              <a:rPr lang="en-US" baseline="30000">
+                <a:solidFill>
+                  <a:schemeClr val="tx1"/>
+                </a:solidFill>
+              </a:rPr>
+              <a:t>st</a:t>
+            </a:r>
+            <a:r>
+              <a:rPr lang="en-US">
+                <a:solidFill>
+                  <a:schemeClr val="tx1"/>
+                </a:solidFill>
+              </a:rPr>
+              <a:t> quartile</a:t>
+            </a:r>
+          </a:p>
+          <a:p>
+            <a:pPr marL="285750" indent="-285750">
+              <a:buFont typeface="Arial" panose="020B0604020202020204" pitchFamily="34" charset="0"/>
+              <a:buChar char="•"/>
+            </a:pPr>
+            <a:r>
+              <a:rPr lang="en-US">
+                <a:solidFill>
+                  <a:schemeClr val="tx1"/>
+                </a:solidFill>
+              </a:rPr>
+              <a:t>The 50th percentile = median</a:t>
+            </a:r>
+          </a:p>
+          <a:p>
+            <a:pPr marL="285750" indent="-285750">
+              <a:buFont typeface="Arial" panose="020B0604020202020204" pitchFamily="34" charset="0"/>
+              <a:buChar char="•"/>
+            </a:pPr>
+            <a:r>
+              <a:rPr lang="en-US">
+                <a:solidFill>
+                  <a:schemeClr val="tx1"/>
+                </a:solidFill>
+              </a:rPr>
+              <a:t>The 75th percentile = 3</a:t>
+            </a:r>
+            <a:r>
+              <a:rPr lang="en-US" baseline="30000">
+                <a:solidFill>
+                  <a:schemeClr val="tx1"/>
+                </a:solidFill>
+              </a:rPr>
+              <a:t>rd</a:t>
+            </a:r>
+            <a:r>
+              <a:rPr lang="en-US">
+                <a:solidFill>
+                  <a:schemeClr val="tx1"/>
+                </a:solidFill>
+              </a:rPr>
+              <a:t> quartile</a:t>
+            </a:r>
+          </a:p>
+        </p:txBody>
+      </p:sp>
+      <p:pic>
+        <p:nvPicPr>
+          <p:cNvPr id="7" name="Picture 6">
+            <a:extLst>
+              <a:ext uri="{FF2B5EF4-FFF2-40B4-BE49-F238E27FC236}">
+                <a16:creationId xmlns:a16="http://schemas.microsoft.com/office/drawing/2014/main" id="{E809A2F8-1F98-78A8-0396-444036160DF5}"/>
+              </a:ext>
+            </a:extLst>
+          </p:cNvPr>
+          <p:cNvPicPr>
+            <a:picLocks noChangeAspect="1"/>
+          </p:cNvPicPr>
+          <p:nvPr/>
+        </p:nvPicPr>
+        <p:blipFill>
+          <a:blip r:embed="rId3" cstate="email">
+            <a:extLst>
+              <a:ext uri="{28A0092B-C50C-407E-A947-70E740481C1C}">
+                <a14:useLocalDpi xmlns:a14="http://schemas.microsoft.com/office/drawing/2010/main"/>
+              </a:ext>
+            </a:extLst>
+          </a:blip>
+          <a:stretch>
+            <a:fillRect/>
+          </a:stretch>
+        </p:blipFill>
+        <p:spPr>
+          <a:xfrm>
+            <a:off x="3992247" y="4977387"/>
+            <a:ext cx="1850608" cy="1604358"/>
           </a:xfrm>
           <a:prstGeom prst="rect">
             <a:avLst/>
           </a:prstGeom>
         </p:spPr>
       </p:pic>
+      <p:pic>
+        <p:nvPicPr>
+          <p:cNvPr id="8" name="Picture 7">
+            <a:extLst>
+              <a:ext uri="{FF2B5EF4-FFF2-40B4-BE49-F238E27FC236}">
+                <a16:creationId xmlns:a16="http://schemas.microsoft.com/office/drawing/2014/main" id="{AE17C928-9A3F-AA0E-DD82-46504805DC82}"/>
+              </a:ext>
+            </a:extLst>
+          </p:cNvPr>
+          <p:cNvPicPr>
+            <a:picLocks noChangeAspect="1"/>
+          </p:cNvPicPr>
+          <p:nvPr/>
+        </p:nvPicPr>
+        <p:blipFill>
+          <a:blip r:embed="rId4" cstate="email">
+            <a:extLst>
+              <a:ext uri="{28A0092B-C50C-407E-A947-70E740481C1C}">
+                <a14:useLocalDpi xmlns:a14="http://schemas.microsoft.com/office/drawing/2010/main"/>
+              </a:ext>
+            </a:extLst>
+          </a:blip>
+          <a:stretch>
+            <a:fillRect/>
+          </a:stretch>
+        </p:blipFill>
+        <p:spPr>
+          <a:xfrm>
+            <a:off x="8547653" y="5156690"/>
+            <a:ext cx="3520370" cy="1431280"/>
+          </a:xfrm>
+          <a:prstGeom prst="rect">
+            <a:avLst/>
+          </a:prstGeom>
+        </p:spPr>
+      </p:pic>
+      <p:sp>
+        <p:nvSpPr>
+          <p:cNvPr id="10" name="TextBox 9">
+            <a:extLst>
+              <a:ext uri="{FF2B5EF4-FFF2-40B4-BE49-F238E27FC236}">
+                <a16:creationId xmlns:a16="http://schemas.microsoft.com/office/drawing/2014/main" id="{54F166B1-25A3-B3B6-1170-4955D3E0E0CA}"/>
+              </a:ext>
+            </a:extLst>
+          </p:cNvPr>
+          <p:cNvSpPr txBox="1"/>
+          <p:nvPr/>
+        </p:nvSpPr>
+        <p:spPr>
+          <a:xfrm>
+            <a:off x="65801" y="2950280"/>
+            <a:ext cx="3684091" cy="3323987"/>
+          </a:xfrm>
+          <a:prstGeom prst="rect">
+            <a:avLst/>
+          </a:prstGeom>
+          <a:noFill/>
+        </p:spPr>
+        <p:txBody>
+          <a:bodyPr wrap="square" rtlCol="0">
+            <a:spAutoFit/>
+          </a:bodyPr>
+          <a:lstStyle/>
+          <a:p>
+            <a:r>
+              <a:rPr lang="en-US" b="1">
+                <a:solidFill>
+                  <a:srgbClr val="0070C0"/>
+                </a:solidFill>
+              </a:rPr>
+              <a:t>Statistics: Descriptive vs Inferential</a:t>
+            </a:r>
+          </a:p>
+          <a:p>
+            <a:endParaRPr lang="en-US" b="1">
+              <a:solidFill>
+                <a:srgbClr val="0070C0"/>
+              </a:solidFill>
+            </a:endParaRPr>
+          </a:p>
+          <a:p>
+            <a:r>
+              <a:rPr lang="en-US" b="1">
+                <a:solidFill>
+                  <a:srgbClr val="0070C0"/>
+                </a:solidFill>
+              </a:rPr>
+              <a:t>Vocabulary of Statistics:</a:t>
+            </a:r>
+          </a:p>
+          <a:p>
+            <a:endParaRPr lang="en-US"/>
+          </a:p>
+          <a:p>
+            <a:pPr marL="342900" indent="-342900">
+              <a:buFont typeface="+mj-lt"/>
+              <a:buAutoNum type="arabicPeriod"/>
+            </a:pPr>
+            <a:r>
+              <a:rPr lang="en-US"/>
+              <a:t>Measures of Frequency </a:t>
+            </a:r>
+            <a:br>
+              <a:rPr lang="en-US"/>
+            </a:br>
+            <a:r>
+              <a:rPr lang="en-US"/>
+              <a:t>(how often something occurs):</a:t>
+            </a:r>
+            <a:br>
+              <a:rPr lang="en-US"/>
+            </a:br>
+            <a:r>
+              <a:rPr lang="en-US" b="1">
+                <a:solidFill>
+                  <a:srgbClr val="FF0000"/>
+                </a:solidFill>
+              </a:rPr>
+              <a:t>Count, Percent, Frequency</a:t>
+            </a:r>
+            <a:endParaRPr lang="en-US"/>
+          </a:p>
+          <a:p>
+            <a:pPr marL="342900" indent="-342900">
+              <a:buFont typeface="+mj-lt"/>
+              <a:buAutoNum type="arabicPeriod"/>
+            </a:pPr>
+            <a:r>
+              <a:rPr lang="en-US"/>
+              <a:t>Measures of Central Tendency </a:t>
+            </a:r>
+            <a:br>
+              <a:rPr lang="en-US"/>
+            </a:br>
+            <a:r>
+              <a:rPr lang="en-US"/>
+              <a:t>(where the data mostly is):</a:t>
+            </a:r>
+            <a:br>
+              <a:rPr lang="en-US"/>
+            </a:br>
+            <a:r>
+              <a:rPr lang="en-US" b="1">
+                <a:solidFill>
+                  <a:srgbClr val="FF0000"/>
+                </a:solidFill>
+              </a:rPr>
+              <a:t>Mean, Median, and Mode</a:t>
+            </a:r>
+            <a:endParaRPr lang="en-US"/>
+          </a:p>
+          <a:p>
+            <a:pPr marL="342900" indent="-342900">
+              <a:buFont typeface="+mj-lt"/>
+              <a:buAutoNum type="arabicPeriod"/>
+            </a:pPr>
+            <a:r>
+              <a:rPr lang="en-US"/>
+              <a:t>Measures of Dispersion or Variation </a:t>
+            </a:r>
+            <a:br>
+              <a:rPr lang="en-US"/>
+            </a:br>
+            <a:r>
+              <a:rPr lang="en-US"/>
+              <a:t>(how is data "spread out"): </a:t>
+            </a:r>
+            <a:br>
+              <a:rPr lang="en-US"/>
+            </a:br>
+            <a:r>
+              <a:rPr lang="en-US" b="1">
+                <a:solidFill>
+                  <a:srgbClr val="FF0000"/>
+                </a:solidFill>
+              </a:rPr>
+              <a:t>Range, Variance, Standard Deviation</a:t>
+            </a:r>
+          </a:p>
+          <a:p>
+            <a:pPr marL="342900" indent="-342900">
+              <a:buFont typeface="+mj-lt"/>
+              <a:buAutoNum type="arabicPeriod"/>
+            </a:pPr>
+            <a:r>
+              <a:rPr lang="en-US"/>
+              <a:t>Measures of Position (standard scores):</a:t>
+            </a:r>
+            <a:br>
+              <a:rPr lang="en-US"/>
+            </a:br>
+            <a:r>
+              <a:rPr lang="en-US" b="1">
+                <a:solidFill>
+                  <a:srgbClr val="FF0000"/>
+                </a:solidFill>
+              </a:rPr>
+              <a:t>Percentile Ranks, Quartile Ranks</a:t>
+            </a:r>
+          </a:p>
+        </p:txBody>
+      </p:sp>
+      <p:sp>
+        <p:nvSpPr>
+          <p:cNvPr id="9" name="TextBox 8">
+            <a:extLst>
+              <a:ext uri="{FF2B5EF4-FFF2-40B4-BE49-F238E27FC236}">
+                <a16:creationId xmlns:a16="http://schemas.microsoft.com/office/drawing/2014/main" id="{EBF7AA7E-D640-1982-0DFA-5E2F568B690C}"/>
+              </a:ext>
+            </a:extLst>
+          </p:cNvPr>
+          <p:cNvSpPr txBox="1"/>
+          <p:nvPr/>
+        </p:nvSpPr>
+        <p:spPr>
+          <a:xfrm>
+            <a:off x="7301948" y="3350193"/>
+            <a:ext cx="3909392" cy="523220"/>
+          </a:xfrm>
+          <a:prstGeom prst="rect">
+            <a:avLst/>
+          </a:prstGeom>
+          <a:noFill/>
+        </p:spPr>
+        <p:txBody>
+          <a:bodyPr wrap="square" rtlCol="0">
+            <a:spAutoFit/>
+          </a:bodyPr>
+          <a:lstStyle/>
+          <a:p>
+            <a:r>
+              <a:rPr lang="en-US" sz="2800" b="1">
+                <a:solidFill>
+                  <a:srgbClr val="00D200"/>
+                </a:solidFill>
+              </a:rPr>
+              <a:t>Descriptive Statistics</a:t>
+            </a:r>
+          </a:p>
+        </p:txBody>
+      </p:sp>
     </p:spTree>
     <p:extLst>
       <p:ext uri="{BB962C8B-B14F-4D97-AF65-F5344CB8AC3E}">
@@ -14655,8 +15239,8 @@
         </p:nvSpPr>
         <p:spPr>
           <a:xfrm>
-            <a:off x="84912" y="85118"/>
-            <a:ext cx="5906814" cy="6771084"/>
+            <a:off x="-1" y="0"/>
+            <a:ext cx="7513984" cy="2246769"/>
           </a:xfrm>
           <a:prstGeom prst="rect">
             <a:avLst/>
@@ -14670,7 +15254,7 @@
           <a:lstStyle/>
           <a:p>
             <a:r>
-              <a:rPr lang="en-US" sz="1800" b="1" dirty="0"/>
+              <a:rPr lang="en-US" sz="2800" b="1" dirty="0"/>
               <a:t>Random Variable. Probability Distribution</a:t>
             </a:r>
           </a:p>
@@ -14692,6 +15276,9 @@
             </a:r>
           </a:p>
           <a:p>
+            <a:endParaRPr lang="en-US" dirty="0"/>
+          </a:p>
+          <a:p>
             <a:r>
               <a:rPr lang="en-US" dirty="0"/>
               <a:t>Values may be </a:t>
@@ -14715,7 +15302,19 @@
           <a:p>
             <a:r>
               <a:rPr lang="en-US" dirty="0"/>
-              <a:t>For example, think of variable “x” which may have any real value between -10 and +10.</a:t>
+              <a:t>For example, think of variable “x” which may have any </a:t>
+            </a:r>
+            <a:r>
+              <a:rPr lang="en-US" b="1" dirty="0">
+                <a:solidFill>
+                  <a:srgbClr val="00B050"/>
+                </a:solidFill>
+              </a:rPr>
+              <a:t>real value</a:t>
+            </a:r>
+            <a:r>
+              <a:rPr lang="en-US" dirty="0"/>
+              <a:t> between -10 and +10.</a:t>
             </a:r>
           </a:p>
           <a:p>
@@ -14724,7 +15323,73 @@
           <a:p>
             <a:r>
               <a:rPr lang="en-US" dirty="0"/>
-              <a:t>Or think of a variable “z” which can have discrete values 0,0.1,0.2, … 0.9, 1.0</a:t>
+              <a:t>Or think of a variable “z” which can have </a:t>
+            </a:r>
+            <a:r>
+              <a:rPr lang="en-US" b="1" dirty="0">
+                <a:solidFill>
+                  <a:srgbClr val="00B050"/>
+                </a:solidFill>
+              </a:rPr>
+              <a:t>discrete values</a:t>
+            </a:r>
+            <a:r>
+              <a:rPr lang="en-US" dirty="0"/>
+              <a:t> 0,0.1,0.2, … 0.9, 1.0</a:t>
+            </a:r>
+          </a:p>
+        </p:txBody>
+      </p:sp>
+      <p:sp>
+        <p:nvSpPr>
+          <p:cNvPr id="6" name="TextBox 5">
+            <a:extLst>
+              <a:ext uri="{FF2B5EF4-FFF2-40B4-BE49-F238E27FC236}">
+                <a16:creationId xmlns:a16="http://schemas.microsoft.com/office/drawing/2014/main" id="{9E86DD06-5924-18EF-09A0-3BF0E4738D63}"/>
+              </a:ext>
+            </a:extLst>
+          </p:cNvPr>
+          <p:cNvSpPr txBox="1"/>
+          <p:nvPr/>
+        </p:nvSpPr>
+        <p:spPr>
+          <a:xfrm>
+            <a:off x="56665" y="2791239"/>
+            <a:ext cx="5906814" cy="2031325"/>
+          </a:xfrm>
+          <a:prstGeom prst="rect">
+            <a:avLst/>
+          </a:prstGeom>
+          <a:solidFill>
+            <a:schemeClr val="accent4">
+              <a:lumMod val="20000"/>
+              <a:lumOff val="80000"/>
+            </a:schemeClr>
+          </a:solidFill>
+        </p:spPr>
+        <p:txBody>
+          <a:bodyPr wrap="square" rtlCol="0">
+            <a:spAutoFit/>
+          </a:bodyPr>
+          <a:lstStyle/>
+          <a:p>
+            <a:r>
+              <a:rPr lang="en-US" b="1" dirty="0">
+                <a:solidFill>
+                  <a:srgbClr val="0070C0"/>
+                </a:solidFill>
+              </a:rPr>
+              <a:t>Probability function </a:t>
+            </a:r>
+            <a:r>
+              <a:rPr lang="en-US" dirty="0"/>
+              <a:t>P(x) of a discrete random variable “x” </a:t>
+            </a:r>
+          </a:p>
+          <a:p>
+            <a:r>
+              <a:rPr lang="en-US" dirty="0"/>
+              <a:t>is simply a function which gives probability of discrete values.</a:t>
             </a:r>
           </a:p>
           <a:p>
@@ -14732,129 +15397,481 @@
           </a:p>
           <a:p>
             <a:r>
-              <a:rPr lang="en-US" sz="2400" b="1" dirty="0">
-                <a:solidFill>
-                  <a:srgbClr val="FF0000"/>
+              <a:rPr lang="en-US" dirty="0"/>
+              <a:t>For example, if the random variable “x” may have two values: ( 0 or 1 ),</a:t>
+            </a:r>
+          </a:p>
+          <a:p>
+            <a:r>
+              <a:rPr lang="en-US" dirty="0"/>
+              <a:t>and if probabilities of those values are equal, then</a:t>
+            </a:r>
+          </a:p>
+          <a:p>
+            <a:endParaRPr lang="en-US" dirty="0"/>
+          </a:p>
+          <a:p>
+            <a:r>
+              <a:rPr lang="en-US" dirty="0"/>
+              <a:t>P(0) = 0.5, f(1) = 0.5.</a:t>
+            </a:r>
+          </a:p>
+          <a:p>
+            <a:endParaRPr lang="en-US" dirty="0"/>
+          </a:p>
+          <a:p>
+            <a:r>
+              <a:rPr lang="en-US" dirty="0"/>
+              <a:t>The sum of individual probabilities for all possible values should be 1.</a:t>
+            </a:r>
+          </a:p>
+        </p:txBody>
+      </p:sp>
+      <p:pic>
+        <p:nvPicPr>
+          <p:cNvPr id="7" name="Picture 6">
+            <a:extLst>
+              <a:ext uri="{FF2B5EF4-FFF2-40B4-BE49-F238E27FC236}">
+                <a16:creationId xmlns:a16="http://schemas.microsoft.com/office/drawing/2014/main" id="{9704D00B-D35D-3732-B7A6-6A42C7A8C4F1}"/>
+              </a:ext>
+            </a:extLst>
+          </p:cNvPr>
+          <p:cNvPicPr>
+            <a:picLocks noChangeAspect="1"/>
+          </p:cNvPicPr>
+          <p:nvPr/>
+        </p:nvPicPr>
+        <p:blipFill>
+          <a:blip r:embed="rId2" cstate="email">
+            <a:extLst>
+              <a:ext uri="{28A0092B-C50C-407E-A947-70E740481C1C}">
+                <a14:useLocalDpi xmlns:a14="http://schemas.microsoft.com/office/drawing/2010/main"/>
+              </a:ext>
+            </a:extLst>
+          </a:blip>
+          <a:stretch>
+            <a:fillRect/>
+          </a:stretch>
+        </p:blipFill>
+        <p:spPr>
+          <a:xfrm>
+            <a:off x="8461512" y="542787"/>
+            <a:ext cx="3372678" cy="2248452"/>
+          </a:xfrm>
+          <a:prstGeom prst="rect">
+            <a:avLst/>
+          </a:prstGeom>
+        </p:spPr>
+      </p:pic>
+      <p:sp>
+        <p:nvSpPr>
+          <p:cNvPr id="8" name="TextBox 7">
+            <a:extLst>
+              <a:ext uri="{FF2B5EF4-FFF2-40B4-BE49-F238E27FC236}">
+                <a16:creationId xmlns:a16="http://schemas.microsoft.com/office/drawing/2014/main" id="{3EBF9907-FABE-4540-CF1E-3172AEA780A8}"/>
+              </a:ext>
+            </a:extLst>
+          </p:cNvPr>
+          <p:cNvSpPr txBox="1"/>
+          <p:nvPr/>
+        </p:nvSpPr>
+        <p:spPr>
+          <a:xfrm>
+            <a:off x="8461512" y="235010"/>
+            <a:ext cx="3372678" cy="307777"/>
+          </a:xfrm>
+          <a:prstGeom prst="rect">
+            <a:avLst/>
+          </a:prstGeom>
+          <a:noFill/>
+        </p:spPr>
+        <p:txBody>
+          <a:bodyPr wrap="square" rtlCol="0">
+            <a:spAutoFit/>
+          </a:bodyPr>
+          <a:lstStyle/>
+          <a:p>
+            <a:r>
+              <a:rPr lang="en-US" b="1"/>
+              <a:t>Tossing coin 1000 times - histogram</a:t>
+            </a:r>
+          </a:p>
+        </p:txBody>
+      </p:sp>
+      <p:pic>
+        <p:nvPicPr>
+          <p:cNvPr id="3" name="Picture 2">
+            <a:extLst>
+              <a:ext uri="{FF2B5EF4-FFF2-40B4-BE49-F238E27FC236}">
+                <a16:creationId xmlns:a16="http://schemas.microsoft.com/office/drawing/2014/main" id="{9C36CE07-1EF4-DC7D-A8CC-98CC43329266}"/>
+              </a:ext>
+            </a:extLst>
+          </p:cNvPr>
+          <p:cNvPicPr>
+            <a:picLocks noChangeAspect="1"/>
+          </p:cNvPicPr>
+          <p:nvPr/>
+        </p:nvPicPr>
+        <p:blipFill>
+          <a:blip r:embed="rId3" cstate="email">
+            <a:extLst>
+              <a:ext uri="{28A0092B-C50C-407E-A947-70E740481C1C}">
+                <a14:useLocalDpi xmlns:a14="http://schemas.microsoft.com/office/drawing/2010/main"/>
+              </a:ext>
+            </a:extLst>
+          </a:blip>
+          <a:stretch>
+            <a:fillRect/>
+          </a:stretch>
+        </p:blipFill>
+        <p:spPr>
+          <a:xfrm>
+            <a:off x="8644005" y="5062325"/>
+            <a:ext cx="3007692" cy="1361974"/>
+          </a:xfrm>
+          <a:prstGeom prst="rect">
+            <a:avLst/>
+          </a:prstGeom>
+        </p:spPr>
+      </p:pic>
+      <p:sp>
+        <p:nvSpPr>
+          <p:cNvPr id="11" name="TextBox 10">
+            <a:extLst>
+              <a:ext uri="{FF2B5EF4-FFF2-40B4-BE49-F238E27FC236}">
+                <a16:creationId xmlns:a16="http://schemas.microsoft.com/office/drawing/2014/main" id="{1CD5EBE0-DEFA-A2A4-1C40-DF8AA3CC11A6}"/>
+              </a:ext>
+            </a:extLst>
+          </p:cNvPr>
+          <p:cNvSpPr txBox="1"/>
+          <p:nvPr/>
+        </p:nvSpPr>
+        <p:spPr>
+          <a:xfrm>
+            <a:off x="8556347" y="4397728"/>
+            <a:ext cx="3183007" cy="523220"/>
+          </a:xfrm>
+          <a:prstGeom prst="rect">
+            <a:avLst/>
+          </a:prstGeom>
+          <a:noFill/>
+        </p:spPr>
+        <p:txBody>
+          <a:bodyPr wrap="square" rtlCol="0">
+            <a:spAutoFit/>
+          </a:bodyPr>
+          <a:lstStyle/>
+          <a:p>
+            <a:pPr algn="ctr"/>
+            <a:r>
+              <a:rPr lang="en-US" b="1"/>
+              <a:t>Tossing dice cube.</a:t>
+            </a:r>
+          </a:p>
+          <a:p>
+            <a:pPr algn="ctr"/>
+            <a:r>
+              <a:rPr lang="en-US" b="1"/>
+              <a:t>Discrete probability distribution</a:t>
+            </a:r>
+          </a:p>
+        </p:txBody>
+      </p:sp>
+      <p:sp>
+        <p:nvSpPr>
+          <p:cNvPr id="9" name="Right Arrow 8">
+            <a:extLst>
+              <a:ext uri="{FF2B5EF4-FFF2-40B4-BE49-F238E27FC236}">
+                <a16:creationId xmlns:a16="http://schemas.microsoft.com/office/drawing/2014/main" id="{2179ECE3-1DD7-2EFF-53C1-8D808998DB41}"/>
+              </a:ext>
+            </a:extLst>
+          </p:cNvPr>
+          <p:cNvSpPr/>
+          <p:nvPr/>
+        </p:nvSpPr>
+        <p:spPr>
+          <a:xfrm rot="20027856">
+            <a:off x="6030310" y="3132806"/>
+            <a:ext cx="2126973" cy="197463"/>
+          </a:xfrm>
+          <a:prstGeom prst="rightArrow">
+            <a:avLst/>
+          </a:prstGeom>
+        </p:spPr>
+        <p:style>
+          <a:lnRef idx="2">
+            <a:schemeClr val="accent1">
+              <a:shade val="50000"/>
+            </a:schemeClr>
+          </a:lnRef>
+          <a:fillRef idx="1">
+            <a:schemeClr val="accent1"/>
+          </a:fillRef>
+          <a:effectRef idx="0">
+            <a:schemeClr val="accent1"/>
+          </a:effectRef>
+          <a:fontRef idx="minor">
+            <a:schemeClr val="lt1"/>
+          </a:fontRef>
+        </p:style>
+        <p:txBody>
+          <a:bodyPr rtlCol="0" anchor="ctr"/>
+          <a:lstStyle/>
+          <a:p>
+            <a:pPr algn="ctr"/>
+            <a:endParaRPr lang="en-US"/>
+          </a:p>
+        </p:txBody>
+      </p:sp>
+      <p:sp>
+        <p:nvSpPr>
+          <p:cNvPr id="13" name="TextBox 12">
+            <a:extLst>
+              <a:ext uri="{FF2B5EF4-FFF2-40B4-BE49-F238E27FC236}">
+                <a16:creationId xmlns:a16="http://schemas.microsoft.com/office/drawing/2014/main" id="{3F3FD789-7828-A84B-EA36-73F9B2D423BA}"/>
+              </a:ext>
+            </a:extLst>
+          </p:cNvPr>
+          <p:cNvSpPr txBox="1"/>
+          <p:nvPr/>
+        </p:nvSpPr>
+        <p:spPr>
+          <a:xfrm>
+            <a:off x="56665" y="5062325"/>
+            <a:ext cx="5906814" cy="1600438"/>
+          </a:xfrm>
+          <a:prstGeom prst="rect">
+            <a:avLst/>
+          </a:prstGeom>
+          <a:solidFill>
+            <a:schemeClr val="accent4">
+              <a:lumMod val="20000"/>
+              <a:lumOff val="80000"/>
+            </a:schemeClr>
+          </a:solidFill>
+        </p:spPr>
+        <p:txBody>
+          <a:bodyPr wrap="square" rtlCol="0">
+            <a:spAutoFit/>
+          </a:bodyPr>
+          <a:lstStyle/>
+          <a:p>
+            <a:r>
+              <a:rPr lang="en-US" b="1" dirty="0">
+                <a:solidFill>
+                  <a:srgbClr val="0070C0"/>
+                </a:solidFill>
+              </a:rPr>
+              <a:t>Expected value (mean) </a:t>
+            </a:r>
+            <a:r>
+              <a:rPr lang="en-US" dirty="0"/>
+              <a:t>is an weighted average of all values.</a:t>
+            </a:r>
+          </a:p>
+          <a:p>
+            <a:endParaRPr lang="en-US" dirty="0"/>
+          </a:p>
+          <a:p>
+            <a:r>
+              <a:rPr lang="en-US" dirty="0"/>
+              <a:t>E(x) = sum(Xi*P(Xi)), where Xi goes through all allowed values of X.</a:t>
+            </a:r>
+          </a:p>
+          <a:p>
+            <a:endParaRPr lang="en-US" dirty="0"/>
+          </a:p>
+          <a:p>
+            <a:r>
+              <a:rPr lang="en-US" b="1" dirty="0">
+                <a:solidFill>
+                  <a:srgbClr val="0070C0"/>
+                </a:solidFill>
+              </a:rPr>
+              <a:t>Variance = sigma squared </a:t>
+            </a:r>
+            <a:r>
+              <a:rPr lang="en-US" dirty="0"/>
+              <a:t>= sum( (Xi-E(x))**2 * P(Xi) )</a:t>
+            </a:r>
+          </a:p>
+          <a:p>
+            <a:endParaRPr lang="en-US" dirty="0"/>
+          </a:p>
+          <a:p>
+            <a:r>
+              <a:rPr lang="en-US" b="1" dirty="0">
+                <a:solidFill>
+                  <a:srgbClr val="0070C0"/>
+                </a:solidFill>
+              </a:rPr>
+              <a:t>Standard Deviation </a:t>
+            </a:r>
+            <a:r>
+              <a:rPr lang="en-US" dirty="0"/>
+              <a:t>= sqrt(sigma squared)</a:t>
+            </a:r>
+          </a:p>
+        </p:txBody>
+      </p:sp>
+      <p:sp>
+        <p:nvSpPr>
+          <p:cNvPr id="10" name="TextBox 9">
+            <a:extLst>
+              <a:ext uri="{FF2B5EF4-FFF2-40B4-BE49-F238E27FC236}">
+                <a16:creationId xmlns:a16="http://schemas.microsoft.com/office/drawing/2014/main" id="{CECA96D9-E3C4-C8AA-7C59-949EC4EC43B2}"/>
+              </a:ext>
+            </a:extLst>
+          </p:cNvPr>
+          <p:cNvSpPr txBox="1"/>
+          <p:nvPr/>
+        </p:nvSpPr>
+        <p:spPr>
+          <a:xfrm>
+            <a:off x="56665" y="2430189"/>
+            <a:ext cx="2544417" cy="369332"/>
+          </a:xfrm>
+          <a:prstGeom prst="rect">
+            <a:avLst/>
+          </a:prstGeom>
+          <a:noFill/>
+        </p:spPr>
+        <p:txBody>
+          <a:bodyPr wrap="square" rtlCol="0">
+            <a:spAutoFit/>
+          </a:bodyPr>
+          <a:lstStyle/>
+          <a:p>
+            <a:r>
+              <a:rPr lang="en-US" sz="1800" b="1" dirty="0">
+                <a:solidFill>
+                  <a:srgbClr val="00B050"/>
                 </a:solidFill>
               </a:rPr>
               <a:t>Discrete Case</a:t>
             </a:r>
           </a:p>
-          <a:p>
-            <a:r>
-              <a:rPr lang="en-US" b="1" dirty="0">
-                <a:solidFill>
-                  <a:srgbClr val="0070C0"/>
-                </a:solidFill>
-              </a:rPr>
-              <a:t>Probability function </a:t>
-            </a:r>
-            <a:r>
-              <a:rPr lang="en-US" dirty="0"/>
-              <a:t>P(x) of a discrete random variable “x” </a:t>
-            </a:r>
-          </a:p>
-          <a:p>
-            <a:r>
-              <a:rPr lang="en-US" dirty="0"/>
-              <a:t>is simply a function which gives probability of discrete values.</a:t>
-            </a:r>
-          </a:p>
-          <a:p>
-            <a:endParaRPr lang="en-US" dirty="0"/>
-          </a:p>
-          <a:p>
-            <a:r>
-              <a:rPr lang="en-US" dirty="0"/>
-              <a:t>For example, if the random variable “x” may have two values: ( 0 or 1 ),</a:t>
-            </a:r>
-          </a:p>
-          <a:p>
-            <a:r>
-              <a:rPr lang="en-US" dirty="0"/>
-              <a:t>and if probabilities of those values are equal, then</a:t>
-            </a:r>
-          </a:p>
-          <a:p>
-            <a:endParaRPr lang="en-US" dirty="0"/>
-          </a:p>
-          <a:p>
-            <a:r>
-              <a:rPr lang="en-US" dirty="0"/>
-              <a:t>P(0) = 0.5, f(1) = 0.5.</a:t>
-            </a:r>
-          </a:p>
-          <a:p>
-            <a:endParaRPr lang="en-US" dirty="0"/>
-          </a:p>
-          <a:p>
-            <a:r>
-              <a:rPr lang="en-US" dirty="0"/>
-              <a:t>The sum of individual probabilities for all possible values should be 1.</a:t>
-            </a:r>
-          </a:p>
-          <a:p>
-            <a:endParaRPr lang="en-US" dirty="0"/>
-          </a:p>
-          <a:p>
-            <a:r>
-              <a:rPr lang="en-US" b="1" dirty="0">
-                <a:solidFill>
-                  <a:srgbClr val="0070C0"/>
-                </a:solidFill>
-              </a:rPr>
-              <a:t>Expected value </a:t>
-            </a:r>
-            <a:r>
-              <a:rPr lang="en-US" dirty="0"/>
-              <a:t>is an weighted average of all values.</a:t>
-            </a:r>
-          </a:p>
-          <a:p>
-            <a:endParaRPr lang="en-US" dirty="0"/>
-          </a:p>
-          <a:p>
-            <a:r>
-              <a:rPr lang="en-US" dirty="0"/>
-              <a:t>E(x) = sum(Xi*P(Xi)), where Xi goes through all allowed values of X.</a:t>
-            </a:r>
-          </a:p>
-          <a:p>
-            <a:endParaRPr lang="en-US" dirty="0"/>
-          </a:p>
-          <a:p>
-            <a:r>
-              <a:rPr lang="en-US" b="1" dirty="0">
-                <a:solidFill>
-                  <a:srgbClr val="0070C0"/>
-                </a:solidFill>
-              </a:rPr>
-              <a:t>Variance = sigma squared </a:t>
-            </a:r>
-            <a:r>
-              <a:rPr lang="en-US" dirty="0"/>
-              <a:t>= sum( (Xi-E(x))**2 * P(Xi) )</a:t>
-            </a:r>
-          </a:p>
-          <a:p>
-            <a:endParaRPr lang="en-US" dirty="0"/>
-          </a:p>
-          <a:p>
-            <a:r>
-              <a:rPr lang="en-US" b="1" dirty="0">
-                <a:solidFill>
-                  <a:srgbClr val="0070C0"/>
-                </a:solidFill>
-              </a:rPr>
-              <a:t>Standard Deviation </a:t>
-            </a:r>
-            <a:r>
-              <a:rPr lang="en-US" dirty="0"/>
-              <a:t>= sqrt(sigma squared)</a:t>
-            </a:r>
-          </a:p>
         </p:txBody>
       </p:sp>
+      <p:sp>
+        <p:nvSpPr>
+          <p:cNvPr id="15" name="Right Arrow 14">
+            <a:extLst>
+              <a:ext uri="{FF2B5EF4-FFF2-40B4-BE49-F238E27FC236}">
+                <a16:creationId xmlns:a16="http://schemas.microsoft.com/office/drawing/2014/main" id="{1D992182-F92F-4DCE-87B0-02D414157027}"/>
+              </a:ext>
+            </a:extLst>
+          </p:cNvPr>
+          <p:cNvSpPr/>
+          <p:nvPr/>
+        </p:nvSpPr>
+        <p:spPr>
+          <a:xfrm rot="16871430">
+            <a:off x="10080669" y="2884162"/>
+            <a:ext cx="311389" cy="104048"/>
+          </a:xfrm>
+          <a:prstGeom prst="rightArrow">
+            <a:avLst/>
+          </a:prstGeom>
+        </p:spPr>
+        <p:style>
+          <a:lnRef idx="2">
+            <a:schemeClr val="accent1">
+              <a:shade val="50000"/>
+            </a:schemeClr>
+          </a:lnRef>
+          <a:fillRef idx="1">
+            <a:schemeClr val="accent1"/>
+          </a:fillRef>
+          <a:effectRef idx="0">
+            <a:schemeClr val="accent1"/>
+          </a:effectRef>
+          <a:fontRef idx="minor">
+            <a:schemeClr val="lt1"/>
+          </a:fontRef>
+        </p:style>
+        <p:txBody>
+          <a:bodyPr rtlCol="0" anchor="ctr"/>
+          <a:lstStyle/>
+          <a:p>
+            <a:pPr algn="ctr"/>
+            <a:endParaRPr lang="en-US"/>
+          </a:p>
+        </p:txBody>
+      </p:sp>
+      <p:sp>
+        <p:nvSpPr>
+          <p:cNvPr id="12" name="TextBox 11">
+            <a:extLst>
+              <a:ext uri="{FF2B5EF4-FFF2-40B4-BE49-F238E27FC236}">
+                <a16:creationId xmlns:a16="http://schemas.microsoft.com/office/drawing/2014/main" id="{91004297-1B9C-4EBA-F160-DF2E7C9154B7}"/>
+              </a:ext>
+            </a:extLst>
+          </p:cNvPr>
+          <p:cNvSpPr txBox="1"/>
+          <p:nvPr/>
+        </p:nvSpPr>
+        <p:spPr>
+          <a:xfrm>
+            <a:off x="9471827" y="3116590"/>
+            <a:ext cx="1497496" cy="523220"/>
+          </a:xfrm>
+          <a:prstGeom prst="rect">
+            <a:avLst/>
+          </a:prstGeom>
+          <a:noFill/>
+        </p:spPr>
+        <p:txBody>
+          <a:bodyPr wrap="square" rtlCol="0">
+            <a:spAutoFit/>
+          </a:bodyPr>
+          <a:lstStyle/>
+          <a:p>
+            <a:pPr algn="ctr"/>
+            <a:r>
+              <a:rPr lang="en-US"/>
+              <a:t>Expected Value</a:t>
+            </a:r>
+          </a:p>
+          <a:p>
+            <a:pPr algn="ctr"/>
+            <a:r>
+              <a:rPr lang="en-US"/>
+              <a:t>( mean )</a:t>
+            </a:r>
+          </a:p>
+        </p:txBody>
+      </p:sp>
+    </p:spTree>
+    <p:extLst>
+      <p:ext uri="{BB962C8B-B14F-4D97-AF65-F5344CB8AC3E}">
+        <p14:creationId xmlns:p14="http://schemas.microsoft.com/office/powerpoint/2010/main" val="2249432796"/>
+      </p:ext>
+    </p:extLst>
+  </p:cSld>
+  <p:clrMapOvr>
+    <a:masterClrMapping/>
+  </p:clrMapOvr>
+</p:sld>
+</file>
+
+<file path=ppt/slides/slide11.xml><?xml version="1.0" encoding="utf-8"?>
+<p:sld xmlns:a="http://schemas.openxmlformats.org/drawingml/2006/main" xmlns:r="http://schemas.openxmlformats.org/officeDocument/2006/relationships" xmlns:p="http://schemas.openxmlformats.org/presentationml/2006/main">
+  <p:cSld>
+    <p:spTree>
+      <p:nvGrpSpPr>
+        <p:cNvPr id="1" name=""/>
+        <p:cNvGrpSpPr/>
+        <p:nvPr/>
+      </p:nvGrpSpPr>
+      <p:grpSpPr>
+        <a:xfrm>
+          <a:off x="0" y="0"/>
+          <a:ext cx="0" cy="0"/>
+          <a:chOff x="0" y="0"/>
+          <a:chExt cx="0" cy="0"/>
+        </a:xfrm>
+      </p:grpSpPr>
       <p:sp>
         <p:nvSpPr>
           <p:cNvPr id="5" name="TextBox 4">
@@ -14869,8 +15886,220 @@
         </p:nvSpPr>
         <p:spPr>
           <a:xfrm>
-            <a:off x="5991726" y="178676"/>
-            <a:ext cx="6200274" cy="6494085"/>
+            <a:off x="137491" y="1168736"/>
+            <a:ext cx="5463207" cy="4401205"/>
+          </a:xfrm>
+          <a:prstGeom prst="rect">
+            <a:avLst/>
+          </a:prstGeom>
+          <a:solidFill>
+            <a:schemeClr val="accent4">
+              <a:lumMod val="20000"/>
+              <a:lumOff val="80000"/>
+            </a:schemeClr>
+          </a:solidFill>
+        </p:spPr>
+        <p:txBody>
+          <a:bodyPr wrap="square" rtlCol="0">
+            <a:spAutoFit/>
+          </a:bodyPr>
+          <a:lstStyle/>
+          <a:p>
+            <a:r>
+              <a:rPr lang="en-US" b="1" dirty="0">
+                <a:solidFill>
+                  <a:srgbClr val="0070C0"/>
+                </a:solidFill>
+              </a:rPr>
+              <a:t>Probability Density Function (PDF)</a:t>
+            </a:r>
+            <a:r>
+              <a:rPr lang="en-US" dirty="0"/>
+              <a:t> </a:t>
+            </a:r>
+          </a:p>
+          <a:p>
+            <a:endParaRPr lang="en-US" dirty="0"/>
+          </a:p>
+          <a:p>
+            <a:r>
+              <a:rPr lang="en-US" dirty="0"/>
+              <a:t>f(x) is a continuous function.</a:t>
+            </a:r>
+          </a:p>
+          <a:p>
+            <a:endParaRPr lang="en-US" dirty="0"/>
+          </a:p>
+          <a:p>
+            <a:r>
+              <a:rPr lang="en-US" dirty="0"/>
+              <a:t>f(x)*dx gives probability that value is between x and </a:t>
+            </a:r>
+            <a:r>
+              <a:rPr lang="en-US" dirty="0" err="1"/>
+              <a:t>x+dx</a:t>
+            </a:r>
+            <a:r>
+              <a:rPr lang="en-US" dirty="0"/>
+              <a:t>.</a:t>
+            </a:r>
+          </a:p>
+          <a:p>
+            <a:endParaRPr lang="en-US" dirty="0"/>
+          </a:p>
+          <a:p>
+            <a:r>
+              <a:rPr lang="en-US" dirty="0"/>
+              <a:t>The total integral of f(x)*dx should be equal to 1.</a:t>
+            </a:r>
+          </a:p>
+          <a:p>
+            <a:endParaRPr lang="en-US" dirty="0"/>
+          </a:p>
+          <a:p>
+            <a:endParaRPr lang="en-US" dirty="0"/>
+          </a:p>
+          <a:p>
+            <a:r>
+              <a:rPr lang="en-US" b="1" dirty="0">
+                <a:solidFill>
+                  <a:srgbClr val="0070C0"/>
+                </a:solidFill>
+              </a:rPr>
+              <a:t>Cumulative Probability Function (CPF)</a:t>
+            </a:r>
+          </a:p>
+          <a:p>
+            <a:endParaRPr lang="en-US" dirty="0"/>
+          </a:p>
+          <a:p>
+            <a:r>
+              <a:rPr lang="en-US" dirty="0"/>
+              <a:t>This is simply a function F(x) </a:t>
+            </a:r>
+          </a:p>
+          <a:p>
+            <a:r>
+              <a:rPr lang="en-US" dirty="0"/>
+              <a:t>    which gives probability that value is less than x.</a:t>
+            </a:r>
+          </a:p>
+          <a:p>
+            <a:r>
+              <a:rPr lang="en-US" dirty="0"/>
+              <a:t>It is </a:t>
+            </a:r>
+            <a:r>
+              <a:rPr lang="en-US"/>
+              <a:t>monotonically increasing</a:t>
+            </a:r>
+            <a:r>
+              <a:rPr lang="en-US" dirty="0"/>
+              <a:t> from 0 to 1 </a:t>
+            </a:r>
+          </a:p>
+          <a:p>
+            <a:r>
+              <a:rPr lang="en-US" dirty="0"/>
+              <a:t>    as x grows (from small to large values).</a:t>
+            </a:r>
+          </a:p>
+          <a:p>
+            <a:endParaRPr lang="en-US" dirty="0"/>
+          </a:p>
+          <a:p>
+            <a:endParaRPr lang="en-US" dirty="0"/>
+          </a:p>
+          <a:p>
+            <a:r>
+              <a:rPr lang="en-US" b="1" dirty="0">
+                <a:solidFill>
+                  <a:srgbClr val="0070C0"/>
+                </a:solidFill>
+              </a:rPr>
+              <a:t>The PDF is a first derivative of CPF.</a:t>
+            </a:r>
+            <a:endParaRPr lang="en-US" dirty="0"/>
+          </a:p>
+          <a:p>
+            <a:endParaRPr lang="en-US" dirty="0"/>
+          </a:p>
+          <a:p>
+            <a:r>
+              <a:rPr lang="en-US" dirty="0"/>
+              <a:t>CPF(</a:t>
+            </a:r>
+            <a:r>
+              <a:rPr lang="en-US" dirty="0" err="1"/>
+              <a:t>x+dx</a:t>
+            </a:r>
+            <a:r>
+              <a:rPr lang="en-US" dirty="0"/>
+              <a:t>) – CPF(x) == [Prob &lt; (</a:t>
+            </a:r>
+            <a:r>
+              <a:rPr lang="en-US" dirty="0" err="1"/>
+              <a:t>x+dx</a:t>
+            </a:r>
+            <a:r>
+              <a:rPr lang="en-US" dirty="0"/>
+              <a:t>)] – [Prob &lt; x] = f(x)*dx</a:t>
+            </a:r>
+          </a:p>
+        </p:txBody>
+      </p:sp>
+      <p:pic>
+        <p:nvPicPr>
+          <p:cNvPr id="6" name="Picture 5">
+            <a:extLst>
+              <a:ext uri="{FF2B5EF4-FFF2-40B4-BE49-F238E27FC236}">
+                <a16:creationId xmlns:a16="http://schemas.microsoft.com/office/drawing/2014/main" id="{D4A65814-4D7C-A975-4423-2C654186F4FE}"/>
+              </a:ext>
+            </a:extLst>
+          </p:cNvPr>
+          <p:cNvPicPr>
+            <a:picLocks noChangeAspect="1"/>
+          </p:cNvPicPr>
+          <p:nvPr/>
+        </p:nvPicPr>
+        <p:blipFill>
+          <a:blip r:embed="rId2" cstate="email">
+            <a:extLst>
+              <a:ext uri="{28A0092B-C50C-407E-A947-70E740481C1C}">
+                <a14:useLocalDpi xmlns:a14="http://schemas.microsoft.com/office/drawing/2010/main"/>
+              </a:ext>
+            </a:extLst>
+          </a:blip>
+          <a:stretch>
+            <a:fillRect/>
+          </a:stretch>
+        </p:blipFill>
+        <p:spPr>
+          <a:xfrm>
+            <a:off x="5738192" y="1657625"/>
+            <a:ext cx="6221648" cy="2821609"/>
+          </a:xfrm>
+          <a:prstGeom prst="rect">
+            <a:avLst/>
+          </a:prstGeom>
+        </p:spPr>
+      </p:pic>
+      <p:sp>
+        <p:nvSpPr>
+          <p:cNvPr id="7" name="TextBox 6">
+            <a:extLst>
+              <a:ext uri="{FF2B5EF4-FFF2-40B4-BE49-F238E27FC236}">
+                <a16:creationId xmlns:a16="http://schemas.microsoft.com/office/drawing/2014/main" id="{9DD8A69E-372A-BCAF-83AC-7EA9C66C6AB1}"/>
+              </a:ext>
+            </a:extLst>
+          </p:cNvPr>
+          <p:cNvSpPr txBox="1"/>
+          <p:nvPr/>
+        </p:nvSpPr>
+        <p:spPr>
+          <a:xfrm>
+            <a:off x="6591302" y="384313"/>
+            <a:ext cx="4876800" cy="646331"/>
           </a:xfrm>
           <a:prstGeom prst="rect">
             <a:avLst/>
@@ -14884,157 +16113,129 @@
           <a:lstStyle/>
           <a:p>
             <a:r>
-              <a:rPr lang="en-US" dirty="0"/>
+              <a:rPr lang="en-US" sz="1800" dirty="0">
+                <a:solidFill>
+                  <a:srgbClr val="00B050"/>
+                </a:solidFill>
+              </a:rPr>
               <a:t>Probability Density Function (</a:t>
             </a:r>
             <a:r>
-              <a:rPr lang="en-US" b="1" dirty="0"/>
+              <a:rPr lang="en-US" sz="1800" b="1" dirty="0">
+                <a:solidFill>
+                  <a:srgbClr val="00B050"/>
+                </a:solidFill>
+              </a:rPr>
               <a:t>PDF</a:t>
             </a:r>
             <a:r>
-              <a:rPr lang="en-US" dirty="0"/>
+              <a:rPr lang="en-US" sz="1800" dirty="0">
+                <a:solidFill>
+                  <a:srgbClr val="00B050"/>
+                </a:solidFill>
+              </a:rPr>
               <a:t>)  </a:t>
             </a:r>
           </a:p>
           <a:p>
             <a:r>
-              <a:rPr lang="en-US" dirty="0"/>
+              <a:rPr lang="en-US" sz="1800" dirty="0">
+                <a:solidFill>
+                  <a:srgbClr val="00B050"/>
+                </a:solidFill>
+              </a:rPr>
               <a:t>vs.  Cumulative Probability Function ( </a:t>
             </a:r>
             <a:r>
-              <a:rPr lang="en-US" b="1" dirty="0"/>
+              <a:rPr lang="en-US" sz="1800" b="1" dirty="0">
+                <a:solidFill>
+                  <a:srgbClr val="00B050"/>
+                </a:solidFill>
+              </a:rPr>
               <a:t>CPF</a:t>
             </a:r>
             <a:r>
-              <a:rPr lang="en-US" dirty="0"/>
+              <a:rPr lang="en-US" sz="1800" dirty="0">
+                <a:solidFill>
+                  <a:srgbClr val="00B050"/>
+                </a:solidFill>
+              </a:rPr>
               <a:t>)</a:t>
             </a:r>
           </a:p>
-          <a:p>
-            <a:endParaRPr lang="en-US" dirty="0"/>
-          </a:p>
-          <a:p>
-            <a:r>
-              <a:rPr lang="en-US" sz="2400" b="1" dirty="0">
-                <a:solidFill>
-                  <a:srgbClr val="FF0000"/>
+        </p:txBody>
+      </p:sp>
+      <p:sp>
+        <p:nvSpPr>
+          <p:cNvPr id="9" name="TextBox 8">
+            <a:extLst>
+              <a:ext uri="{FF2B5EF4-FFF2-40B4-BE49-F238E27FC236}">
+                <a16:creationId xmlns:a16="http://schemas.microsoft.com/office/drawing/2014/main" id="{07EC1BEC-30F9-B89D-5EE0-89B3AF73A26D}"/>
+              </a:ext>
+            </a:extLst>
+          </p:cNvPr>
+          <p:cNvSpPr txBox="1"/>
+          <p:nvPr/>
+        </p:nvSpPr>
+        <p:spPr>
+          <a:xfrm>
+            <a:off x="137491" y="707478"/>
+            <a:ext cx="3322980" cy="369332"/>
+          </a:xfrm>
+          <a:prstGeom prst="rect">
+            <a:avLst/>
+          </a:prstGeom>
+          <a:noFill/>
+        </p:spPr>
+        <p:txBody>
+          <a:bodyPr wrap="square" rtlCol="0">
+            <a:spAutoFit/>
+          </a:bodyPr>
+          <a:lstStyle/>
+          <a:p>
+            <a:r>
+              <a:rPr lang="en-US" sz="1800" b="1" dirty="0">
+                <a:solidFill>
+                  <a:srgbClr val="00B050"/>
                 </a:solidFill>
               </a:rPr>
               <a:t>Continuous Case</a:t>
             </a:r>
           </a:p>
-          <a:p>
-            <a:endParaRPr lang="en-US" dirty="0"/>
-          </a:p>
-          <a:p>
-            <a:r>
-              <a:rPr lang="en-US" b="1" dirty="0">
-                <a:solidFill>
-                  <a:srgbClr val="0070C0"/>
-                </a:solidFill>
-              </a:rPr>
-              <a:t>Probability Density Function (PDF)</a:t>
-            </a:r>
-            <a:r>
-              <a:rPr lang="en-US" dirty="0"/>
-              <a:t> f(x) is a continuous function.</a:t>
-            </a:r>
-          </a:p>
-          <a:p>
-            <a:endParaRPr lang="en-US" dirty="0"/>
-          </a:p>
-          <a:p>
-            <a:r>
-              <a:rPr lang="en-US" dirty="0"/>
-              <a:t>f(x)*dx gives probability that value is between x and </a:t>
-            </a:r>
-            <a:r>
-              <a:rPr lang="en-US" dirty="0" err="1"/>
-              <a:t>x+dx</a:t>
-            </a:r>
-            <a:r>
-              <a:rPr lang="en-US" dirty="0"/>
-              <a:t>.</a:t>
-            </a:r>
-          </a:p>
-          <a:p>
-            <a:endParaRPr lang="en-US" dirty="0"/>
-          </a:p>
-          <a:p>
-            <a:r>
-              <a:rPr lang="en-US" dirty="0"/>
-              <a:t>The total integral of f(x)*dx should be equal to 1.</a:t>
-            </a:r>
-          </a:p>
-          <a:p>
-            <a:endParaRPr lang="en-US" dirty="0"/>
-          </a:p>
-          <a:p>
-            <a:r>
-              <a:rPr lang="en-US" b="1" dirty="0">
-                <a:solidFill>
-                  <a:srgbClr val="0070C0"/>
-                </a:solidFill>
-              </a:rPr>
-              <a:t>Cumulative Probability Function (CPF)</a:t>
-            </a:r>
-          </a:p>
-          <a:p>
-            <a:r>
-              <a:rPr lang="en-US" dirty="0"/>
-              <a:t>This is simply a function F(x) which gives probability that value is less than x.</a:t>
-            </a:r>
-          </a:p>
-          <a:p>
-            <a:r>
-              <a:rPr lang="en-US" dirty="0"/>
-              <a:t>It monotonously grows from 0 to 1 as x grows (from small to large values).</a:t>
-            </a:r>
-          </a:p>
-          <a:p>
-            <a:endParaRPr lang="en-US" dirty="0"/>
-          </a:p>
-          <a:p>
-            <a:endParaRPr lang="en-US" dirty="0"/>
-          </a:p>
-          <a:p>
-            <a:r>
-              <a:rPr lang="en-US" b="1" dirty="0">
-                <a:solidFill>
-                  <a:srgbClr val="0070C0"/>
-                </a:solidFill>
-              </a:rPr>
-              <a:t>The PDF is a first derivative of CPF.</a:t>
-            </a:r>
-          </a:p>
-          <a:p>
-            <a:endParaRPr lang="en-US" dirty="0"/>
-          </a:p>
-          <a:p>
-            <a:r>
-              <a:rPr lang="en-US" dirty="0"/>
-              <a:t>CPF(</a:t>
-            </a:r>
-            <a:r>
-              <a:rPr lang="en-US" dirty="0" err="1"/>
-              <a:t>x+dx</a:t>
-            </a:r>
-            <a:r>
-              <a:rPr lang="en-US" dirty="0"/>
-              <a:t>) – CPF(x) = = [Prob. of value &lt; (</a:t>
-            </a:r>
-            <a:r>
-              <a:rPr lang="en-US" dirty="0" err="1"/>
-              <a:t>x+dx</a:t>
-            </a:r>
-            <a:r>
-              <a:rPr lang="en-US" dirty="0"/>
-              <a:t>)] – [Prob. of value &lt; x] = f(x)*dx</a:t>
-            </a:r>
-          </a:p>
-          <a:p>
-            <a:endParaRPr lang="en-US" dirty="0"/>
-          </a:p>
+        </p:txBody>
+      </p:sp>
+      <p:sp>
+        <p:nvSpPr>
+          <p:cNvPr id="10" name="TextBox 9">
+            <a:extLst>
+              <a:ext uri="{FF2B5EF4-FFF2-40B4-BE49-F238E27FC236}">
+                <a16:creationId xmlns:a16="http://schemas.microsoft.com/office/drawing/2014/main" id="{7C28A159-EC1E-0D11-BBAA-B563CEAD9049}"/>
+              </a:ext>
+            </a:extLst>
+          </p:cNvPr>
+          <p:cNvSpPr txBox="1"/>
+          <p:nvPr/>
+        </p:nvSpPr>
+        <p:spPr>
+          <a:xfrm>
+            <a:off x="7399686" y="5106215"/>
+            <a:ext cx="3467097" cy="1538883"/>
+          </a:xfrm>
+          <a:prstGeom prst="rect">
+            <a:avLst/>
+          </a:prstGeom>
+          <a:solidFill>
+            <a:schemeClr val="accent4">
+              <a:lumMod val="20000"/>
+              <a:lumOff val="80000"/>
+            </a:schemeClr>
+          </a:solidFill>
+        </p:spPr>
+        <p:txBody>
+          <a:bodyPr wrap="square" rtlCol="0">
+            <a:spAutoFit/>
+          </a:bodyPr>
+          <a:lstStyle/>
           <a:p>
             <a:r>
               <a:rPr lang="en-US" b="1" dirty="0">
@@ -15044,6 +16245,7 @@
               </a:rPr>
               <a:t>Mean value = Expected value</a:t>
             </a:r>
+            <a:endParaRPr lang="en-US" dirty="0"/>
           </a:p>
           <a:p>
             <a:endParaRPr lang="en-US" dirty="0"/>
@@ -15056,8 +16258,15 @@
           </a:p>
           <a:p>
             <a:r>
-              <a:rPr lang="en-US" dirty="0"/>
-              <a:t>E(x) = sum(Xi*P(Xi))</a:t>
+              <a:rPr lang="en-US" sz="1200" b="1" dirty="0">
+                <a:solidFill>
+                  <a:srgbClr val="00B0F0"/>
+                </a:solidFill>
+                <a:latin typeface="Menlo" panose="020B0609030804020204" pitchFamily="49" charset="0"/>
+                <a:ea typeface="Menlo" panose="020B0609030804020204" pitchFamily="49" charset="0"/>
+                <a:cs typeface="Menlo" panose="020B0609030804020204" pitchFamily="49" charset="0"/>
+              </a:rPr>
+              <a:t>    E(x) = sum(Xi*P(Xi))</a:t>
             </a:r>
           </a:p>
           <a:p>
@@ -15071,24 +16280,1688 @@
           </a:p>
           <a:p>
             <a:r>
-              <a:rPr lang="en-US" dirty="0"/>
-              <a:t>E(x) = Integral(</a:t>
-            </a:r>
-            <a:r>
-              <a:rPr lang="en-US" dirty="0" err="1"/>
+              <a:rPr lang="en-US" sz="1200" b="1" dirty="0">
+                <a:solidFill>
+                  <a:srgbClr val="00B0F0"/>
+                </a:solidFill>
+                <a:latin typeface="Menlo" panose="020B0609030804020204" pitchFamily="49" charset="0"/>
+                <a:ea typeface="Menlo" panose="020B0609030804020204" pitchFamily="49" charset="0"/>
+                <a:cs typeface="Menlo" panose="020B0609030804020204" pitchFamily="49" charset="0"/>
+              </a:rPr>
+              <a:t>    E(x) = Integral(</a:t>
+            </a:r>
+            <a:r>
+              <a:rPr lang="en-US" sz="1200" b="1" dirty="0" err="1">
+                <a:solidFill>
+                  <a:srgbClr val="00B0F0"/>
+                </a:solidFill>
+                <a:latin typeface="Menlo" panose="020B0609030804020204" pitchFamily="49" charset="0"/>
+                <a:ea typeface="Menlo" panose="020B0609030804020204" pitchFamily="49" charset="0"/>
+                <a:cs typeface="Menlo" panose="020B0609030804020204" pitchFamily="49" charset="0"/>
+              </a:rPr>
               <a:t>xF</a:t>
             </a:r>
             <a:r>
-              <a:rPr lang="en-US" dirty="0"/>
+              <a:rPr lang="en-US" sz="1200" b="1" dirty="0">
+                <a:solidFill>
+                  <a:srgbClr val="00B0F0"/>
+                </a:solidFill>
+                <a:latin typeface="Menlo" panose="020B0609030804020204" pitchFamily="49" charset="0"/>
+                <a:ea typeface="Menlo" panose="020B0609030804020204" pitchFamily="49" charset="0"/>
+                <a:cs typeface="Menlo" panose="020B0609030804020204" pitchFamily="49" charset="0"/>
+              </a:rPr>
               <a:t>(x)dx)</a:t>
             </a:r>
+          </a:p>
+        </p:txBody>
+      </p:sp>
+      <p:sp>
+        <p:nvSpPr>
+          <p:cNvPr id="8" name="TextBox 7">
+            <a:extLst>
+              <a:ext uri="{FF2B5EF4-FFF2-40B4-BE49-F238E27FC236}">
+                <a16:creationId xmlns:a16="http://schemas.microsoft.com/office/drawing/2014/main" id="{79C332C1-9113-5317-45E7-1683E8BB5333}"/>
+              </a:ext>
+            </a:extLst>
+          </p:cNvPr>
+          <p:cNvSpPr txBox="1"/>
+          <p:nvPr/>
+        </p:nvSpPr>
+        <p:spPr>
+          <a:xfrm>
+            <a:off x="0" y="0"/>
+            <a:ext cx="4465983" cy="523220"/>
+          </a:xfrm>
+          <a:prstGeom prst="rect">
+            <a:avLst/>
+          </a:prstGeom>
+          <a:noFill/>
+        </p:spPr>
+        <p:txBody>
+          <a:bodyPr wrap="square" rtlCol="0">
+            <a:spAutoFit/>
+          </a:bodyPr>
+          <a:lstStyle/>
+          <a:p>
+            <a:r>
+              <a:rPr lang="en-US" sz="2800" b="1" dirty="0"/>
+              <a:t>Probability Distribution</a:t>
+            </a:r>
+            <a:endParaRPr lang="en-US" sz="2800"/>
           </a:p>
         </p:txBody>
       </p:sp>
     </p:spTree>
     <p:extLst>
       <p:ext uri="{BB962C8B-B14F-4D97-AF65-F5344CB8AC3E}">
-        <p14:creationId xmlns:p14="http://schemas.microsoft.com/office/powerpoint/2010/main" val="2249432796"/>
+        <p14:creationId xmlns:p14="http://schemas.microsoft.com/office/powerpoint/2010/main" val="618311972"/>
+      </p:ext>
+    </p:extLst>
+  </p:cSld>
+  <p:clrMapOvr>
+    <a:masterClrMapping/>
+  </p:clrMapOvr>
+</p:sld>
+</file>
+
+<file path=ppt/slides/slide12.xml><?xml version="1.0" encoding="utf-8"?>
+<p:sld xmlns:a="http://schemas.openxmlformats.org/drawingml/2006/main" xmlns:r="http://schemas.openxmlformats.org/officeDocument/2006/relationships" xmlns:p="http://schemas.openxmlformats.org/presentationml/2006/main">
+  <p:cSld>
+    <p:spTree>
+      <p:nvGrpSpPr>
+        <p:cNvPr id="1" name="Shape 94"/>
+        <p:cNvGrpSpPr/>
+        <p:nvPr/>
+      </p:nvGrpSpPr>
+      <p:grpSpPr>
+        <a:xfrm>
+          <a:off x="0" y="0"/>
+          <a:ext cx="0" cy="0"/>
+          <a:chOff x="0" y="0"/>
+          <a:chExt cx="0" cy="0"/>
+        </a:xfrm>
+      </p:grpSpPr>
+      <p:sp>
+        <p:nvSpPr>
+          <p:cNvPr id="95" name="Google Shape;95;p14"/>
+          <p:cNvSpPr txBox="1"/>
+          <p:nvPr/>
+        </p:nvSpPr>
+        <p:spPr>
+          <a:xfrm>
+            <a:off x="0" y="0"/>
+            <a:ext cx="5802900" cy="6757500"/>
+          </a:xfrm>
+          <a:prstGeom prst="rect">
+            <a:avLst/>
+          </a:prstGeom>
+          <a:noFill/>
+          <a:ln>
+            <a:noFill/>
+          </a:ln>
+        </p:spPr>
+        <p:txBody>
+          <a:bodyPr spcFirstLastPara="1" wrap="square" lIns="91425" tIns="91425" rIns="91425" bIns="91425" anchor="t" anchorCtr="0">
+            <a:noAutofit/>
+          </a:bodyPr>
+          <a:lstStyle/>
+          <a:p>
+            <a:pPr marL="0" lvl="0" indent="0" algn="l" rtl="0">
+              <a:spcBef>
+                <a:spcPts val="0"/>
+              </a:spcBef>
+              <a:spcAft>
+                <a:spcPts val="0"/>
+              </a:spcAft>
+              <a:buClr>
+                <a:schemeClr val="dk1"/>
+              </a:buClr>
+              <a:buSzPts val="1100"/>
+              <a:buFont typeface="Arial"/>
+              <a:buNone/>
+            </a:pPr>
+            <a:r>
+              <a:rPr lang="en-US" sz="3000" b="1" dirty="0">
+                <a:latin typeface="Calibri" panose="020F0502020204030204" pitchFamily="34" charset="0"/>
+                <a:ea typeface="Calibri"/>
+                <a:cs typeface="Calibri" panose="020F0502020204030204" pitchFamily="34" charset="0"/>
+                <a:sym typeface="Calibri"/>
+              </a:rPr>
+              <a:t>Central Limit Theorem (CLT)</a:t>
+            </a:r>
+            <a:endParaRPr sz="3000" b="1" dirty="0">
+              <a:latin typeface="Calibri" panose="020F0502020204030204" pitchFamily="34" charset="0"/>
+              <a:ea typeface="Calibri"/>
+              <a:cs typeface="Calibri" panose="020F0502020204030204" pitchFamily="34" charset="0"/>
+              <a:sym typeface="Calibri"/>
+            </a:endParaRPr>
+          </a:p>
+          <a:p>
+            <a:pPr marL="0" lvl="0" indent="0" algn="l" rtl="0">
+              <a:spcBef>
+                <a:spcPts val="0"/>
+              </a:spcBef>
+              <a:spcAft>
+                <a:spcPts val="0"/>
+              </a:spcAft>
+              <a:buNone/>
+            </a:pPr>
+            <a:endParaRPr dirty="0">
+              <a:latin typeface="Calibri" panose="020F0502020204030204" pitchFamily="34" charset="0"/>
+              <a:ea typeface="Calibri"/>
+              <a:cs typeface="Calibri" panose="020F0502020204030204" pitchFamily="34" charset="0"/>
+              <a:sym typeface="Calibri"/>
+            </a:endParaRPr>
+          </a:p>
+          <a:p>
+            <a:pPr marL="0" lvl="0" indent="0" algn="l" rtl="0">
+              <a:spcBef>
+                <a:spcPts val="0"/>
+              </a:spcBef>
+              <a:spcAft>
+                <a:spcPts val="0"/>
+              </a:spcAft>
+              <a:buNone/>
+            </a:pPr>
+            <a:r>
+              <a:rPr lang="en-US" dirty="0">
+                <a:latin typeface="Calibri" panose="020F0502020204030204" pitchFamily="34" charset="0"/>
+                <a:ea typeface="Calibri"/>
+                <a:cs typeface="Calibri" panose="020F0502020204030204" pitchFamily="34" charset="0"/>
+                <a:sym typeface="Calibri"/>
+              </a:rPr>
+              <a:t>We have all heard about </a:t>
+            </a:r>
+            <a:r>
+              <a:rPr lang="en-US" sz="1800" b="1" dirty="0">
+                <a:solidFill>
+                  <a:srgbClr val="0070C0"/>
+                </a:solidFill>
+                <a:latin typeface="Calibri" panose="020F0502020204030204" pitchFamily="34" charset="0"/>
+                <a:ea typeface="Calibri"/>
+                <a:cs typeface="Calibri" panose="020F0502020204030204" pitchFamily="34" charset="0"/>
+                <a:sym typeface="Calibri"/>
+              </a:rPr>
+              <a:t>Normal (Gaussian) distribution</a:t>
+            </a:r>
+            <a:r>
+              <a:rPr lang="en-US" dirty="0">
+                <a:latin typeface="Calibri" panose="020F0502020204030204" pitchFamily="34" charset="0"/>
+                <a:ea typeface="Calibri"/>
+                <a:cs typeface="Calibri" panose="020F0502020204030204" pitchFamily="34" charset="0"/>
+                <a:sym typeface="Calibri"/>
+              </a:rPr>
+              <a:t>.</a:t>
+            </a:r>
+            <a:endParaRPr dirty="0">
+              <a:latin typeface="Calibri" panose="020F0502020204030204" pitchFamily="34" charset="0"/>
+              <a:ea typeface="Calibri"/>
+              <a:cs typeface="Calibri" panose="020F0502020204030204" pitchFamily="34" charset="0"/>
+              <a:sym typeface="Calibri"/>
+            </a:endParaRPr>
+          </a:p>
+          <a:p>
+            <a:pPr marL="0" lvl="0" indent="0" algn="l" rtl="0">
+              <a:spcBef>
+                <a:spcPts val="0"/>
+              </a:spcBef>
+              <a:spcAft>
+                <a:spcPts val="0"/>
+              </a:spcAft>
+              <a:buClr>
+                <a:schemeClr val="dk1"/>
+              </a:buClr>
+              <a:buSzPts val="1100"/>
+              <a:buFont typeface="Arial"/>
+              <a:buNone/>
+            </a:pPr>
+            <a:r>
+              <a:rPr lang="en-US" dirty="0">
+                <a:latin typeface="Calibri" panose="020F0502020204030204" pitchFamily="34" charset="0"/>
+                <a:ea typeface="Calibri"/>
+                <a:cs typeface="Calibri" panose="020F0502020204030204" pitchFamily="34" charset="0"/>
+                <a:sym typeface="Calibri"/>
+              </a:rPr>
+              <a:t>This distribution is very foundational in statistics. And </a:t>
+            </a:r>
+            <a:r>
+              <a:rPr lang="en-US" b="1" dirty="0">
+                <a:solidFill>
+                  <a:srgbClr val="0070C0"/>
+                </a:solidFill>
+                <a:latin typeface="Calibri" panose="020F0502020204030204" pitchFamily="34" charset="0"/>
+                <a:ea typeface="Calibri"/>
+                <a:cs typeface="Calibri" panose="020F0502020204030204" pitchFamily="34" charset="0"/>
+                <a:sym typeface="Calibri"/>
+              </a:rPr>
+              <a:t>it comes from CLT</a:t>
+            </a:r>
+            <a:r>
+              <a:rPr lang="en-US" dirty="0">
+                <a:latin typeface="Calibri" panose="020F0502020204030204" pitchFamily="34" charset="0"/>
+                <a:ea typeface="Calibri"/>
+                <a:cs typeface="Calibri" panose="020F0502020204030204" pitchFamily="34" charset="0"/>
+                <a:sym typeface="Calibri"/>
+              </a:rPr>
+              <a:t>.</a:t>
+            </a:r>
+            <a:endParaRPr dirty="0">
+              <a:latin typeface="Calibri" panose="020F0502020204030204" pitchFamily="34" charset="0"/>
+              <a:ea typeface="Calibri"/>
+              <a:cs typeface="Calibri" panose="020F0502020204030204" pitchFamily="34" charset="0"/>
+              <a:sym typeface="Calibri"/>
+            </a:endParaRPr>
+          </a:p>
+          <a:p>
+            <a:pPr marL="0" lvl="0" indent="0" algn="l" rtl="0">
+              <a:spcBef>
+                <a:spcPts val="0"/>
+              </a:spcBef>
+              <a:spcAft>
+                <a:spcPts val="0"/>
+              </a:spcAft>
+              <a:buClr>
+                <a:schemeClr val="dk1"/>
+              </a:buClr>
+              <a:buSzPts val="1100"/>
+              <a:buFont typeface="Arial"/>
+              <a:buNone/>
+            </a:pPr>
+            <a:endParaRPr dirty="0">
+              <a:latin typeface="Calibri" panose="020F0502020204030204" pitchFamily="34" charset="0"/>
+              <a:ea typeface="Calibri"/>
+              <a:cs typeface="Calibri" panose="020F0502020204030204" pitchFamily="34" charset="0"/>
+              <a:sym typeface="Calibri"/>
+            </a:endParaRPr>
+          </a:p>
+          <a:p>
+            <a:pPr marL="0" lvl="0" indent="0" algn="l" rtl="0">
+              <a:spcBef>
+                <a:spcPts val="0"/>
+              </a:spcBef>
+              <a:spcAft>
+                <a:spcPts val="0"/>
+              </a:spcAft>
+              <a:buClr>
+                <a:schemeClr val="dk1"/>
+              </a:buClr>
+              <a:buSzPts val="1100"/>
+              <a:buFont typeface="Arial"/>
+              <a:buNone/>
+            </a:pPr>
+            <a:r>
+              <a:rPr lang="en-US" dirty="0">
+                <a:latin typeface="Calibri" panose="020F0502020204030204" pitchFamily="34" charset="0"/>
+                <a:ea typeface="Calibri"/>
+                <a:cs typeface="Calibri" panose="020F0502020204030204" pitchFamily="34" charset="0"/>
+                <a:sym typeface="Calibri"/>
+              </a:rPr>
+              <a:t>Classical CLT mathematically proves that if we calculate group averages (sample means) in many groups, then the distribution of those averages converges to Normal distribution as long as we have large number of points in each group (30..100 ...) and large number of groups (30-100 ...).</a:t>
+            </a:r>
+            <a:endParaRPr dirty="0">
+              <a:latin typeface="Calibri" panose="020F0502020204030204" pitchFamily="34" charset="0"/>
+              <a:ea typeface="Calibri"/>
+              <a:cs typeface="Calibri" panose="020F0502020204030204" pitchFamily="34" charset="0"/>
+              <a:sym typeface="Calibri"/>
+            </a:endParaRPr>
+          </a:p>
+          <a:p>
+            <a:pPr marL="0" lvl="0" indent="0" algn="l" rtl="0">
+              <a:spcBef>
+                <a:spcPts val="0"/>
+              </a:spcBef>
+              <a:spcAft>
+                <a:spcPts val="0"/>
+              </a:spcAft>
+              <a:buClr>
+                <a:schemeClr val="dk1"/>
+              </a:buClr>
+              <a:buSzPts val="1100"/>
+              <a:buFont typeface="Arial"/>
+              <a:buNone/>
+            </a:pPr>
+            <a:endParaRPr dirty="0">
+              <a:latin typeface="Calibri" panose="020F0502020204030204" pitchFamily="34" charset="0"/>
+              <a:ea typeface="Calibri"/>
+              <a:cs typeface="Calibri" panose="020F0502020204030204" pitchFamily="34" charset="0"/>
+              <a:sym typeface="Calibri"/>
+            </a:endParaRPr>
+          </a:p>
+          <a:p>
+            <a:pPr marL="0" lvl="0" indent="0" algn="l" rtl="0">
+              <a:spcBef>
+                <a:spcPts val="0"/>
+              </a:spcBef>
+              <a:spcAft>
+                <a:spcPts val="0"/>
+              </a:spcAft>
+              <a:buClr>
+                <a:schemeClr val="dk1"/>
+              </a:buClr>
+              <a:buSzPts val="1100"/>
+              <a:buFont typeface="Arial"/>
+              <a:buNone/>
+            </a:pPr>
+            <a:r>
+              <a:rPr lang="en-US" dirty="0">
+                <a:latin typeface="Calibri" panose="020F0502020204030204" pitchFamily="34" charset="0"/>
+                <a:ea typeface="Calibri"/>
+                <a:cs typeface="Calibri" panose="020F0502020204030204" pitchFamily="34" charset="0"/>
+                <a:sym typeface="Calibri"/>
+              </a:rPr>
+              <a:t>Specifically, suppose we have our data points sampled from a distribution with finite average and finite variance. We subdivide this data into </a:t>
+            </a:r>
+            <a:r>
+              <a:rPr lang="en-US" b="1" dirty="0">
+                <a:solidFill>
+                  <a:srgbClr val="FF0000"/>
+                </a:solidFill>
+                <a:latin typeface="Calibri" panose="020F0502020204030204" pitchFamily="34" charset="0"/>
+                <a:ea typeface="Calibri"/>
+                <a:cs typeface="Calibri" panose="020F0502020204030204" pitchFamily="34" charset="0"/>
+                <a:sym typeface="Calibri"/>
+              </a:rPr>
+              <a:t>Ng</a:t>
+            </a:r>
+            <a:r>
+              <a:rPr lang="en-US" dirty="0">
+                <a:latin typeface="Calibri" panose="020F0502020204030204" pitchFamily="34" charset="0"/>
+                <a:ea typeface="Calibri"/>
+                <a:cs typeface="Calibri" panose="020F0502020204030204" pitchFamily="34" charset="0"/>
+                <a:sym typeface="Calibri"/>
+              </a:rPr>
+              <a:t> groups, each containing Ns samples:</a:t>
+            </a:r>
+            <a:endParaRPr dirty="0">
+              <a:latin typeface="Calibri" panose="020F0502020204030204" pitchFamily="34" charset="0"/>
+              <a:ea typeface="Calibri"/>
+              <a:cs typeface="Calibri" panose="020F0502020204030204" pitchFamily="34" charset="0"/>
+              <a:sym typeface="Calibri"/>
+            </a:endParaRPr>
+          </a:p>
+          <a:p>
+            <a:pPr marL="0" lvl="0" indent="0" algn="l" rtl="0">
+              <a:spcBef>
+                <a:spcPts val="0"/>
+              </a:spcBef>
+              <a:spcAft>
+                <a:spcPts val="0"/>
+              </a:spcAft>
+              <a:buClr>
+                <a:schemeClr val="dk1"/>
+              </a:buClr>
+              <a:buSzPts val="1100"/>
+              <a:buFont typeface="Arial"/>
+              <a:buNone/>
+            </a:pPr>
+            <a:endParaRPr dirty="0">
+              <a:latin typeface="Calibri" panose="020F0502020204030204" pitchFamily="34" charset="0"/>
+              <a:ea typeface="Calibri"/>
+              <a:cs typeface="Calibri" panose="020F0502020204030204" pitchFamily="34" charset="0"/>
+              <a:sym typeface="Calibri"/>
+            </a:endParaRPr>
+          </a:p>
+          <a:p>
+            <a:pPr marL="0" lvl="0" indent="0" algn="l" rtl="0">
+              <a:spcBef>
+                <a:spcPts val="0"/>
+              </a:spcBef>
+              <a:spcAft>
+                <a:spcPts val="0"/>
+              </a:spcAft>
+              <a:buClr>
+                <a:schemeClr val="dk1"/>
+              </a:buClr>
+              <a:buSzPts val="1100"/>
+              <a:buFont typeface="Arial"/>
+              <a:buNone/>
+            </a:pPr>
+            <a:r>
+              <a:rPr lang="en-US" dirty="0">
+                <a:latin typeface="Calibri" panose="020F0502020204030204" pitchFamily="34" charset="0"/>
+                <a:ea typeface="Calibri"/>
+                <a:cs typeface="Calibri" panose="020F0502020204030204" pitchFamily="34" charset="0"/>
+                <a:sym typeface="Calibri"/>
+              </a:rPr>
+              <a:t>              [...]    [...]   [...]   [...]   [...]   [...]   [...]   [...]   [...] </a:t>
+            </a:r>
+            <a:endParaRPr dirty="0">
+              <a:latin typeface="Calibri" panose="020F0502020204030204" pitchFamily="34" charset="0"/>
+              <a:ea typeface="Calibri"/>
+              <a:cs typeface="Calibri" panose="020F0502020204030204" pitchFamily="34" charset="0"/>
+              <a:sym typeface="Calibri"/>
+            </a:endParaRPr>
+          </a:p>
+          <a:p>
+            <a:pPr marL="0" lvl="0" indent="0" algn="l" rtl="0">
+              <a:spcBef>
+                <a:spcPts val="0"/>
+              </a:spcBef>
+              <a:spcAft>
+                <a:spcPts val="0"/>
+              </a:spcAft>
+              <a:buNone/>
+            </a:pPr>
+            <a:endParaRPr dirty="0">
+              <a:latin typeface="Calibri" panose="020F0502020204030204" pitchFamily="34" charset="0"/>
+              <a:ea typeface="Calibri"/>
+              <a:cs typeface="Calibri" panose="020F0502020204030204" pitchFamily="34" charset="0"/>
+              <a:sym typeface="Calibri"/>
+            </a:endParaRPr>
+          </a:p>
+          <a:p>
+            <a:pPr marL="0" lvl="0" indent="0" algn="l" rtl="0">
+              <a:spcBef>
+                <a:spcPts val="0"/>
+              </a:spcBef>
+              <a:spcAft>
+                <a:spcPts val="0"/>
+              </a:spcAft>
+              <a:buClr>
+                <a:schemeClr val="dk1"/>
+              </a:buClr>
+              <a:buSzPts val="1100"/>
+              <a:buFont typeface="Arial"/>
+              <a:buNone/>
+            </a:pPr>
+            <a:r>
+              <a:rPr lang="en-US" dirty="0">
+                <a:latin typeface="Calibri" panose="020F0502020204030204" pitchFamily="34" charset="0"/>
+                <a:ea typeface="Calibri"/>
+                <a:cs typeface="Calibri" panose="020F0502020204030204" pitchFamily="34" charset="0"/>
+                <a:sym typeface="Calibri"/>
+              </a:rPr>
+              <a:t>For each group we calculate average value of its </a:t>
+            </a:r>
+            <a:r>
+              <a:rPr lang="en-US" b="1" dirty="0">
+                <a:solidFill>
+                  <a:srgbClr val="FF0000"/>
+                </a:solidFill>
+                <a:latin typeface="Calibri" panose="020F0502020204030204" pitchFamily="34" charset="0"/>
+                <a:ea typeface="Calibri"/>
+                <a:cs typeface="Calibri" panose="020F0502020204030204" pitchFamily="34" charset="0"/>
+                <a:sym typeface="Calibri"/>
+              </a:rPr>
+              <a:t>Ns</a:t>
+            </a:r>
+            <a:r>
+              <a:rPr lang="en-US" dirty="0">
+                <a:latin typeface="Calibri" panose="020F0502020204030204" pitchFamily="34" charset="0"/>
+                <a:ea typeface="Calibri"/>
+                <a:cs typeface="Calibri" panose="020F0502020204030204" pitchFamily="34" charset="0"/>
+                <a:sym typeface="Calibri"/>
+              </a:rPr>
+              <a:t> samples. Thus we have </a:t>
+            </a:r>
+            <a:r>
+              <a:rPr lang="en-US" b="1" dirty="0">
+                <a:solidFill>
+                  <a:srgbClr val="FF0000"/>
+                </a:solidFill>
+                <a:latin typeface="Calibri" panose="020F0502020204030204" pitchFamily="34" charset="0"/>
+                <a:ea typeface="Calibri"/>
+                <a:cs typeface="Calibri" panose="020F0502020204030204" pitchFamily="34" charset="0"/>
+                <a:sym typeface="Calibri"/>
+              </a:rPr>
+              <a:t>Ng</a:t>
+            </a:r>
+            <a:r>
+              <a:rPr lang="en-US" dirty="0">
+                <a:latin typeface="Calibri" panose="020F0502020204030204" pitchFamily="34" charset="0"/>
+                <a:ea typeface="Calibri"/>
+                <a:cs typeface="Calibri" panose="020F0502020204030204" pitchFamily="34" charset="0"/>
+                <a:sym typeface="Calibri"/>
+              </a:rPr>
+              <a:t> averages values, and we plot them as a histogram.</a:t>
+            </a:r>
+            <a:endParaRPr dirty="0">
+              <a:latin typeface="Calibri" panose="020F0502020204030204" pitchFamily="34" charset="0"/>
+              <a:ea typeface="Calibri"/>
+              <a:cs typeface="Calibri" panose="020F0502020204030204" pitchFamily="34" charset="0"/>
+              <a:sym typeface="Calibri"/>
+            </a:endParaRPr>
+          </a:p>
+          <a:p>
+            <a:pPr marL="0" lvl="0" indent="0" algn="l" rtl="0">
+              <a:spcBef>
+                <a:spcPts val="0"/>
+              </a:spcBef>
+              <a:spcAft>
+                <a:spcPts val="0"/>
+              </a:spcAft>
+              <a:buClr>
+                <a:schemeClr val="dk1"/>
+              </a:buClr>
+              <a:buSzPts val="1100"/>
+              <a:buFont typeface="Arial"/>
+              <a:buNone/>
+            </a:pPr>
+            <a:endParaRPr dirty="0">
+              <a:latin typeface="Calibri" panose="020F0502020204030204" pitchFamily="34" charset="0"/>
+              <a:ea typeface="Calibri"/>
+              <a:cs typeface="Calibri" panose="020F0502020204030204" pitchFamily="34" charset="0"/>
+              <a:sym typeface="Calibri"/>
+            </a:endParaRPr>
+          </a:p>
+          <a:p>
+            <a:pPr marL="0" lvl="0" indent="0" algn="l" rtl="0">
+              <a:spcBef>
+                <a:spcPts val="0"/>
+              </a:spcBef>
+              <a:spcAft>
+                <a:spcPts val="0"/>
+              </a:spcAft>
+              <a:buNone/>
+            </a:pPr>
+            <a:r>
+              <a:rPr lang="en-US" dirty="0">
+                <a:latin typeface="Calibri" panose="020F0502020204030204" pitchFamily="34" charset="0"/>
+                <a:ea typeface="Calibri"/>
+                <a:cs typeface="Calibri" panose="020F0502020204030204" pitchFamily="34" charset="0"/>
+                <a:sym typeface="Calibri"/>
+              </a:rPr>
+              <a:t>If </a:t>
+            </a:r>
+            <a:r>
+              <a:rPr lang="en-US" b="1" dirty="0">
+                <a:solidFill>
+                  <a:srgbClr val="FF0000"/>
+                </a:solidFill>
+                <a:latin typeface="Calibri" panose="020F0502020204030204" pitchFamily="34" charset="0"/>
+                <a:ea typeface="Calibri"/>
+                <a:cs typeface="Calibri" panose="020F0502020204030204" pitchFamily="34" charset="0"/>
+                <a:sym typeface="Calibri"/>
+              </a:rPr>
+              <a:t>Ng</a:t>
+            </a:r>
+            <a:r>
+              <a:rPr lang="en-US" dirty="0">
+                <a:latin typeface="Calibri" panose="020F0502020204030204" pitchFamily="34" charset="0"/>
+                <a:ea typeface="Calibri"/>
+                <a:cs typeface="Calibri" panose="020F0502020204030204" pitchFamily="34" charset="0"/>
+                <a:sym typeface="Calibri"/>
+              </a:rPr>
+              <a:t> and </a:t>
+            </a:r>
+            <a:r>
+              <a:rPr lang="en-US" b="1" dirty="0">
+                <a:solidFill>
+                  <a:srgbClr val="FF0000"/>
+                </a:solidFill>
+                <a:latin typeface="Calibri" panose="020F0502020204030204" pitchFamily="34" charset="0"/>
+                <a:ea typeface="Calibri"/>
+                <a:cs typeface="Calibri" panose="020F0502020204030204" pitchFamily="34" charset="0"/>
+                <a:sym typeface="Calibri"/>
+              </a:rPr>
+              <a:t>Ns</a:t>
+            </a:r>
+            <a:r>
+              <a:rPr lang="en-US" dirty="0">
+                <a:latin typeface="Calibri" panose="020F0502020204030204" pitchFamily="34" charset="0"/>
+                <a:ea typeface="Calibri"/>
+                <a:cs typeface="Calibri" panose="020F0502020204030204" pitchFamily="34" charset="0"/>
+                <a:sym typeface="Calibri"/>
+              </a:rPr>
+              <a:t> are big enough, the histogram will converge to a normal distribution. This holds true regardless of the shape of the original distribution of data.</a:t>
+            </a:r>
+            <a:endParaRPr dirty="0">
+              <a:latin typeface="Calibri" panose="020F0502020204030204" pitchFamily="34" charset="0"/>
+              <a:ea typeface="Calibri"/>
+              <a:cs typeface="Calibri" panose="020F0502020204030204" pitchFamily="34" charset="0"/>
+              <a:sym typeface="Calibri"/>
+            </a:endParaRPr>
+          </a:p>
+          <a:p>
+            <a:pPr marL="0" lvl="0" indent="0" algn="l" rtl="0">
+              <a:spcBef>
+                <a:spcPts val="0"/>
+              </a:spcBef>
+              <a:spcAft>
+                <a:spcPts val="0"/>
+              </a:spcAft>
+              <a:buNone/>
+            </a:pPr>
+            <a:endParaRPr dirty="0">
+              <a:latin typeface="Calibri" panose="020F0502020204030204" pitchFamily="34" charset="0"/>
+              <a:ea typeface="Calibri"/>
+              <a:cs typeface="Calibri" panose="020F0502020204030204" pitchFamily="34" charset="0"/>
+              <a:sym typeface="Calibri"/>
+            </a:endParaRPr>
+          </a:p>
+          <a:p>
+            <a:pPr marL="0" lvl="0" indent="0" algn="l" rtl="0">
+              <a:spcBef>
+                <a:spcPts val="0"/>
+              </a:spcBef>
+              <a:spcAft>
+                <a:spcPts val="0"/>
+              </a:spcAft>
+              <a:buNone/>
+            </a:pPr>
+            <a:r>
+              <a:rPr lang="en-US" dirty="0">
+                <a:latin typeface="Calibri" panose="020F0502020204030204" pitchFamily="34" charset="0"/>
+                <a:ea typeface="Calibri"/>
+                <a:cs typeface="Calibri" panose="020F0502020204030204" pitchFamily="34" charset="0"/>
+                <a:sym typeface="Calibri"/>
+              </a:rPr>
+              <a:t>For example, suppose we have a million data points, each value is either 1 or -1 (random coin toss). We split data into </a:t>
+            </a:r>
+            <a:r>
+              <a:rPr lang="en-US" b="1" dirty="0">
+                <a:solidFill>
+                  <a:srgbClr val="FF0000"/>
+                </a:solidFill>
+                <a:latin typeface="Calibri" panose="020F0502020204030204" pitchFamily="34" charset="0"/>
+                <a:ea typeface="Calibri"/>
+                <a:cs typeface="Calibri" panose="020F0502020204030204" pitchFamily="34" charset="0"/>
+                <a:sym typeface="Calibri"/>
+              </a:rPr>
+              <a:t>Ng</a:t>
+            </a:r>
+            <a:r>
+              <a:rPr lang="en-US" dirty="0">
+                <a:latin typeface="Calibri" panose="020F0502020204030204" pitchFamily="34" charset="0"/>
+                <a:ea typeface="Calibri"/>
+                <a:cs typeface="Calibri" panose="020F0502020204030204" pitchFamily="34" charset="0"/>
+                <a:sym typeface="Calibri"/>
+              </a:rPr>
+              <a:t>=10,000 groups, each sample group has </a:t>
+            </a:r>
+            <a:r>
+              <a:rPr lang="en-US" b="1" dirty="0">
+                <a:solidFill>
+                  <a:srgbClr val="FF0000"/>
+                </a:solidFill>
+                <a:latin typeface="Calibri" panose="020F0502020204030204" pitchFamily="34" charset="0"/>
+                <a:ea typeface="Calibri"/>
+                <a:cs typeface="Calibri" panose="020F0502020204030204" pitchFamily="34" charset="0"/>
+                <a:sym typeface="Calibri"/>
+              </a:rPr>
+              <a:t>Ns</a:t>
+            </a:r>
+            <a:r>
+              <a:rPr lang="en-US" dirty="0">
+                <a:latin typeface="Calibri" panose="020F0502020204030204" pitchFamily="34" charset="0"/>
+                <a:ea typeface="Calibri"/>
+                <a:cs typeface="Calibri" panose="020F0502020204030204" pitchFamily="34" charset="0"/>
+                <a:sym typeface="Calibri"/>
+              </a:rPr>
+              <a:t>=10,000 data points. Then in each group we calculate the mean value (which will be close to zero). </a:t>
+            </a:r>
+            <a:endParaRPr dirty="0">
+              <a:latin typeface="Calibri" panose="020F0502020204030204" pitchFamily="34" charset="0"/>
+              <a:ea typeface="Calibri"/>
+              <a:cs typeface="Calibri" panose="020F0502020204030204" pitchFamily="34" charset="0"/>
+              <a:sym typeface="Calibri"/>
+            </a:endParaRPr>
+          </a:p>
+          <a:p>
+            <a:pPr marL="0" lvl="0" indent="0" algn="l" rtl="0">
+              <a:spcBef>
+                <a:spcPts val="0"/>
+              </a:spcBef>
+              <a:spcAft>
+                <a:spcPts val="0"/>
+              </a:spcAft>
+              <a:buNone/>
+            </a:pPr>
+            <a:r>
+              <a:rPr lang="en-US" dirty="0">
+                <a:latin typeface="Calibri" panose="020F0502020204030204" pitchFamily="34" charset="0"/>
+                <a:ea typeface="Calibri"/>
+                <a:cs typeface="Calibri" panose="020F0502020204030204" pitchFamily="34" charset="0"/>
+                <a:sym typeface="Calibri"/>
+              </a:rPr>
+              <a:t>Now we have 10,000 mean values - and we make a histogram of those values. According to CLT it will be bell-shaped.</a:t>
+            </a:r>
+            <a:endParaRPr dirty="0">
+              <a:latin typeface="Calibri" panose="020F0502020204030204" pitchFamily="34" charset="0"/>
+              <a:ea typeface="Calibri"/>
+              <a:cs typeface="Calibri" panose="020F0502020204030204" pitchFamily="34" charset="0"/>
+              <a:sym typeface="Calibri"/>
+            </a:endParaRPr>
+          </a:p>
+        </p:txBody>
+      </p:sp>
+      <p:pic>
+        <p:nvPicPr>
+          <p:cNvPr id="96" name="Google Shape;96;p14"/>
+          <p:cNvPicPr preferRelativeResize="0"/>
+          <p:nvPr/>
+        </p:nvPicPr>
+        <p:blipFill>
+          <a:blip r:embed="rId3">
+            <a:alphaModFix/>
+          </a:blip>
+          <a:stretch>
+            <a:fillRect/>
+          </a:stretch>
+        </p:blipFill>
+        <p:spPr>
+          <a:xfrm>
+            <a:off x="5796830" y="190870"/>
+            <a:ext cx="3333750" cy="2276475"/>
+          </a:xfrm>
+          <a:prstGeom prst="rect">
+            <a:avLst/>
+          </a:prstGeom>
+          <a:noFill/>
+          <a:ln>
+            <a:noFill/>
+          </a:ln>
+        </p:spPr>
+      </p:pic>
+      <p:pic>
+        <p:nvPicPr>
+          <p:cNvPr id="97" name="Google Shape;97;p14"/>
+          <p:cNvPicPr preferRelativeResize="0"/>
+          <p:nvPr/>
+        </p:nvPicPr>
+        <p:blipFill>
+          <a:blip r:embed="rId4" cstate="email">
+            <a:alphaModFix/>
+            <a:extLst>
+              <a:ext uri="{28A0092B-C50C-407E-A947-70E740481C1C}">
+                <a14:useLocalDpi xmlns:a14="http://schemas.microsoft.com/office/drawing/2010/main"/>
+              </a:ext>
+            </a:extLst>
+          </a:blip>
+          <a:stretch>
+            <a:fillRect/>
+          </a:stretch>
+        </p:blipFill>
+        <p:spPr>
+          <a:xfrm>
+            <a:off x="9321500" y="89600"/>
+            <a:ext cx="2793700" cy="2091624"/>
+          </a:xfrm>
+          <a:prstGeom prst="rect">
+            <a:avLst/>
+          </a:prstGeom>
+          <a:noFill/>
+          <a:ln>
+            <a:noFill/>
+          </a:ln>
+        </p:spPr>
+      </p:pic>
+      <p:pic>
+        <p:nvPicPr>
+          <p:cNvPr id="98" name="Google Shape;98;p14"/>
+          <p:cNvPicPr preferRelativeResize="0"/>
+          <p:nvPr/>
+        </p:nvPicPr>
+        <p:blipFill>
+          <a:blip r:embed="rId5" cstate="email">
+            <a:alphaModFix/>
+            <a:extLst>
+              <a:ext uri="{28A0092B-C50C-407E-A947-70E740481C1C}">
+                <a14:useLocalDpi xmlns:a14="http://schemas.microsoft.com/office/drawing/2010/main"/>
+              </a:ext>
+            </a:extLst>
+          </a:blip>
+          <a:stretch>
+            <a:fillRect/>
+          </a:stretch>
+        </p:blipFill>
+        <p:spPr>
+          <a:xfrm>
+            <a:off x="6625355" y="3840507"/>
+            <a:ext cx="1676700" cy="1315872"/>
+          </a:xfrm>
+          <a:prstGeom prst="rect">
+            <a:avLst/>
+          </a:prstGeom>
+          <a:noFill/>
+          <a:ln>
+            <a:noFill/>
+          </a:ln>
+        </p:spPr>
+      </p:pic>
+      <p:pic>
+        <p:nvPicPr>
+          <p:cNvPr id="99" name="Google Shape;99;p14"/>
+          <p:cNvPicPr preferRelativeResize="0"/>
+          <p:nvPr/>
+        </p:nvPicPr>
+        <p:blipFill>
+          <a:blip r:embed="rId6" cstate="email">
+            <a:alphaModFix/>
+            <a:extLst>
+              <a:ext uri="{28A0092B-C50C-407E-A947-70E740481C1C}">
+                <a14:useLocalDpi xmlns:a14="http://schemas.microsoft.com/office/drawing/2010/main"/>
+              </a:ext>
+            </a:extLst>
+          </a:blip>
+          <a:stretch>
+            <a:fillRect/>
+          </a:stretch>
+        </p:blipFill>
+        <p:spPr>
+          <a:xfrm>
+            <a:off x="7251333" y="5412404"/>
+            <a:ext cx="495688" cy="1345096"/>
+          </a:xfrm>
+          <a:prstGeom prst="rect">
+            <a:avLst/>
+          </a:prstGeom>
+          <a:noFill/>
+          <a:ln>
+            <a:noFill/>
+          </a:ln>
+        </p:spPr>
+      </p:pic>
+      <p:cxnSp>
+        <p:nvCxnSpPr>
+          <p:cNvPr id="100" name="Google Shape;100;p14"/>
+          <p:cNvCxnSpPr>
+            <a:cxnSpLocks/>
+          </p:cNvCxnSpPr>
+          <p:nvPr/>
+        </p:nvCxnSpPr>
+        <p:spPr>
+          <a:xfrm flipV="1">
+            <a:off x="5897875" y="5026481"/>
+            <a:ext cx="794473" cy="688519"/>
+          </a:xfrm>
+          <a:prstGeom prst="straightConnector1">
+            <a:avLst/>
+          </a:prstGeom>
+          <a:noFill/>
+          <a:ln w="9525" cap="flat" cmpd="sng">
+            <a:solidFill>
+              <a:schemeClr val="dk2"/>
+            </a:solidFill>
+            <a:prstDash val="solid"/>
+            <a:round/>
+            <a:headEnd type="none" w="med" len="med"/>
+            <a:tailEnd type="triangle" w="med" len="med"/>
+          </a:ln>
+        </p:spPr>
+      </p:cxnSp>
+      <p:cxnSp>
+        <p:nvCxnSpPr>
+          <p:cNvPr id="101" name="Google Shape;101;p14"/>
+          <p:cNvCxnSpPr>
+            <a:cxnSpLocks/>
+          </p:cNvCxnSpPr>
+          <p:nvPr/>
+        </p:nvCxnSpPr>
+        <p:spPr>
+          <a:xfrm flipV="1">
+            <a:off x="5623550" y="6342353"/>
+            <a:ext cx="1201320" cy="212522"/>
+          </a:xfrm>
+          <a:prstGeom prst="straightConnector1">
+            <a:avLst/>
+          </a:prstGeom>
+          <a:noFill/>
+          <a:ln w="9525" cap="flat" cmpd="sng">
+            <a:solidFill>
+              <a:schemeClr val="dk2"/>
+            </a:solidFill>
+            <a:prstDash val="solid"/>
+            <a:round/>
+            <a:headEnd type="none" w="med" len="med"/>
+            <a:tailEnd type="triangle" w="med" len="med"/>
+          </a:ln>
+        </p:spPr>
+      </p:cxnSp>
+      <p:sp>
+        <p:nvSpPr>
+          <p:cNvPr id="2" name="TextBox 1">
+            <a:extLst>
+              <a:ext uri="{FF2B5EF4-FFF2-40B4-BE49-F238E27FC236}">
+                <a16:creationId xmlns:a16="http://schemas.microsoft.com/office/drawing/2014/main" id="{0EBA51E1-6C7E-174A-993D-69ACCCAD541F}"/>
+              </a:ext>
+            </a:extLst>
+          </p:cNvPr>
+          <p:cNvSpPr txBox="1"/>
+          <p:nvPr/>
+        </p:nvSpPr>
+        <p:spPr>
+          <a:xfrm>
+            <a:off x="8666923" y="2705710"/>
+            <a:ext cx="2345634" cy="307777"/>
+          </a:xfrm>
+          <a:prstGeom prst="rect">
+            <a:avLst/>
+          </a:prstGeom>
+          <a:noFill/>
+        </p:spPr>
+        <p:txBody>
+          <a:bodyPr wrap="square" rtlCol="0">
+            <a:spAutoFit/>
+          </a:bodyPr>
+          <a:lstStyle/>
+          <a:p>
+            <a:r>
+              <a:rPr lang="en-US" dirty="0">
+                <a:latin typeface="Calibri" panose="020F0502020204030204" pitchFamily="34" charset="0"/>
+                <a:cs typeface="Calibri" panose="020F0502020204030204" pitchFamily="34" charset="0"/>
+              </a:rPr>
+              <a:t>Expected value of abs(x) :</a:t>
+            </a:r>
+          </a:p>
+        </p:txBody>
+      </p:sp>
+      <p:sp>
+        <p:nvSpPr>
+          <p:cNvPr id="10" name="TextBox 9">
+            <a:extLst>
+              <a:ext uri="{FF2B5EF4-FFF2-40B4-BE49-F238E27FC236}">
+                <a16:creationId xmlns:a16="http://schemas.microsoft.com/office/drawing/2014/main" id="{90D357D6-6FAF-0646-B9E8-B60D9309DC34}"/>
+              </a:ext>
+            </a:extLst>
+          </p:cNvPr>
+          <p:cNvSpPr txBox="1"/>
+          <p:nvPr/>
+        </p:nvSpPr>
+        <p:spPr>
+          <a:xfrm>
+            <a:off x="8672144" y="3653319"/>
+            <a:ext cx="2605455" cy="369332"/>
+          </a:xfrm>
+          <a:prstGeom prst="rect">
+            <a:avLst/>
+          </a:prstGeom>
+          <a:noFill/>
+        </p:spPr>
+        <p:txBody>
+          <a:bodyPr wrap="square" rtlCol="0">
+            <a:spAutoFit/>
+          </a:bodyPr>
+          <a:lstStyle/>
+          <a:p>
+            <a:r>
+              <a:rPr lang="en-US" dirty="0">
+                <a:latin typeface="Calibri" panose="020F0502020204030204" pitchFamily="34" charset="0"/>
+                <a:cs typeface="Calibri" panose="020F0502020204030204" pitchFamily="34" charset="0"/>
+              </a:rPr>
+              <a:t>Expected value of x</a:t>
+            </a:r>
+            <a:r>
+              <a:rPr lang="en-US" baseline="30000" dirty="0">
+                <a:latin typeface="Calibri" panose="020F0502020204030204" pitchFamily="34" charset="0"/>
+                <a:cs typeface="Calibri" panose="020F0502020204030204" pitchFamily="34" charset="0"/>
+              </a:rPr>
+              <a:t>2</a:t>
+            </a:r>
+            <a:r>
+              <a:rPr lang="en-US" dirty="0">
+                <a:latin typeface="Calibri" panose="020F0502020204030204" pitchFamily="34" charset="0"/>
+                <a:cs typeface="Calibri" panose="020F0502020204030204" pitchFamily="34" charset="0"/>
+              </a:rPr>
+              <a:t> :  </a:t>
+            </a:r>
+            <a:r>
+              <a:rPr lang="el-GR" sz="1800" b="1" dirty="0">
+                <a:latin typeface="Calibri" panose="020F0502020204030204" pitchFamily="34" charset="0"/>
+                <a:cs typeface="Calibri" panose="020F0502020204030204" pitchFamily="34" charset="0"/>
+              </a:rPr>
+              <a:t>σ</a:t>
+            </a:r>
+            <a:r>
+              <a:rPr lang="en-US" sz="1800" b="1" baseline="30000" dirty="0">
+                <a:latin typeface="Calibri" panose="020F0502020204030204" pitchFamily="34" charset="0"/>
+                <a:cs typeface="Calibri" panose="020F0502020204030204" pitchFamily="34" charset="0"/>
+              </a:rPr>
+              <a:t>2</a:t>
+            </a:r>
+            <a:r>
+              <a:rPr lang="en-US" sz="1800" b="1" dirty="0">
+                <a:latin typeface="Calibri" panose="020F0502020204030204" pitchFamily="34" charset="0"/>
+                <a:cs typeface="Calibri" panose="020F0502020204030204" pitchFamily="34" charset="0"/>
+              </a:rPr>
+              <a:t> </a:t>
+            </a:r>
+          </a:p>
+        </p:txBody>
+      </p:sp>
+      <p:pic>
+        <p:nvPicPr>
+          <p:cNvPr id="3" name="Picture 2">
+            <a:extLst>
+              <a:ext uri="{FF2B5EF4-FFF2-40B4-BE49-F238E27FC236}">
+                <a16:creationId xmlns:a16="http://schemas.microsoft.com/office/drawing/2014/main" id="{D3187F30-5E19-F349-9ECC-4F76FE84253C}"/>
+              </a:ext>
+            </a:extLst>
+          </p:cNvPr>
+          <p:cNvPicPr>
+            <a:picLocks noChangeAspect="1"/>
+          </p:cNvPicPr>
+          <p:nvPr/>
+        </p:nvPicPr>
+        <p:blipFill>
+          <a:blip r:embed="rId7" cstate="email">
+            <a:extLst>
+              <a:ext uri="{28A0092B-C50C-407E-A947-70E740481C1C}">
+                <a14:useLocalDpi xmlns:a14="http://schemas.microsoft.com/office/drawing/2010/main"/>
+              </a:ext>
+            </a:extLst>
+          </a:blip>
+          <a:stretch>
+            <a:fillRect/>
+          </a:stretch>
+        </p:blipFill>
+        <p:spPr>
+          <a:xfrm>
+            <a:off x="11012557" y="2521399"/>
+            <a:ext cx="696291" cy="676397"/>
+          </a:xfrm>
+          <a:prstGeom prst="rect">
+            <a:avLst/>
+          </a:prstGeom>
+        </p:spPr>
+      </p:pic>
+      <p:pic>
+        <p:nvPicPr>
+          <p:cNvPr id="4" name="Picture 3">
+            <a:extLst>
+              <a:ext uri="{FF2B5EF4-FFF2-40B4-BE49-F238E27FC236}">
+                <a16:creationId xmlns:a16="http://schemas.microsoft.com/office/drawing/2014/main" id="{0581D3FD-E3EF-264F-B21B-64BB6721FFD0}"/>
+              </a:ext>
+            </a:extLst>
+          </p:cNvPr>
+          <p:cNvPicPr>
+            <a:picLocks noChangeAspect="1"/>
+          </p:cNvPicPr>
+          <p:nvPr/>
+        </p:nvPicPr>
+        <p:blipFill>
+          <a:blip r:embed="rId8" cstate="email">
+            <a:extLst>
+              <a:ext uri="{28A0092B-C50C-407E-A947-70E740481C1C}">
+                <a14:useLocalDpi xmlns:a14="http://schemas.microsoft.com/office/drawing/2010/main"/>
+              </a:ext>
+            </a:extLst>
+          </a:blip>
+          <a:stretch>
+            <a:fillRect/>
+          </a:stretch>
+        </p:blipFill>
+        <p:spPr>
+          <a:xfrm>
+            <a:off x="8660304" y="4521379"/>
+            <a:ext cx="3454895" cy="505102"/>
+          </a:xfrm>
+          <a:prstGeom prst="rect">
+            <a:avLst/>
+          </a:prstGeom>
+        </p:spPr>
+      </p:pic>
+      <p:sp>
+        <p:nvSpPr>
+          <p:cNvPr id="6" name="TextBox 5">
+            <a:extLst>
+              <a:ext uri="{FF2B5EF4-FFF2-40B4-BE49-F238E27FC236}">
+                <a16:creationId xmlns:a16="http://schemas.microsoft.com/office/drawing/2014/main" id="{DAAF26B6-1DE7-5340-93B0-0F470BA7A5F4}"/>
+              </a:ext>
+            </a:extLst>
+          </p:cNvPr>
+          <p:cNvSpPr txBox="1"/>
+          <p:nvPr/>
+        </p:nvSpPr>
+        <p:spPr>
+          <a:xfrm>
+            <a:off x="8666923" y="5370740"/>
+            <a:ext cx="3210116" cy="1169551"/>
+          </a:xfrm>
+          <a:prstGeom prst="rect">
+            <a:avLst/>
+          </a:prstGeom>
+          <a:noFill/>
+        </p:spPr>
+        <p:txBody>
+          <a:bodyPr wrap="square" rtlCol="0">
+            <a:spAutoFit/>
+          </a:bodyPr>
+          <a:lstStyle/>
+          <a:p>
+            <a:r>
+              <a:rPr lang="en-US" dirty="0">
+                <a:solidFill>
+                  <a:srgbClr val="0070C0"/>
+                </a:solidFill>
+                <a:latin typeface="Calibri" panose="020F0502020204030204" pitchFamily="34" charset="0"/>
+                <a:cs typeface="Calibri" panose="020F0502020204030204" pitchFamily="34" charset="0"/>
+              </a:rPr>
+              <a:t>Here double factorial "n!!" denotes the product of all numbers from n down to 1 that have the same parity as n.</a:t>
+            </a:r>
+          </a:p>
+          <a:p>
+            <a:r>
+              <a:rPr lang="en-US" dirty="0">
+                <a:solidFill>
+                  <a:srgbClr val="0070C0"/>
+                </a:solidFill>
+                <a:latin typeface="Calibri" panose="020F0502020204030204" pitchFamily="34" charset="0"/>
+                <a:cs typeface="Calibri" panose="020F0502020204030204" pitchFamily="34" charset="0"/>
+              </a:rPr>
+              <a:t>    9!! = 9*7*5*3*1</a:t>
+            </a:r>
+          </a:p>
+          <a:p>
+            <a:r>
+              <a:rPr lang="en-US" dirty="0">
+                <a:solidFill>
+                  <a:srgbClr val="0070C0"/>
+                </a:solidFill>
+                <a:latin typeface="Calibri" panose="020F0502020204030204" pitchFamily="34" charset="0"/>
+                <a:cs typeface="Calibri" panose="020F0502020204030204" pitchFamily="34" charset="0"/>
+              </a:rPr>
+              <a:t>    6!! = 6*4*2</a:t>
+            </a:r>
+          </a:p>
+        </p:txBody>
+      </p:sp>
+      <p:cxnSp>
+        <p:nvCxnSpPr>
+          <p:cNvPr id="8" name="Straight Connector 7">
+            <a:extLst>
+              <a:ext uri="{FF2B5EF4-FFF2-40B4-BE49-F238E27FC236}">
+                <a16:creationId xmlns:a16="http://schemas.microsoft.com/office/drawing/2014/main" id="{9EDC9C27-7EFC-6943-B898-CFC2A575D7CD}"/>
+              </a:ext>
+            </a:extLst>
+          </p:cNvPr>
+          <p:cNvCxnSpPr>
+            <a:cxnSpLocks/>
+          </p:cNvCxnSpPr>
+          <p:nvPr/>
+        </p:nvCxnSpPr>
+        <p:spPr>
+          <a:xfrm>
+            <a:off x="8481391" y="2521399"/>
+            <a:ext cx="0" cy="4236101"/>
+          </a:xfrm>
+          <a:prstGeom prst="line">
+            <a:avLst/>
+          </a:prstGeom>
+        </p:spPr>
+        <p:style>
+          <a:lnRef idx="1">
+            <a:schemeClr val="accent1"/>
+          </a:lnRef>
+          <a:fillRef idx="0">
+            <a:schemeClr val="accent1"/>
+          </a:fillRef>
+          <a:effectRef idx="0">
+            <a:schemeClr val="accent1"/>
+          </a:effectRef>
+          <a:fontRef idx="minor">
+            <a:schemeClr val="tx1"/>
+          </a:fontRef>
+        </p:style>
+      </p:cxnSp>
+    </p:spTree>
+    <p:extLst>
+      <p:ext uri="{BB962C8B-B14F-4D97-AF65-F5344CB8AC3E}">
+        <p14:creationId xmlns:p14="http://schemas.microsoft.com/office/powerpoint/2010/main" val="3876144593"/>
+      </p:ext>
+    </p:extLst>
+  </p:cSld>
+  <p:clrMapOvr>
+    <a:masterClrMapping/>
+  </p:clrMapOvr>
+</p:sld>
+</file>
+
+<file path=ppt/slides/slide13.xml><?xml version="1.0" encoding="utf-8"?>
+<p:sld xmlns:a="http://schemas.openxmlformats.org/drawingml/2006/main" xmlns:r="http://schemas.openxmlformats.org/officeDocument/2006/relationships" xmlns:p="http://schemas.openxmlformats.org/presentationml/2006/main">
+  <p:cSld>
+    <p:spTree>
+      <p:nvGrpSpPr>
+        <p:cNvPr id="1" name=""/>
+        <p:cNvGrpSpPr/>
+        <p:nvPr/>
+      </p:nvGrpSpPr>
+      <p:grpSpPr>
+        <a:xfrm>
+          <a:off x="0" y="0"/>
+          <a:ext cx="0" cy="0"/>
+          <a:chOff x="0" y="0"/>
+          <a:chExt cx="0" cy="0"/>
+        </a:xfrm>
+      </p:grpSpPr>
+      <p:sp>
+        <p:nvSpPr>
+          <p:cNvPr id="3" name="TextBox 2">
+            <a:extLst>
+              <a:ext uri="{FF2B5EF4-FFF2-40B4-BE49-F238E27FC236}">
+                <a16:creationId xmlns:a16="http://schemas.microsoft.com/office/drawing/2014/main" id="{5E97A373-EFE3-4EA2-83A5-E2C45314003F}"/>
+              </a:ext>
+            </a:extLst>
+          </p:cNvPr>
+          <p:cNvSpPr txBox="1"/>
+          <p:nvPr/>
+        </p:nvSpPr>
+        <p:spPr>
+          <a:xfrm>
+            <a:off x="0" y="11068"/>
+            <a:ext cx="1412240" cy="523220"/>
+          </a:xfrm>
+          <a:prstGeom prst="rect">
+            <a:avLst/>
+          </a:prstGeom>
+          <a:noFill/>
+        </p:spPr>
+        <p:txBody>
+          <a:bodyPr wrap="square" rtlCol="0">
+            <a:spAutoFit/>
+          </a:bodyPr>
+          <a:lstStyle/>
+          <a:p>
+            <a:r>
+              <a:rPr lang="en-US" sz="2800" b="1" dirty="0"/>
+              <a:t>Books </a:t>
+            </a:r>
+          </a:p>
+        </p:txBody>
+      </p:sp>
+      <p:sp>
+        <p:nvSpPr>
+          <p:cNvPr id="4" name="TextBox 3">
+            <a:extLst>
+              <a:ext uri="{FF2B5EF4-FFF2-40B4-BE49-F238E27FC236}">
+                <a16:creationId xmlns:a16="http://schemas.microsoft.com/office/drawing/2014/main" id="{E153FA93-786E-D6AD-948E-2FA30E030911}"/>
+              </a:ext>
+            </a:extLst>
+          </p:cNvPr>
+          <p:cNvSpPr txBox="1"/>
+          <p:nvPr/>
+        </p:nvSpPr>
+        <p:spPr>
+          <a:xfrm>
+            <a:off x="1422401" y="159429"/>
+            <a:ext cx="7254240" cy="307777"/>
+          </a:xfrm>
+          <a:prstGeom prst="rect">
+            <a:avLst/>
+          </a:prstGeom>
+          <a:noFill/>
+        </p:spPr>
+        <p:txBody>
+          <a:bodyPr wrap="square" rtlCol="0">
+            <a:spAutoFit/>
+          </a:bodyPr>
+          <a:lstStyle/>
+          <a:p>
+            <a:r>
+              <a:rPr lang="en-US" dirty="0">
+                <a:hlinkClick r:id="rId2"/>
+              </a:rPr>
+              <a:t>https://</a:t>
+            </a:r>
+            <a:r>
+              <a:rPr lang="en-US" dirty="0" err="1">
+                <a:hlinkClick r:id="rId2"/>
+              </a:rPr>
+              <a:t>www.quora.com</a:t>
+            </a:r>
+            <a:r>
+              <a:rPr lang="en-US" dirty="0">
+                <a:hlinkClick r:id="rId2"/>
+              </a:rPr>
+              <a:t>/What-are-some-good-books-for-learning-probability-and-statistics</a:t>
+            </a:r>
+            <a:endParaRPr lang="en-US" dirty="0"/>
+          </a:p>
+        </p:txBody>
+      </p:sp>
+      <p:sp>
+        <p:nvSpPr>
+          <p:cNvPr id="5" name="TextBox 4">
+            <a:extLst>
+              <a:ext uri="{FF2B5EF4-FFF2-40B4-BE49-F238E27FC236}">
+                <a16:creationId xmlns:a16="http://schemas.microsoft.com/office/drawing/2014/main" id="{A366B85C-C376-E41F-7145-82227FEF4A26}"/>
+              </a:ext>
+            </a:extLst>
+          </p:cNvPr>
+          <p:cNvSpPr txBox="1"/>
+          <p:nvPr/>
+        </p:nvSpPr>
+        <p:spPr>
+          <a:xfrm>
+            <a:off x="787400" y="625808"/>
+            <a:ext cx="8706678" cy="6001643"/>
+          </a:xfrm>
+          <a:prstGeom prst="rect">
+            <a:avLst/>
+          </a:prstGeom>
+          <a:noFill/>
+        </p:spPr>
+        <p:txBody>
+          <a:bodyPr wrap="square" rtlCol="0">
+            <a:spAutoFit/>
+          </a:bodyPr>
+          <a:lstStyle/>
+          <a:p>
+            <a:pPr marL="285750" indent="-285750">
+              <a:buFont typeface="Arial" panose="020B0604020202020204" pitchFamily="34" charset="0"/>
+              <a:buChar char="•"/>
+            </a:pPr>
+            <a:r>
+              <a:rPr lang="en-US" sz="1200"/>
+              <a:t>Fifty Challenging Problems in Probability with Solutions (Frederick Mosteller)</a:t>
+            </a:r>
+          </a:p>
+          <a:p>
+            <a:pPr marL="285750" indent="-285750">
+              <a:buFont typeface="Arial" panose="020B0604020202020204" pitchFamily="34" charset="0"/>
+              <a:buChar char="•"/>
+            </a:pPr>
+            <a:r>
+              <a:rPr lang="en-US" sz="1200"/>
+              <a:t>Bayesian Statistics the Fun Way (Will Kurt)</a:t>
+            </a:r>
+          </a:p>
+          <a:p>
+            <a:pPr marL="285750" indent="-285750">
+              <a:buFont typeface="Arial" panose="020B0604020202020204" pitchFamily="34" charset="0"/>
+              <a:buChar char="•"/>
+            </a:pPr>
+            <a:r>
+              <a:rPr lang="en-US" sz="1200"/>
+              <a:t>Applied Statistics and Statistical Computing</a:t>
+            </a:r>
+          </a:p>
+          <a:p>
+            <a:pPr marL="285750" indent="-285750">
+              <a:buFont typeface="Arial" panose="020B0604020202020204" pitchFamily="34" charset="0"/>
+              <a:buChar char="•"/>
+            </a:pPr>
+            <a:r>
+              <a:rPr lang="en-US" sz="1200"/>
+              <a:t>Statistics (Freedman, Pisani &amp; Purves) - best introductory book</a:t>
+            </a:r>
+          </a:p>
+          <a:p>
+            <a:pPr marL="285750" indent="-285750">
+              <a:buFont typeface="Arial" panose="020B0604020202020204" pitchFamily="34" charset="0"/>
+              <a:buChar char="•"/>
+            </a:pPr>
+            <a:r>
+              <a:rPr lang="en-US" sz="1200"/>
+              <a:t>Probability and Statistics for Engineering and the Sciences – good intro</a:t>
+            </a:r>
+          </a:p>
+          <a:p>
+            <a:pPr marL="285750" indent="-285750">
+              <a:buFont typeface="Arial" panose="020B0604020202020204" pitchFamily="34" charset="0"/>
+              <a:buChar char="•"/>
+            </a:pPr>
+            <a:r>
+              <a:rPr lang="en-US" sz="1200"/>
+              <a:t>Modern Applied Statistics with S (Venables &amp; Ripley) – more advanced</a:t>
+            </a:r>
+          </a:p>
+          <a:p>
+            <a:pPr marL="285750" indent="-285750">
+              <a:buFont typeface="Arial" panose="020B0604020202020204" pitchFamily="34" charset="0"/>
+              <a:buChar char="•"/>
+            </a:pPr>
+            <a:r>
+              <a:rPr lang="en-US" sz="1200"/>
+              <a:t>Software for Data Analysis: Programming with R (Chambers)</a:t>
+            </a:r>
+          </a:p>
+          <a:p>
+            <a:pPr marL="285750" indent="-285750">
+              <a:buFont typeface="Arial" panose="020B0604020202020204" pitchFamily="34" charset="0"/>
+              <a:buChar char="•"/>
+            </a:pPr>
+            <a:r>
+              <a:rPr lang="en-US" sz="1200"/>
+              <a:t>The Art of R Programming: A Tour of Statistical Software Design (Matloff)</a:t>
+            </a:r>
+          </a:p>
+          <a:p>
+            <a:pPr marL="285750" indent="-285750">
+              <a:buFont typeface="Arial" panose="020B0604020202020204" pitchFamily="34" charset="0"/>
+              <a:buChar char="•"/>
+            </a:pPr>
+            <a:r>
+              <a:rPr lang="en-US" sz="1200"/>
+              <a:t>Linear Regression Analysis (Seber &amp; Lee)</a:t>
+            </a:r>
+          </a:p>
+          <a:p>
+            <a:pPr marL="285750" indent="-285750">
+              <a:buFont typeface="Arial" panose="020B0604020202020204" pitchFamily="34" charset="0"/>
+              <a:buChar char="•"/>
+            </a:pPr>
+            <a:r>
+              <a:rPr lang="en-US" sz="1200"/>
+              <a:t>Bayesian Data Analysis (Gelman, Carlin, Dunson, Vehtari &amp; Rubin)</a:t>
+            </a:r>
+          </a:p>
+          <a:p>
+            <a:pPr marL="285750" indent="-285750">
+              <a:buFont typeface="Arial" panose="020B0604020202020204" pitchFamily="34" charset="0"/>
+              <a:buChar char="•"/>
+            </a:pPr>
+            <a:r>
+              <a:rPr lang="en-US" sz="1200"/>
+              <a:t>Data Analysis Using Regression and Multilevel/Hierarchical Models (Gelman &amp; Hill)</a:t>
+            </a:r>
+          </a:p>
+          <a:p>
+            <a:pPr marL="285750" indent="-285750">
+              <a:buFont typeface="Arial" panose="020B0604020202020204" pitchFamily="34" charset="0"/>
+              <a:buChar char="•"/>
+            </a:pPr>
+            <a:r>
+              <a:rPr lang="en-US" sz="1200"/>
+              <a:t>The Elements of Statistical Learning: Data Mining, Inference, and Prediction (Hastie, Tibshirani &amp; Friedman)</a:t>
+            </a:r>
+          </a:p>
+          <a:p>
+            <a:pPr marL="285750" indent="-285750">
+              <a:buFont typeface="Arial" panose="020B0604020202020204" pitchFamily="34" charset="0"/>
+              <a:buChar char="•"/>
+            </a:pPr>
+            <a:r>
+              <a:rPr lang="en-US" sz="1200"/>
+              <a:t>Mathematical Statistics with Applications (Wackerly, Mendenhall &amp; Scheaffer)</a:t>
+            </a:r>
+          </a:p>
+          <a:p>
+            <a:pPr marL="285750" indent="-285750">
+              <a:buFont typeface="Arial" panose="020B0604020202020204" pitchFamily="34" charset="0"/>
+              <a:buChar char="•"/>
+            </a:pPr>
+            <a:r>
+              <a:rPr lang="en-US" sz="1200"/>
+              <a:t>Statistical Inference (Casella &amp; Berger)</a:t>
+            </a:r>
+          </a:p>
+          <a:p>
+            <a:pPr marL="285750" indent="-285750">
+              <a:buFont typeface="Arial" panose="020B0604020202020204" pitchFamily="34" charset="0"/>
+              <a:buChar char="•"/>
+            </a:pPr>
+            <a:r>
+              <a:rPr lang="en-US" sz="1200"/>
+              <a:t>Mathematical Statistics: Basic Ideas and Selected Topics (Bickel &amp; Doksum)</a:t>
+            </a:r>
+          </a:p>
+          <a:p>
+            <a:pPr marL="285750" indent="-285750">
+              <a:buFont typeface="Arial" panose="020B0604020202020204" pitchFamily="34" charset="0"/>
+              <a:buChar char="•"/>
+            </a:pPr>
+            <a:r>
+              <a:rPr lang="en-US" sz="1200"/>
+              <a:t>A First Course in Linear Model Theory (Ravishanker &amp; Dey)</a:t>
+            </a:r>
+          </a:p>
+          <a:p>
+            <a:pPr marL="285750" indent="-285750">
+              <a:buFont typeface="Arial" panose="020B0604020202020204" pitchFamily="34" charset="0"/>
+              <a:buChar char="•"/>
+            </a:pPr>
+            <a:r>
+              <a:rPr lang="en-US" sz="1200"/>
+              <a:t>Generalized, Linear, and Mixed Models (McCulloch, Searle &amp; Neuhaus)</a:t>
+            </a:r>
+          </a:p>
+          <a:p>
+            <a:pPr marL="285750" indent="-285750">
+              <a:buFont typeface="Arial" panose="020B0604020202020204" pitchFamily="34" charset="0"/>
+              <a:buChar char="•"/>
+            </a:pPr>
+            <a:r>
+              <a:rPr lang="en-US" sz="1200"/>
+              <a:t>An Introduction to Multivariate Statistical Analysis (T. W. Anderson)</a:t>
+            </a:r>
+          </a:p>
+          <a:p>
+            <a:pPr marL="285750" indent="-285750">
+              <a:buFont typeface="Arial" panose="020B0604020202020204" pitchFamily="34" charset="0"/>
+              <a:buChar char="•"/>
+            </a:pPr>
+            <a:r>
+              <a:rPr lang="en-US" sz="1200"/>
+              <a:t>A Course in Large Sample Theory (Ferguson) </a:t>
+            </a:r>
+          </a:p>
+          <a:p>
+            <a:pPr marL="285750" indent="-285750">
+              <a:buFont typeface="Arial" panose="020B0604020202020204" pitchFamily="34" charset="0"/>
+              <a:buChar char="•"/>
+            </a:pPr>
+            <a:r>
+              <a:rPr lang="en-US" sz="1200"/>
+              <a:t>Asymptotic Statistics (van der Vaart)</a:t>
+            </a:r>
+          </a:p>
+          <a:p>
+            <a:pPr marL="285750" indent="-285750">
+              <a:buFont typeface="Arial" panose="020B0604020202020204" pitchFamily="34" charset="0"/>
+              <a:buChar char="•"/>
+            </a:pPr>
+            <a:r>
+              <a:rPr lang="en-US" sz="1200"/>
+              <a:t>The Bayesian Choice: From Decision-Theoretic Foundations to Computational Implementation (Robert)</a:t>
+            </a:r>
+          </a:p>
+          <a:p>
+            <a:pPr marL="285750" indent="-285750">
+              <a:buFont typeface="Arial" panose="020B0604020202020204" pitchFamily="34" charset="0"/>
+              <a:buChar char="•"/>
+            </a:pPr>
+            <a:r>
+              <a:rPr lang="en-US" sz="1200"/>
+              <a:t>Probability (Pitman)</a:t>
+            </a:r>
+          </a:p>
+          <a:p>
+            <a:pPr marL="285750" indent="-285750">
+              <a:buFont typeface="Arial" panose="020B0604020202020204" pitchFamily="34" charset="0"/>
+              <a:buChar char="•"/>
+            </a:pPr>
+            <a:r>
+              <a:rPr lang="en-US" sz="1200"/>
+              <a:t>Probability: The Science of Uncertainty (Bean)</a:t>
+            </a:r>
+          </a:p>
+          <a:p>
+            <a:pPr marL="285750" indent="-285750">
+              <a:buFont typeface="Arial" panose="020B0604020202020204" pitchFamily="34" charset="0"/>
+              <a:buChar char="•"/>
+            </a:pPr>
+            <a:r>
+              <a:rPr lang="en-US" sz="1200"/>
+              <a:t>Introduction to Probability Models (Ross) and Stochastic Processes (Ross)</a:t>
+            </a:r>
+          </a:p>
+          <a:p>
+            <a:pPr marL="285750" indent="-285750">
+              <a:buFont typeface="Arial" panose="020B0604020202020204" pitchFamily="34" charset="0"/>
+              <a:buChar char="•"/>
+            </a:pPr>
+            <a:r>
+              <a:rPr lang="en-US" sz="1200"/>
+              <a:t>A First Course in Stochastic Processes (Karlin &amp; Taylor) or A Second Course in Stochastic Processes (Karlin &amp; Taylor).</a:t>
+            </a:r>
+          </a:p>
+          <a:p>
+            <a:pPr marL="285750" indent="-285750">
+              <a:buFont typeface="Arial" panose="020B0604020202020204" pitchFamily="34" charset="0"/>
+              <a:buChar char="•"/>
+            </a:pPr>
+            <a:r>
+              <a:rPr lang="en-US" sz="1200"/>
+              <a:t>Applied Probability (Lange)</a:t>
+            </a:r>
+          </a:p>
+          <a:p>
+            <a:pPr marL="285750" indent="-285750">
+              <a:buFont typeface="Arial" panose="020B0604020202020204" pitchFamily="34" charset="0"/>
+              <a:buChar char="•"/>
+            </a:pPr>
+            <a:r>
+              <a:rPr lang="en-US" sz="1200"/>
+              <a:t>A First Look at Rigorous Probability Theory (Rosenthal)</a:t>
+            </a:r>
+          </a:p>
+          <a:p>
+            <a:pPr marL="285750" indent="-285750">
+              <a:buFont typeface="Arial" panose="020B0604020202020204" pitchFamily="34" charset="0"/>
+              <a:buChar char="•"/>
+            </a:pPr>
+            <a:r>
+              <a:rPr lang="en-US" sz="1200"/>
+              <a:t>Probability (Shiryaev) is a more rigorous book that's still clear with a lot of examples.</a:t>
+            </a:r>
+          </a:p>
+          <a:p>
+            <a:pPr marL="285750" indent="-285750">
+              <a:buFont typeface="Arial" panose="020B0604020202020204" pitchFamily="34" charset="0"/>
+              <a:buChar char="•"/>
+            </a:pPr>
+            <a:r>
+              <a:rPr lang="en-US" sz="1200"/>
+              <a:t>Probability: Theory and Examples (Durrett)</a:t>
+            </a:r>
+          </a:p>
+          <a:p>
+            <a:pPr marL="285750" indent="-285750">
+              <a:buFont typeface="Arial" panose="020B0604020202020204" pitchFamily="34" charset="0"/>
+              <a:buChar char="•"/>
+            </a:pPr>
+            <a:r>
+              <a:rPr lang="en-US" sz="1200"/>
+              <a:t>Stochastic Calculus and Financial Applications (Steele)</a:t>
+            </a:r>
+          </a:p>
+          <a:p>
+            <a:pPr marL="285750" indent="-285750">
+              <a:buFont typeface="Arial" panose="020B0604020202020204" pitchFamily="34" charset="0"/>
+              <a:buChar char="•"/>
+            </a:pPr>
+            <a:r>
+              <a:rPr lang="en-US" sz="1200"/>
+              <a:t>Brownian Motion and Stochastic Calculus (Karatzas &amp; Shreve)</a:t>
+            </a:r>
+          </a:p>
+          <a:p>
+            <a:pPr marL="285750" indent="-285750">
+              <a:buFont typeface="Arial" panose="020B0604020202020204" pitchFamily="34" charset="0"/>
+              <a:buChar char="•"/>
+            </a:pPr>
+            <a:r>
+              <a:rPr lang="en-US" sz="1200"/>
+              <a:t>Counterexamples in Probability (Stoyanov)</a:t>
+            </a:r>
+          </a:p>
+        </p:txBody>
+      </p:sp>
+    </p:spTree>
+    <p:extLst>
+      <p:ext uri="{BB962C8B-B14F-4D97-AF65-F5344CB8AC3E}">
+        <p14:creationId xmlns:p14="http://schemas.microsoft.com/office/powerpoint/2010/main" val="4075308787"/>
       </p:ext>
     </p:extLst>
   </p:cSld>
@@ -15129,8 +18002,8 @@
         </p:nvSpPr>
         <p:spPr>
           <a:xfrm>
-            <a:off x="157655" y="165651"/>
-            <a:ext cx="3920359" cy="461665"/>
+            <a:off x="0" y="0"/>
+            <a:ext cx="2016585" cy="461665"/>
           </a:xfrm>
           <a:prstGeom prst="rect">
             <a:avLst/>
@@ -15145,7 +18018,7 @@
           <a:p>
             <a:r>
               <a:rPr lang="en-US" sz="2400" b="1" dirty="0"/>
-              <a:t>Probability &amp; Statistics</a:t>
+              <a:t>Probability</a:t>
             </a:r>
           </a:p>
         </p:txBody>
@@ -15164,8 +18037,8 @@
         </p:nvSpPr>
         <p:spPr>
           <a:xfrm>
-            <a:off x="157655" y="998483"/>
-            <a:ext cx="5549462" cy="5262979"/>
+            <a:off x="0" y="701179"/>
+            <a:ext cx="5549462" cy="3970318"/>
           </a:xfrm>
           <a:prstGeom prst="rect">
             <a:avLst/>
@@ -15180,58 +18053,15 @@
           <a:p>
             <a:r>
               <a:rPr lang="en-US" dirty="0"/>
-              <a:t>Books on probability and statistics</a:t>
-            </a:r>
-          </a:p>
-          <a:p>
-            <a:r>
-              <a:rPr lang="en-US" dirty="0"/>
-              <a:t>    </a:t>
-            </a:r>
-            <a:r>
-              <a:rPr lang="en-US" dirty="0">
-                <a:hlinkClick r:id="rId2"/>
+              <a:t>Statistics uses </a:t>
+            </a:r>
+            <a:r>
+              <a:rPr lang="en-US" b="1" dirty="0">
+                <a:solidFill>
+                  <a:srgbClr val="00B050"/>
+                </a:solidFill>
               </a:rPr>
-              <a:t>https://</a:t>
-            </a:r>
-            <a:r>
-              <a:rPr lang="en-US" dirty="0" err="1">
-                <a:hlinkClick r:id="rId2"/>
-              </a:rPr>
-              <a:t>www.quora.com</a:t>
-            </a:r>
-            <a:r>
-              <a:rPr lang="en-US" dirty="0">
-                <a:hlinkClick r:id="rId2"/>
-              </a:rPr>
-              <a:t>/What-are-some-good-books-for-learning-probability-and-statistics</a:t>
-            </a:r>
-            <a:endParaRPr lang="en-US" dirty="0"/>
-          </a:p>
-          <a:p>
-            <a:endParaRPr lang="en-US" dirty="0"/>
-          </a:p>
-          <a:p>
-            <a:r>
-              <a:rPr lang="en-US" dirty="0"/>
-              <a:t>Introduction to Probability Theory</a:t>
-            </a:r>
-          </a:p>
-          <a:p>
-            <a:endParaRPr lang="en-US" dirty="0"/>
-          </a:p>
-          <a:p>
-            <a:r>
-              <a:rPr lang="en-US" b="1" dirty="0">
-                <a:solidFill>
-                  <a:srgbClr val="FF0000"/>
-                </a:solidFill>
-              </a:rPr>
-              <a:t>Probability</a:t>
-            </a:r>
-            <a:r>
-              <a:rPr lang="en-US" dirty="0"/>
-              <a:t> Definitions:</a:t>
+              <a:t>Probability Theory</a:t>
             </a:r>
           </a:p>
           <a:p>
@@ -15381,7 +18211,7 @@
                   <a:srgbClr val="FF0000"/>
                 </a:solidFill>
               </a:rPr>
-              <a:t>2 cubes</a:t>
+              <a:t>2 dice cubes</a:t>
             </a:r>
             <a:r>
               <a:rPr lang="en-US" dirty="0"/>
@@ -15637,6 +18467,42 @@
           </a:p>
         </p:txBody>
       </p:sp>
+      <p:pic>
+        <p:nvPicPr>
+          <p:cNvPr id="2" name="Picture 1">
+            <a:extLst>
+              <a:ext uri="{FF2B5EF4-FFF2-40B4-BE49-F238E27FC236}">
+                <a16:creationId xmlns:a16="http://schemas.microsoft.com/office/drawing/2014/main" id="{E2E7E86E-06EC-5D7C-D685-01D250455BD6}"/>
+              </a:ext>
+            </a:extLst>
+          </p:cNvPr>
+          <p:cNvPicPr>
+            <a:picLocks noChangeAspect="1"/>
+          </p:cNvPicPr>
+          <p:nvPr/>
+        </p:nvPicPr>
+        <p:blipFill>
+          <a:blip r:embed="rId2" cstate="email">
+            <a:extLst>
+              <a:ext uri="{28A0092B-C50C-407E-A947-70E740481C1C}">
+                <a14:useLocalDpi xmlns:a14="http://schemas.microsoft.com/office/drawing/2010/main"/>
+              </a:ext>
+            </a:extLst>
+          </a:blip>
+          <a:stretch>
+            <a:fillRect/>
+          </a:stretch>
+        </p:blipFill>
+        <p:spPr>
+          <a:xfrm>
+            <a:off x="1580296" y="5105261"/>
+            <a:ext cx="1194435" cy="1051560"/>
+          </a:xfrm>
+          <a:prstGeom prst="rect">
+            <a:avLst/>
+          </a:prstGeom>
+        </p:spPr>
+      </p:pic>
     </p:spTree>
     <p:extLst>
       <p:ext uri="{BB962C8B-B14F-4D97-AF65-F5344CB8AC3E}">
@@ -15681,8 +18547,8 @@
         </p:nvSpPr>
         <p:spPr>
           <a:xfrm>
-            <a:off x="220717" y="283779"/>
-            <a:ext cx="5728138" cy="5693866"/>
+            <a:off x="167709" y="718850"/>
+            <a:ext cx="5623492" cy="2031325"/>
           </a:xfrm>
           <a:prstGeom prst="rect">
             <a:avLst/>
@@ -15705,7 +18571,19 @@
             </a:r>
             <a:r>
               <a:rPr lang="en-US" dirty="0"/>
-              <a:t>= Simple Probability , a probability </a:t>
+              <a:t>= </a:t>
+            </a:r>
+            <a:r>
+              <a:rPr lang="en-US" b="1" dirty="0">
+                <a:solidFill>
+                  <a:srgbClr val="00B050"/>
+                </a:solidFill>
+              </a:rPr>
+              <a:t>Simple Probability</a:t>
+            </a:r>
+            <a:r>
+              <a:rPr lang="en-US" dirty="0"/>
+              <a:t> , a probability </a:t>
             </a:r>
           </a:p>
           <a:p>
@@ -15720,25 +18598,65 @@
           <a:p>
             <a:r>
               <a:rPr lang="en-US" dirty="0"/>
-              <a:t>The term “marginal variable” is used to refer to a subset </a:t>
-            </a:r>
-          </a:p>
-          <a:p>
+              <a:t>The term “</a:t>
+            </a:r>
+            <a:r>
+              <a:rPr lang="en-US" b="1" dirty="0">
+                <a:solidFill>
+                  <a:srgbClr val="00B050"/>
+                </a:solidFill>
+              </a:rPr>
+              <a:t>marginal variable</a:t>
+            </a:r>
             <a:r>
               <a:rPr lang="en-US" dirty="0"/>
-              <a:t>of variables in a table. They called “marginal” because they </a:t>
+              <a:t>” is used to refer to a subset </a:t>
             </a:r>
           </a:p>
           <a:p>
             <a:r>
               <a:rPr lang="en-US" dirty="0"/>
-              <a:t>used to be calculated by summing values in a table along </a:t>
-            </a:r>
-          </a:p>
-          <a:p>
+              <a:t>of variables in a table. They called “</a:t>
+            </a:r>
+            <a:r>
+              <a:rPr lang="en-US" b="1" dirty="0">
+                <a:solidFill>
+                  <a:srgbClr val="00B050"/>
+                </a:solidFill>
+              </a:rPr>
+              <a:t>marginal</a:t>
+            </a:r>
             <a:r>
               <a:rPr lang="en-US" dirty="0"/>
-              <a:t>rows or columns , and writing the sum in the margins of the table.</a:t>
+              <a:t>” because they </a:t>
+            </a:r>
+          </a:p>
+          <a:p>
+            <a:r>
+              <a:rPr lang="en-US" dirty="0"/>
+              <a:t>used to be calculated by </a:t>
+            </a:r>
+            <a:r>
+              <a:rPr lang="en-US" b="1" dirty="0">
+                <a:solidFill>
+                  <a:srgbClr val="00B050"/>
+                </a:solidFill>
+              </a:rPr>
+              <a:t>summing values in a table along </a:t>
+            </a:r>
+          </a:p>
+          <a:p>
+            <a:r>
+              <a:rPr lang="en-US" b="1" dirty="0">
+                <a:solidFill>
+                  <a:srgbClr val="00B050"/>
+                </a:solidFill>
+              </a:rPr>
+              <a:t>rows or columns</a:t>
+            </a:r>
+            <a:r>
+              <a:rPr lang="en-US" dirty="0"/>
+              <a:t>, and writing the sum in the margins of the table.</a:t>
             </a:r>
           </a:p>
           <a:p>
@@ -15747,128 +18665,7 @@
           <a:p>
             <a:r>
               <a:rPr lang="en-US" dirty="0"/>
-              <a:t>Examples of assigning probability.</a:t>
-            </a:r>
-          </a:p>
-          <a:p>
-            <a:endParaRPr lang="en-US" dirty="0"/>
-          </a:p>
-          <a:p>
-            <a:r>
-              <a:rPr lang="en-US" b="1" dirty="0">
-                <a:solidFill>
-                  <a:srgbClr val="0070C0"/>
-                </a:solidFill>
-              </a:rPr>
-              <a:t>Example 1. Tossing a coin.</a:t>
-            </a:r>
-          </a:p>
-          <a:p>
-            <a:endParaRPr lang="en-US" dirty="0"/>
-          </a:p>
-          <a:p>
-            <a:r>
-              <a:rPr lang="en-US" dirty="0"/>
-              <a:t>Possible outcomes : (tails or heads).</a:t>
-            </a:r>
-          </a:p>
-          <a:p>
-            <a:r>
-              <a:rPr lang="en-US" dirty="0"/>
-              <a:t>Events (tails of heads) are mutually exclusive. </a:t>
-            </a:r>
-          </a:p>
-          <a:p>
-            <a:r>
-              <a:rPr lang="en-US" dirty="0"/>
-              <a:t>Their probabilities should be equal.</a:t>
-            </a:r>
-          </a:p>
-          <a:p>
-            <a:endParaRPr lang="en-US" dirty="0"/>
-          </a:p>
-          <a:p>
-            <a:r>
-              <a:rPr lang="en-US" dirty="0"/>
-              <a:t>P</a:t>
-            </a:r>
-            <a:r>
-              <a:rPr lang="en-US" baseline="-25000" dirty="0"/>
-              <a:t>t</a:t>
-            </a:r>
-            <a:r>
-              <a:rPr lang="en-US" dirty="0"/>
-              <a:t> + P</a:t>
-            </a:r>
-            <a:r>
-              <a:rPr lang="en-US" baseline="-25000" dirty="0"/>
-              <a:t>h</a:t>
-            </a:r>
-            <a:r>
-              <a:rPr lang="en-US" dirty="0"/>
-              <a:t> = 1</a:t>
-            </a:r>
-          </a:p>
-          <a:p>
-            <a:r>
-              <a:rPr lang="en-US" dirty="0"/>
-              <a:t>P</a:t>
-            </a:r>
-            <a:r>
-              <a:rPr lang="en-US" baseline="-25000" dirty="0"/>
-              <a:t>t</a:t>
-            </a:r>
-            <a:r>
-              <a:rPr lang="en-US" dirty="0"/>
-              <a:t> = 0.5</a:t>
-            </a:r>
-          </a:p>
-          <a:p>
-            <a:r>
-              <a:rPr lang="en-US" dirty="0"/>
-              <a:t>P</a:t>
-            </a:r>
-            <a:r>
-              <a:rPr lang="en-US" baseline="-25000" dirty="0"/>
-              <a:t>h</a:t>
-            </a:r>
-            <a:r>
-              <a:rPr lang="en-US" dirty="0"/>
-              <a:t> = 0.5</a:t>
-            </a:r>
-          </a:p>
-          <a:p>
-            <a:endParaRPr lang="en-US" dirty="0"/>
-          </a:p>
-          <a:p>
-            <a:r>
-              <a:rPr lang="en-US" b="1" dirty="0">
-                <a:solidFill>
-                  <a:srgbClr val="0070C0"/>
-                </a:solidFill>
-              </a:rPr>
-              <a:t>Example 2. Rolling a die.</a:t>
-            </a:r>
-          </a:p>
-          <a:p>
-            <a:endParaRPr lang="en-US" dirty="0"/>
-          </a:p>
-          <a:p>
-            <a:r>
-              <a:rPr lang="en-US" dirty="0"/>
-              <a:t>Possible outcomes: (1,2,3,4,5,6).</a:t>
-            </a:r>
-          </a:p>
-          <a:p>
-            <a:r>
-              <a:rPr lang="en-US" dirty="0"/>
-              <a:t>They are mutually exclusive, probability equal, sum() = 1</a:t>
-            </a:r>
-          </a:p>
-          <a:p>
-            <a:r>
-              <a:rPr lang="en-US" dirty="0"/>
-              <a:t>So each probability = 1/6 = 0.167 3.</a:t>
+              <a:t>Here are few examples of assigning probability.</a:t>
             </a:r>
           </a:p>
         </p:txBody>
@@ -15887,8 +18684,402 @@
         </p:nvSpPr>
         <p:spPr>
           <a:xfrm>
-            <a:off x="6190593" y="663672"/>
-            <a:ext cx="6001407" cy="3970318"/>
+            <a:off x="6742036" y="2173016"/>
+            <a:ext cx="5229247" cy="4401205"/>
+          </a:xfrm>
+          <a:prstGeom prst="rect">
+            <a:avLst/>
+          </a:prstGeom>
+          <a:solidFill>
+            <a:schemeClr val="accent4">
+              <a:lumMod val="20000"/>
+              <a:lumOff val="80000"/>
+            </a:schemeClr>
+          </a:solidFill>
+        </p:spPr>
+        <p:txBody>
+          <a:bodyPr wrap="square" rtlCol="0">
+            <a:spAutoFit/>
+          </a:bodyPr>
+          <a:lstStyle/>
+          <a:p>
+            <a:r>
+              <a:rPr lang="en-US" b="1" dirty="0">
+                <a:solidFill>
+                  <a:srgbClr val="0070C0"/>
+                </a:solidFill>
+              </a:rPr>
+              <a:t>Example 3. Job Search.</a:t>
+            </a:r>
+          </a:p>
+          <a:p>
+            <a:endParaRPr lang="en-US" dirty="0"/>
+          </a:p>
+          <a:p>
+            <a:r>
+              <a:rPr lang="en-US" dirty="0"/>
+              <a:t>I get 2 emails with job descriptions every day, 10 per week.</a:t>
+            </a:r>
+          </a:p>
+          <a:p>
+            <a:endParaRPr lang="en-US" dirty="0"/>
+          </a:p>
+          <a:p>
+            <a:r>
+              <a:rPr lang="en-US" dirty="0"/>
+              <a:t>Two of them may be a good fit: 2 of 10 (0.2).</a:t>
+            </a:r>
+          </a:p>
+          <a:p>
+            <a:endParaRPr lang="en-US" dirty="0"/>
+          </a:p>
+          <a:p>
+            <a:r>
+              <a:rPr lang="en-US" dirty="0"/>
+              <a:t>So I send emails to "good fit" offers that I am interested. </a:t>
+            </a:r>
+          </a:p>
+          <a:p>
+            <a:r>
+              <a:rPr lang="en-US" dirty="0"/>
+              <a:t>I am invited to an interview for every third position I emailed to</a:t>
+            </a:r>
+          </a:p>
+          <a:p>
+            <a:r>
+              <a:rPr lang="en-US" dirty="0"/>
+              <a:t>    ( 0.2 / 3 = 0.067)</a:t>
+            </a:r>
+          </a:p>
+          <a:p>
+            <a:endParaRPr lang="en-US" dirty="0"/>
+          </a:p>
+          <a:p>
+            <a:r>
+              <a:rPr lang="en-US" dirty="0"/>
+              <a:t>And I get 1 position out of 10 initial interviews (0.0067).</a:t>
+            </a:r>
+          </a:p>
+          <a:p>
+            <a:endParaRPr lang="en-US" dirty="0"/>
+          </a:p>
+          <a:p>
+            <a:r>
+              <a:rPr lang="en-US" dirty="0"/>
+              <a:t>So the probability that an incoming email will result </a:t>
+            </a:r>
+          </a:p>
+          <a:p>
+            <a:r>
+              <a:rPr lang="en-US" dirty="0"/>
+              <a:t>in a job is 0.0067, or ~1%. </a:t>
+            </a:r>
+          </a:p>
+          <a:p>
+            <a:endParaRPr lang="en-US" dirty="0"/>
+          </a:p>
+          <a:p>
+            <a:r>
+              <a:rPr lang="en-US" dirty="0"/>
+              <a:t>So, I need to consider 100 positions (this will take 10 weeks), </a:t>
+            </a:r>
+          </a:p>
+          <a:p>
+            <a:r>
+              <a:rPr lang="en-US" dirty="0"/>
+              <a:t>send 20 emails asking to invite, go to 6..7 interviews, </a:t>
+            </a:r>
+          </a:p>
+          <a:p>
+            <a:r>
+              <a:rPr lang="en-US" dirty="0"/>
+              <a:t>and eventually get a job.</a:t>
+            </a:r>
+          </a:p>
+          <a:p>
+            <a:endParaRPr lang="en-US" dirty="0"/>
+          </a:p>
+          <a:p>
+            <a:r>
+              <a:rPr lang="en-US" dirty="0"/>
+              <a:t>So job search takes 2..3 months.</a:t>
+            </a:r>
+          </a:p>
+        </p:txBody>
+      </p:sp>
+      <p:sp>
+        <p:nvSpPr>
+          <p:cNvPr id="6" name="TextBox 5">
+            <a:extLst>
+              <a:ext uri="{FF2B5EF4-FFF2-40B4-BE49-F238E27FC236}">
+                <a16:creationId xmlns:a16="http://schemas.microsoft.com/office/drawing/2014/main" id="{B75A9A7D-B132-508A-2E74-D9B35CB1AE35}"/>
+              </a:ext>
+            </a:extLst>
+          </p:cNvPr>
+          <p:cNvSpPr txBox="1"/>
+          <p:nvPr/>
+        </p:nvSpPr>
+        <p:spPr>
+          <a:xfrm>
+            <a:off x="167709" y="5404670"/>
+            <a:ext cx="4822418" cy="1169551"/>
+          </a:xfrm>
+          <a:prstGeom prst="rect">
+            <a:avLst/>
+          </a:prstGeom>
+          <a:solidFill>
+            <a:schemeClr val="accent2">
+              <a:lumMod val="20000"/>
+              <a:lumOff val="80000"/>
+            </a:schemeClr>
+          </a:solidFill>
+        </p:spPr>
+        <p:txBody>
+          <a:bodyPr wrap="square" rtlCol="0">
+            <a:spAutoFit/>
+          </a:bodyPr>
+          <a:lstStyle/>
+          <a:p>
+            <a:r>
+              <a:rPr lang="en-US" b="1" dirty="0">
+                <a:solidFill>
+                  <a:srgbClr val="0070C0"/>
+                </a:solidFill>
+              </a:rPr>
+              <a:t>Example 2. Rolling a die.</a:t>
+            </a:r>
+          </a:p>
+          <a:p>
+            <a:endParaRPr lang="en-US" dirty="0"/>
+          </a:p>
+          <a:p>
+            <a:r>
+              <a:rPr lang="en-US" dirty="0"/>
+              <a:t>Possible outcomes: (1,2,3,4,5,6).</a:t>
+            </a:r>
+          </a:p>
+          <a:p>
+            <a:r>
+              <a:rPr lang="en-US" dirty="0"/>
+              <a:t>They are mutually exclusive, probability equal, sum() = 1</a:t>
+            </a:r>
+          </a:p>
+          <a:p>
+            <a:r>
+              <a:rPr lang="en-US" dirty="0"/>
+              <a:t>So each probability = 1/6 = 0.167 3.</a:t>
+            </a:r>
+          </a:p>
+        </p:txBody>
+      </p:sp>
+      <p:sp>
+        <p:nvSpPr>
+          <p:cNvPr id="7" name="TextBox 6">
+            <a:extLst>
+              <a:ext uri="{FF2B5EF4-FFF2-40B4-BE49-F238E27FC236}">
+                <a16:creationId xmlns:a16="http://schemas.microsoft.com/office/drawing/2014/main" id="{2B981F2C-1B33-8A33-D7A9-7F87977B6221}"/>
+              </a:ext>
+            </a:extLst>
+          </p:cNvPr>
+          <p:cNvSpPr txBox="1"/>
+          <p:nvPr/>
+        </p:nvSpPr>
+        <p:spPr>
+          <a:xfrm>
+            <a:off x="167709" y="3325534"/>
+            <a:ext cx="3816105" cy="1723549"/>
+          </a:xfrm>
+          <a:prstGeom prst="rect">
+            <a:avLst/>
+          </a:prstGeom>
+          <a:solidFill>
+            <a:schemeClr val="accent6">
+              <a:lumMod val="20000"/>
+              <a:lumOff val="80000"/>
+            </a:schemeClr>
+          </a:solidFill>
+        </p:spPr>
+        <p:txBody>
+          <a:bodyPr wrap="square" rtlCol="0">
+            <a:spAutoFit/>
+          </a:bodyPr>
+          <a:lstStyle/>
+          <a:p>
+            <a:r>
+              <a:rPr lang="en-US" b="1" dirty="0">
+                <a:solidFill>
+                  <a:srgbClr val="0070C0"/>
+                </a:solidFill>
+              </a:rPr>
+              <a:t>Example 1. Tossing a coin.</a:t>
+            </a:r>
+          </a:p>
+          <a:p>
+            <a:endParaRPr lang="en-US" dirty="0"/>
+          </a:p>
+          <a:p>
+            <a:r>
+              <a:rPr lang="en-US" dirty="0"/>
+              <a:t>Possible outcomes : (tails or heads).</a:t>
+            </a:r>
+          </a:p>
+          <a:p>
+            <a:r>
+              <a:rPr lang="en-US" dirty="0"/>
+              <a:t>Events (tails of heads) are mutually exclusive. </a:t>
+            </a:r>
+          </a:p>
+          <a:p>
+            <a:r>
+              <a:rPr lang="en-US" dirty="0"/>
+              <a:t>Their probabilities should be equal.</a:t>
+            </a:r>
+          </a:p>
+          <a:p>
+            <a:r>
+              <a:rPr lang="en-US" sz="1200" b="1" dirty="0">
+                <a:solidFill>
+                  <a:srgbClr val="0070C0"/>
+                </a:solidFill>
+                <a:latin typeface="Menlo" panose="020B0609030804020204" pitchFamily="49" charset="0"/>
+                <a:ea typeface="Menlo" panose="020B0609030804020204" pitchFamily="49" charset="0"/>
+                <a:cs typeface="Menlo" panose="020B0609030804020204" pitchFamily="49" charset="0"/>
+              </a:rPr>
+              <a:t>    P</a:t>
+            </a:r>
+            <a:r>
+              <a:rPr lang="en-US" sz="1200" b="1" baseline="-25000" dirty="0">
+                <a:solidFill>
+                  <a:srgbClr val="0070C0"/>
+                </a:solidFill>
+                <a:latin typeface="Menlo" panose="020B0609030804020204" pitchFamily="49" charset="0"/>
+                <a:ea typeface="Menlo" panose="020B0609030804020204" pitchFamily="49" charset="0"/>
+                <a:cs typeface="Menlo" panose="020B0609030804020204" pitchFamily="49" charset="0"/>
+              </a:rPr>
+              <a:t>t</a:t>
+            </a:r>
+            <a:r>
+              <a:rPr lang="en-US" sz="1200" b="1" dirty="0">
+                <a:solidFill>
+                  <a:srgbClr val="0070C0"/>
+                </a:solidFill>
+                <a:latin typeface="Menlo" panose="020B0609030804020204" pitchFamily="49" charset="0"/>
+                <a:ea typeface="Menlo" panose="020B0609030804020204" pitchFamily="49" charset="0"/>
+                <a:cs typeface="Menlo" panose="020B0609030804020204" pitchFamily="49" charset="0"/>
+              </a:rPr>
+              <a:t> + P</a:t>
+            </a:r>
+            <a:r>
+              <a:rPr lang="en-US" sz="1200" b="1" baseline="-25000" dirty="0">
+                <a:solidFill>
+                  <a:srgbClr val="0070C0"/>
+                </a:solidFill>
+                <a:latin typeface="Menlo" panose="020B0609030804020204" pitchFamily="49" charset="0"/>
+                <a:ea typeface="Menlo" panose="020B0609030804020204" pitchFamily="49" charset="0"/>
+                <a:cs typeface="Menlo" panose="020B0609030804020204" pitchFamily="49" charset="0"/>
+              </a:rPr>
+              <a:t>h</a:t>
+            </a:r>
+            <a:r>
+              <a:rPr lang="en-US" sz="1200" b="1" dirty="0">
+                <a:solidFill>
+                  <a:srgbClr val="0070C0"/>
+                </a:solidFill>
+                <a:latin typeface="Menlo" panose="020B0609030804020204" pitchFamily="49" charset="0"/>
+                <a:ea typeface="Menlo" panose="020B0609030804020204" pitchFamily="49" charset="0"/>
+                <a:cs typeface="Menlo" panose="020B0609030804020204" pitchFamily="49" charset="0"/>
+              </a:rPr>
+              <a:t> = 1</a:t>
+            </a:r>
+          </a:p>
+          <a:p>
+            <a:r>
+              <a:rPr lang="en-US" sz="1200" b="1" dirty="0">
+                <a:solidFill>
+                  <a:srgbClr val="0070C0"/>
+                </a:solidFill>
+                <a:latin typeface="Menlo" panose="020B0609030804020204" pitchFamily="49" charset="0"/>
+                <a:ea typeface="Menlo" panose="020B0609030804020204" pitchFamily="49" charset="0"/>
+                <a:cs typeface="Menlo" panose="020B0609030804020204" pitchFamily="49" charset="0"/>
+              </a:rPr>
+              <a:t>    P</a:t>
+            </a:r>
+            <a:r>
+              <a:rPr lang="en-US" sz="1200" b="1" baseline="-25000" dirty="0">
+                <a:solidFill>
+                  <a:srgbClr val="0070C0"/>
+                </a:solidFill>
+                <a:latin typeface="Menlo" panose="020B0609030804020204" pitchFamily="49" charset="0"/>
+                <a:ea typeface="Menlo" panose="020B0609030804020204" pitchFamily="49" charset="0"/>
+                <a:cs typeface="Menlo" panose="020B0609030804020204" pitchFamily="49" charset="0"/>
+              </a:rPr>
+              <a:t>t</a:t>
+            </a:r>
+            <a:r>
+              <a:rPr lang="en-US" sz="1200" b="1" dirty="0">
+                <a:solidFill>
+                  <a:srgbClr val="0070C0"/>
+                </a:solidFill>
+                <a:latin typeface="Menlo" panose="020B0609030804020204" pitchFamily="49" charset="0"/>
+                <a:ea typeface="Menlo" panose="020B0609030804020204" pitchFamily="49" charset="0"/>
+                <a:cs typeface="Menlo" panose="020B0609030804020204" pitchFamily="49" charset="0"/>
+              </a:rPr>
+              <a:t> = 0.5</a:t>
+            </a:r>
+          </a:p>
+          <a:p>
+            <a:r>
+              <a:rPr lang="en-US" sz="1200" b="1" dirty="0">
+                <a:solidFill>
+                  <a:srgbClr val="0070C0"/>
+                </a:solidFill>
+                <a:latin typeface="Menlo" panose="020B0609030804020204" pitchFamily="49" charset="0"/>
+                <a:ea typeface="Menlo" panose="020B0609030804020204" pitchFamily="49" charset="0"/>
+                <a:cs typeface="Menlo" panose="020B0609030804020204" pitchFamily="49" charset="0"/>
+              </a:rPr>
+              <a:t>    P</a:t>
+            </a:r>
+            <a:r>
+              <a:rPr lang="en-US" sz="1200" b="1" baseline="-25000" dirty="0">
+                <a:solidFill>
+                  <a:srgbClr val="0070C0"/>
+                </a:solidFill>
+                <a:latin typeface="Menlo" panose="020B0609030804020204" pitchFamily="49" charset="0"/>
+                <a:ea typeface="Menlo" panose="020B0609030804020204" pitchFamily="49" charset="0"/>
+                <a:cs typeface="Menlo" panose="020B0609030804020204" pitchFamily="49" charset="0"/>
+              </a:rPr>
+              <a:t>h</a:t>
+            </a:r>
+            <a:r>
+              <a:rPr lang="en-US" sz="1200" b="1" dirty="0">
+                <a:solidFill>
+                  <a:srgbClr val="0070C0"/>
+                </a:solidFill>
+                <a:latin typeface="Menlo" panose="020B0609030804020204" pitchFamily="49" charset="0"/>
+                <a:ea typeface="Menlo" panose="020B0609030804020204" pitchFamily="49" charset="0"/>
+                <a:cs typeface="Menlo" panose="020B0609030804020204" pitchFamily="49" charset="0"/>
+              </a:rPr>
+              <a:t> = 0.5</a:t>
+            </a:r>
+          </a:p>
+        </p:txBody>
+      </p:sp>
+      <p:sp>
+        <p:nvSpPr>
+          <p:cNvPr id="8" name="TextBox 7">
+            <a:extLst>
+              <a:ext uri="{FF2B5EF4-FFF2-40B4-BE49-F238E27FC236}">
+                <a16:creationId xmlns:a16="http://schemas.microsoft.com/office/drawing/2014/main" id="{D0D13123-3898-1C40-74CA-02EE7A7D9430}"/>
+              </a:ext>
+            </a:extLst>
+          </p:cNvPr>
+          <p:cNvSpPr txBox="1"/>
+          <p:nvPr/>
+        </p:nvSpPr>
+        <p:spPr>
+          <a:xfrm>
+            <a:off x="0" y="0"/>
+            <a:ext cx="3498574" cy="461665"/>
           </a:xfrm>
           <a:prstGeom prst="rect">
             <a:avLst/>
@@ -15902,97 +19093,91 @@
           <a:lstStyle/>
           <a:p>
             <a:r>
-              <a:rPr lang="en-US" b="1" dirty="0">
-                <a:solidFill>
-                  <a:srgbClr val="0070C0"/>
-                </a:solidFill>
-              </a:rPr>
-              <a:t>Example 3. Job Search.</a:t>
-            </a:r>
-          </a:p>
-          <a:p>
-            <a:endParaRPr lang="en-US" dirty="0"/>
-          </a:p>
-          <a:p>
-            <a:r>
-              <a:rPr lang="en-US" dirty="0"/>
-              <a:t>I get 2 emails with job descriptions every day, 10 per week.</a:t>
-            </a:r>
-          </a:p>
-          <a:p>
-            <a:endParaRPr lang="en-US" dirty="0"/>
-          </a:p>
-          <a:p>
-            <a:r>
-              <a:rPr lang="en-US" dirty="0"/>
-              <a:t>Two of them may be a fit: 2 of 10 (0.2).</a:t>
-            </a:r>
-          </a:p>
-          <a:p>
-            <a:endParaRPr lang="en-US" dirty="0"/>
-          </a:p>
-          <a:p>
-            <a:r>
-              <a:rPr lang="en-US" dirty="0"/>
-              <a:t>So I send an email that I am interested. </a:t>
-            </a:r>
-          </a:p>
-          <a:p>
-            <a:r>
-              <a:rPr lang="en-US" dirty="0"/>
-              <a:t>I am invited to every third position I requested (0.2/3 = 0.067)</a:t>
-            </a:r>
-          </a:p>
-          <a:p>
-            <a:endParaRPr lang="en-US" dirty="0"/>
-          </a:p>
-          <a:p>
-            <a:r>
-              <a:rPr lang="en-US" dirty="0"/>
-              <a:t>And I get 1 position out of 10 initial interviews (0.0067).</a:t>
-            </a:r>
-          </a:p>
-          <a:p>
-            <a:endParaRPr lang="en-US" dirty="0"/>
-          </a:p>
-          <a:p>
-            <a:r>
-              <a:rPr lang="en-US" dirty="0"/>
-              <a:t>So the probability that an incoming email will result </a:t>
-            </a:r>
-          </a:p>
-          <a:p>
-            <a:r>
-              <a:rPr lang="en-US" dirty="0"/>
-              <a:t>in a job is 0.0067, or ~1%. </a:t>
-            </a:r>
-          </a:p>
-          <a:p>
-            <a:r>
-              <a:rPr lang="en-US" dirty="0"/>
-              <a:t>So, I need to consider 100 positions (this will take 10 weeks), </a:t>
-            </a:r>
-          </a:p>
-          <a:p>
-            <a:r>
-              <a:rPr lang="en-US" dirty="0"/>
-              <a:t>send 20 emails asking to invite, go to 6..7 interviews, </a:t>
-            </a:r>
-          </a:p>
-          <a:p>
-            <a:r>
-              <a:rPr lang="en-US" dirty="0"/>
-              <a:t>and eventually get a job.</a:t>
-            </a:r>
-          </a:p>
-          <a:p>
-            <a:endParaRPr lang="en-US" dirty="0"/>
-          </a:p>
-          <a:p>
-            <a:r>
-              <a:rPr lang="en-US" dirty="0"/>
-              <a:t>So job search takes 2..3 months.</a:t>
-            </a:r>
+              <a:rPr lang="en-US" sz="2400" b="1" dirty="0"/>
+              <a:t>Probability Examples</a:t>
+            </a:r>
+          </a:p>
+        </p:txBody>
+      </p:sp>
+      <p:pic>
+        <p:nvPicPr>
+          <p:cNvPr id="2" name="Picture 1">
+            <a:extLst>
+              <a:ext uri="{FF2B5EF4-FFF2-40B4-BE49-F238E27FC236}">
+                <a16:creationId xmlns:a16="http://schemas.microsoft.com/office/drawing/2014/main" id="{5D195050-087F-60E5-41EB-F25E51F7D7C2}"/>
+              </a:ext>
+            </a:extLst>
+          </p:cNvPr>
+          <p:cNvPicPr>
+            <a:picLocks noChangeAspect="1"/>
+          </p:cNvPicPr>
+          <p:nvPr/>
+        </p:nvPicPr>
+        <p:blipFill>
+          <a:blip r:embed="rId2" cstate="email">
+            <a:extLst>
+              <a:ext uri="{28A0092B-C50C-407E-A947-70E740481C1C}">
+                <a14:useLocalDpi xmlns:a14="http://schemas.microsoft.com/office/drawing/2010/main"/>
+              </a:ext>
+            </a:extLst>
+          </a:blip>
+          <a:stretch>
+            <a:fillRect/>
+          </a:stretch>
+        </p:blipFill>
+        <p:spPr>
+          <a:xfrm>
+            <a:off x="6742036" y="283779"/>
+            <a:ext cx="4330700" cy="1676400"/>
+          </a:xfrm>
+          <a:prstGeom prst="rect">
+            <a:avLst/>
+          </a:prstGeom>
+        </p:spPr>
+      </p:pic>
+      <p:sp>
+        <p:nvSpPr>
+          <p:cNvPr id="3" name="Right Arrow 2">
+            <a:extLst>
+              <a:ext uri="{FF2B5EF4-FFF2-40B4-BE49-F238E27FC236}">
+                <a16:creationId xmlns:a16="http://schemas.microsoft.com/office/drawing/2014/main" id="{FB3A44E9-0625-7FBB-A6FB-B7BE2FFBD37E}"/>
+              </a:ext>
+            </a:extLst>
+          </p:cNvPr>
+          <p:cNvSpPr/>
+          <p:nvPr/>
+        </p:nvSpPr>
+        <p:spPr>
+          <a:xfrm rot="20478061">
+            <a:off x="5512905" y="1385242"/>
+            <a:ext cx="1060174" cy="278295"/>
+          </a:xfrm>
+          <a:prstGeom prst="rightArrow">
+            <a:avLst/>
+          </a:prstGeom>
+        </p:spPr>
+        <p:style>
+          <a:lnRef idx="2">
+            <a:schemeClr val="accent1">
+              <a:shade val="50000"/>
+            </a:schemeClr>
+          </a:lnRef>
+          <a:fillRef idx="1">
+            <a:schemeClr val="accent1"/>
+          </a:fillRef>
+          <a:effectRef idx="0">
+            <a:schemeClr val="accent1"/>
+          </a:effectRef>
+          <a:fontRef idx="minor">
+            <a:schemeClr val="lt1"/>
+          </a:fontRef>
+        </p:style>
+        <p:txBody>
+          <a:bodyPr rtlCol="0" anchor="ctr"/>
+          <a:lstStyle/>
+          <a:p>
+            <a:pPr algn="ctr"/>
+            <a:endParaRPr lang="en-US"/>
           </a:p>
         </p:txBody>
       </p:sp>
@@ -16040,13 +19225,18 @@
         </p:nvSpPr>
         <p:spPr>
           <a:xfrm>
-            <a:off x="189186" y="258901"/>
-            <a:ext cx="5675586" cy="6340197"/>
+            <a:off x="375871" y="629238"/>
+            <a:ext cx="5635733" cy="2492990"/>
           </a:xfrm>
           <a:prstGeom prst="rect">
             <a:avLst/>
           </a:prstGeom>
-          <a:noFill/>
+          <a:solidFill>
+            <a:schemeClr val="accent2">
+              <a:lumMod val="20000"/>
+              <a:lumOff val="80000"/>
+            </a:schemeClr>
+          </a:solidFill>
         </p:spPr>
         <p:txBody>
           <a:bodyPr wrap="square" rtlCol="0">
@@ -16055,99 +19245,119 @@
           <a:lstStyle/>
           <a:p>
             <a:r>
-              <a:rPr lang="en-US" b="1" dirty="0">
-                <a:solidFill>
-                  <a:srgbClr val="0070C0"/>
-                </a:solidFill>
-              </a:rPr>
-              <a:t>Rules (Or, And, etc.)</a:t>
-            </a:r>
-          </a:p>
-          <a:p>
-            <a:endParaRPr lang="en-US" dirty="0"/>
-          </a:p>
-          <a:p>
-            <a:r>
-              <a:rPr lang="en-US" dirty="0"/>
-              <a:t>Lets A be an event. </a:t>
-            </a:r>
-          </a:p>
-          <a:p>
-            <a:r>
-              <a:rPr lang="en-US" dirty="0"/>
-              <a:t>P(A) – </a:t>
-            </a:r>
-            <a:r>
-              <a:rPr lang="en-US" dirty="0" err="1"/>
-              <a:t>probabiltiy</a:t>
-            </a:r>
-            <a:r>
-              <a:rPr lang="en-US" dirty="0"/>
-              <a:t> of event A </a:t>
-            </a:r>
-          </a:p>
-          <a:p>
-            <a:r>
-              <a:rPr lang="en-US" dirty="0"/>
-              <a:t>then: P(A) + P(not A) = 1 </a:t>
-            </a:r>
-          </a:p>
-          <a:p>
-            <a:endParaRPr lang="en-US" dirty="0"/>
-          </a:p>
-          <a:p>
-            <a:r>
-              <a:rPr lang="en-US" dirty="0"/>
-              <a:t>If A and B are events, then: </a:t>
-            </a:r>
-          </a:p>
-          <a:p>
-            <a:r>
-              <a:rPr lang="en-US" dirty="0"/>
-              <a:t>P(A or B) = P(A) + P(B) – P(A and B) </a:t>
-            </a:r>
-          </a:p>
-          <a:p>
-            <a:endParaRPr lang="en-US" dirty="0"/>
-          </a:p>
-          <a:p>
-            <a:r>
-              <a:rPr lang="en-US" dirty="0"/>
-              <a:t>for mutually exclusive events P(A and B) = 0, </a:t>
-            </a:r>
-          </a:p>
-          <a:p>
-            <a:r>
-              <a:rPr lang="en-US" dirty="0"/>
-              <a:t>so P(A or B) = P(A) + P(B)</a:t>
-            </a:r>
-          </a:p>
-          <a:p>
-            <a:endParaRPr lang="en-US" dirty="0"/>
-          </a:p>
-          <a:p>
-            <a:r>
-              <a:rPr lang="en-US" b="1" dirty="0">
-                <a:solidFill>
-                  <a:srgbClr val="0070C0"/>
-                </a:solidFill>
-              </a:rPr>
-              <a:t>Venn Diagrams</a:t>
-            </a:r>
-          </a:p>
-          <a:p>
-            <a:endParaRPr lang="en-US" dirty="0"/>
-          </a:p>
-          <a:p>
-            <a:r>
               <a:rPr lang="en-US" dirty="0"/>
               <a:t>Venn Diagrams = Graphical representation of events as circles.</a:t>
             </a:r>
           </a:p>
           <a:p>
+            <a:endParaRPr lang="en-US" dirty="0"/>
+          </a:p>
+          <a:p>
             <a:r>
               <a:rPr lang="en-US" dirty="0"/>
-              <a:t>See many examples – just google images for: Venn Diagram A or B.</a:t>
+              <a:t>Search google images for:  </a:t>
+            </a:r>
+            <a:r>
+              <a:rPr lang="en-US" sz="1200" b="1" dirty="0">
+                <a:solidFill>
+                  <a:srgbClr val="00B0F0"/>
+                </a:solidFill>
+                <a:latin typeface="Menlo" panose="020B0609030804020204" pitchFamily="49" charset="0"/>
+                <a:ea typeface="Menlo" panose="020B0609030804020204" pitchFamily="49" charset="0"/>
+                <a:cs typeface="Menlo" panose="020B0609030804020204" pitchFamily="49" charset="0"/>
+              </a:rPr>
+              <a:t>Venn Diagram A or B</a:t>
+            </a:r>
+            <a:br>
+              <a:rPr lang="en-US" dirty="0"/>
+            </a:br>
+            <a:r>
+              <a:rPr lang="en-US" dirty="0"/>
+              <a:t>You will find many examples like the ones on the right.</a:t>
+            </a:r>
+          </a:p>
+          <a:p>
+            <a:pPr lvl="1"/>
+            <a:r>
+              <a:rPr lang="en-US" sz="1200" dirty="0">
+                <a:solidFill>
+                  <a:srgbClr val="00B0F0"/>
+                </a:solidFill>
+                <a:latin typeface="Menlo" panose="020B0609030804020204" pitchFamily="49" charset="0"/>
+                <a:ea typeface="Menlo" panose="020B0609030804020204" pitchFamily="49" charset="0"/>
+                <a:cs typeface="Menlo" panose="020B0609030804020204" pitchFamily="49" charset="0"/>
+              </a:rPr>
+              <a:t>  A</a:t>
+            </a:r>
+          </a:p>
+          <a:p>
+            <a:pPr lvl="1"/>
+            <a:r>
+              <a:rPr lang="en-US" sz="1200" dirty="0">
+                <a:solidFill>
+                  <a:srgbClr val="00B0F0"/>
+                </a:solidFill>
+                <a:latin typeface="Menlo" panose="020B0609030804020204" pitchFamily="49" charset="0"/>
+                <a:ea typeface="Menlo" panose="020B0609030804020204" pitchFamily="49" charset="0"/>
+                <a:cs typeface="Menlo" panose="020B0609030804020204" pitchFamily="49" charset="0"/>
+              </a:rPr>
+              <a:t>  not A</a:t>
+            </a:r>
+          </a:p>
+          <a:p>
+            <a:pPr lvl="1"/>
+            <a:r>
+              <a:rPr lang="en-US" sz="1200" dirty="0">
+                <a:solidFill>
+                  <a:srgbClr val="00B0F0"/>
+                </a:solidFill>
+                <a:latin typeface="Menlo" panose="020B0609030804020204" pitchFamily="49" charset="0"/>
+                <a:ea typeface="Menlo" panose="020B0609030804020204" pitchFamily="49" charset="0"/>
+                <a:cs typeface="Menlo" panose="020B0609030804020204" pitchFamily="49" charset="0"/>
+              </a:rPr>
+              <a:t>  disjoint sets</a:t>
+            </a:r>
+          </a:p>
+          <a:p>
+            <a:pPr lvl="1"/>
+            <a:r>
+              <a:rPr lang="en-US" sz="1200" dirty="0">
+                <a:solidFill>
+                  <a:srgbClr val="00B0F0"/>
+                </a:solidFill>
+                <a:latin typeface="Menlo" panose="020B0609030804020204" pitchFamily="49" charset="0"/>
+                <a:ea typeface="Menlo" panose="020B0609030804020204" pitchFamily="49" charset="0"/>
+                <a:cs typeface="Menlo" panose="020B0609030804020204" pitchFamily="49" charset="0"/>
+              </a:rPr>
+              <a:t>  B subset of A</a:t>
+            </a:r>
+          </a:p>
+          <a:p>
+            <a:pPr lvl="1"/>
+            <a:r>
+              <a:rPr lang="en-US" sz="1200" dirty="0">
+                <a:solidFill>
+                  <a:srgbClr val="00B0F0"/>
+                </a:solidFill>
+                <a:latin typeface="Menlo" panose="020B0609030804020204" pitchFamily="49" charset="0"/>
+                <a:ea typeface="Menlo" panose="020B0609030804020204" pitchFamily="49" charset="0"/>
+                <a:cs typeface="Menlo" panose="020B0609030804020204" pitchFamily="49" charset="0"/>
+              </a:rPr>
+              <a:t>  intersection (A and B)</a:t>
+            </a:r>
+          </a:p>
+          <a:p>
+            <a:pPr lvl="1"/>
+            <a:r>
+              <a:rPr lang="en-US" sz="1200" dirty="0">
+                <a:solidFill>
+                  <a:srgbClr val="00B0F0"/>
+                </a:solidFill>
+                <a:latin typeface="Menlo" panose="020B0609030804020204" pitchFamily="49" charset="0"/>
+                <a:ea typeface="Menlo" panose="020B0609030804020204" pitchFamily="49" charset="0"/>
+                <a:cs typeface="Menlo" panose="020B0609030804020204" pitchFamily="49" charset="0"/>
+              </a:rPr>
+              <a:t>  union (A or B)</a:t>
             </a:r>
           </a:p>
           <a:p>
@@ -16156,61 +19366,7 @@
           <a:p>
             <a:r>
               <a:rPr lang="en-US" dirty="0"/>
-              <a:t>For example, this image shows Intersection (A and B),</a:t>
-            </a:r>
-          </a:p>
-          <a:p>
-            <a:r>
-              <a:rPr lang="en-US" dirty="0"/>
-              <a:t>negation of intersection (A but not B, or B but not A),</a:t>
-            </a:r>
-          </a:p>
-          <a:p>
-            <a:r>
-              <a:rPr lang="en-US" dirty="0"/>
-              <a:t>union (A or B), and subtraction (A but not B) :</a:t>
-            </a:r>
-          </a:p>
-          <a:p>
-            <a:endParaRPr lang="en-US" dirty="0"/>
-          </a:p>
-          <a:p>
-            <a:r>
-              <a:rPr lang="en-US" dirty="0"/>
-              <a:t>Conditional Probability</a:t>
-            </a:r>
-          </a:p>
-          <a:p>
-            <a:r>
-              <a:rPr lang="en-US" dirty="0"/>
-              <a:t>P(A|B) – probability of A given that B has occurred.</a:t>
-            </a:r>
-          </a:p>
-          <a:p>
-            <a:r>
-              <a:rPr lang="en-US" dirty="0"/>
-              <a:t>P(A|B) = P(A and B) / P(B) (if P(B) is not zero)</a:t>
-            </a:r>
-          </a:p>
-          <a:p>
-            <a:endParaRPr lang="en-US" dirty="0"/>
-          </a:p>
-          <a:p>
-            <a:r>
-              <a:rPr lang="en-US" dirty="0"/>
-              <a:t>If A &amp; B are independent form each other, then:</a:t>
-            </a:r>
-          </a:p>
-          <a:p>
-            <a:r>
-              <a:rPr lang="en-US" dirty="0"/>
-              <a:t>P(A|B) = P(A)</a:t>
-            </a:r>
-          </a:p>
-          <a:p>
-            <a:r>
-              <a:rPr lang="en-US" dirty="0"/>
-              <a:t>P(B|A) = P(B)</a:t>
+              <a:t>There are many other combinations, for example, (A but not B)</a:t>
             </a:r>
           </a:p>
         </p:txBody>
@@ -16251,6 +19407,217 @@
           </a:prstGeom>
         </p:spPr>
       </p:pic>
+      <p:sp>
+        <p:nvSpPr>
+          <p:cNvPr id="3" name="TextBox 2">
+            <a:extLst>
+              <a:ext uri="{FF2B5EF4-FFF2-40B4-BE49-F238E27FC236}">
+                <a16:creationId xmlns:a16="http://schemas.microsoft.com/office/drawing/2014/main" id="{76DAEA7F-34CF-2F98-4C06-DB67D935B97B}"/>
+              </a:ext>
+            </a:extLst>
+          </p:cNvPr>
+          <p:cNvSpPr txBox="1"/>
+          <p:nvPr/>
+        </p:nvSpPr>
+        <p:spPr>
+          <a:xfrm>
+            <a:off x="0" y="0"/>
+            <a:ext cx="2991336" cy="523220"/>
+          </a:xfrm>
+          <a:prstGeom prst="rect">
+            <a:avLst/>
+          </a:prstGeom>
+          <a:noFill/>
+        </p:spPr>
+        <p:txBody>
+          <a:bodyPr wrap="square" rtlCol="0">
+            <a:spAutoFit/>
+          </a:bodyPr>
+          <a:lstStyle/>
+          <a:p>
+            <a:r>
+              <a:rPr lang="en-US" sz="2800" b="1"/>
+              <a:t>Venn Diagrams</a:t>
+            </a:r>
+          </a:p>
+        </p:txBody>
+      </p:sp>
+      <p:sp>
+        <p:nvSpPr>
+          <p:cNvPr id="5" name="TextBox 4">
+            <a:extLst>
+              <a:ext uri="{FF2B5EF4-FFF2-40B4-BE49-F238E27FC236}">
+                <a16:creationId xmlns:a16="http://schemas.microsoft.com/office/drawing/2014/main" id="{3D32D249-9F4D-C448-9980-8A4FECFFE1ED}"/>
+              </a:ext>
+            </a:extLst>
+          </p:cNvPr>
+          <p:cNvSpPr txBox="1"/>
+          <p:nvPr/>
+        </p:nvSpPr>
+        <p:spPr>
+          <a:xfrm>
+            <a:off x="352926" y="3438939"/>
+            <a:ext cx="5658678" cy="3139321"/>
+          </a:xfrm>
+          <a:prstGeom prst="rect">
+            <a:avLst/>
+          </a:prstGeom>
+          <a:solidFill>
+            <a:schemeClr val="accent4">
+              <a:lumMod val="20000"/>
+              <a:lumOff val="80000"/>
+            </a:schemeClr>
+          </a:solidFill>
+        </p:spPr>
+        <p:txBody>
+          <a:bodyPr wrap="square" rtlCol="0">
+            <a:spAutoFit/>
+          </a:bodyPr>
+          <a:lstStyle/>
+          <a:p>
+            <a:r>
+              <a:rPr lang="en-US" dirty="0"/>
+              <a:t>If P(A) – </a:t>
+            </a:r>
+            <a:r>
+              <a:rPr lang="en-US" dirty="0" err="1"/>
+              <a:t>probabiltiy</a:t>
+            </a:r>
+            <a:r>
+              <a:rPr lang="en-US" dirty="0"/>
+              <a:t> of event A, then: P(A) + P(not A) = 1 </a:t>
+            </a:r>
+          </a:p>
+          <a:p>
+            <a:r>
+              <a:rPr lang="en-US" dirty="0"/>
+              <a:t>If A and B are events, then: </a:t>
+            </a:r>
+          </a:p>
+          <a:p>
+            <a:r>
+              <a:rPr lang="en-US" sz="1200" dirty="0">
+                <a:solidFill>
+                  <a:srgbClr val="00B0F0"/>
+                </a:solidFill>
+                <a:latin typeface="Menlo" panose="020B0609030804020204" pitchFamily="49" charset="0"/>
+                <a:ea typeface="Menlo" panose="020B0609030804020204" pitchFamily="49" charset="0"/>
+                <a:cs typeface="Menlo" panose="020B0609030804020204" pitchFamily="49" charset="0"/>
+              </a:rPr>
+              <a:t>    P(A or B) = P(A) + P(B) – P(A and B) </a:t>
+            </a:r>
+          </a:p>
+          <a:p>
+            <a:endParaRPr lang="en-US" dirty="0"/>
+          </a:p>
+          <a:p>
+            <a:r>
+              <a:rPr lang="en-US" dirty="0"/>
+              <a:t>For mutually exclusive events:</a:t>
+            </a:r>
+          </a:p>
+          <a:p>
+            <a:r>
+              <a:rPr lang="en-US" sz="1200" dirty="0">
+                <a:solidFill>
+                  <a:srgbClr val="00B0F0"/>
+                </a:solidFill>
+                <a:latin typeface="Menlo" panose="020B0609030804020204" pitchFamily="49" charset="0"/>
+                <a:ea typeface="Menlo" panose="020B0609030804020204" pitchFamily="49" charset="0"/>
+                <a:cs typeface="Menlo" panose="020B0609030804020204" pitchFamily="49" charset="0"/>
+              </a:rPr>
+              <a:t>    P(A and B) = 0</a:t>
+            </a:r>
+          </a:p>
+          <a:p>
+            <a:r>
+              <a:rPr lang="en-US" dirty="0"/>
+              <a:t>so   </a:t>
+            </a:r>
+            <a:r>
+              <a:rPr lang="en-US" sz="1200" dirty="0">
+                <a:solidFill>
+                  <a:srgbClr val="00B0F0"/>
+                </a:solidFill>
+                <a:latin typeface="Menlo" panose="020B0609030804020204" pitchFamily="49" charset="0"/>
+                <a:ea typeface="Menlo" panose="020B0609030804020204" pitchFamily="49" charset="0"/>
+                <a:cs typeface="Menlo" panose="020B0609030804020204" pitchFamily="49" charset="0"/>
+              </a:rPr>
+              <a:t>P(A or B) = P(A) + P(B)</a:t>
+            </a:r>
+          </a:p>
+          <a:p>
+            <a:endParaRPr lang="en-US" dirty="0"/>
+          </a:p>
+          <a:p>
+            <a:r>
+              <a:rPr lang="en-US" dirty="0"/>
+              <a:t>Notation for Conditional Probability:</a:t>
+            </a:r>
+          </a:p>
+          <a:p>
+            <a:r>
+              <a:rPr lang="en-US" sz="1200" dirty="0">
+                <a:solidFill>
+                  <a:srgbClr val="00B0F0"/>
+                </a:solidFill>
+                <a:latin typeface="Menlo" panose="020B0609030804020204" pitchFamily="49" charset="0"/>
+                <a:ea typeface="Menlo" panose="020B0609030804020204" pitchFamily="49" charset="0"/>
+                <a:cs typeface="Menlo" panose="020B0609030804020204" pitchFamily="49" charset="0"/>
+              </a:rPr>
+              <a:t>    P(A|B) – probability of A given that B has occurred.</a:t>
+            </a:r>
+          </a:p>
+          <a:p>
+            <a:r>
+              <a:rPr lang="en-US" sz="1200" dirty="0">
+                <a:solidFill>
+                  <a:srgbClr val="00B0F0"/>
+                </a:solidFill>
+                <a:latin typeface="Menlo" panose="020B0609030804020204" pitchFamily="49" charset="0"/>
+                <a:ea typeface="Menlo" panose="020B0609030804020204" pitchFamily="49" charset="0"/>
+                <a:cs typeface="Menlo" panose="020B0609030804020204" pitchFamily="49" charset="0"/>
+              </a:rPr>
+              <a:t>    P(A|B) = P(A and B) / P(B) (if P(B) is not zero)</a:t>
+            </a:r>
+          </a:p>
+          <a:p>
+            <a:endParaRPr lang="en-US" dirty="0"/>
+          </a:p>
+          <a:p>
+            <a:r>
+              <a:rPr lang="en-US" dirty="0"/>
+              <a:t>If A &amp; B are independent form each other, then:</a:t>
+            </a:r>
+          </a:p>
+          <a:p>
+            <a:r>
+              <a:rPr lang="en-US" sz="1200" dirty="0">
+                <a:solidFill>
+                  <a:srgbClr val="00B0F0"/>
+                </a:solidFill>
+                <a:latin typeface="Menlo" panose="020B0609030804020204" pitchFamily="49" charset="0"/>
+                <a:ea typeface="Menlo" panose="020B0609030804020204" pitchFamily="49" charset="0"/>
+                <a:cs typeface="Menlo" panose="020B0609030804020204" pitchFamily="49" charset="0"/>
+              </a:rPr>
+              <a:t>    P(A|B) = P(A)</a:t>
+            </a:r>
+          </a:p>
+          <a:p>
+            <a:r>
+              <a:rPr lang="en-US" sz="1200" dirty="0">
+                <a:solidFill>
+                  <a:srgbClr val="00B0F0"/>
+                </a:solidFill>
+                <a:latin typeface="Menlo" panose="020B0609030804020204" pitchFamily="49" charset="0"/>
+                <a:ea typeface="Menlo" panose="020B0609030804020204" pitchFamily="49" charset="0"/>
+                <a:cs typeface="Menlo" panose="020B0609030804020204" pitchFamily="49" charset="0"/>
+              </a:rPr>
+              <a:t>    P(B|A) = P(B)</a:t>
+            </a:r>
+          </a:p>
+        </p:txBody>
+      </p:sp>
     </p:spTree>
     <p:extLst>
       <p:ext uri="{BB962C8B-B14F-4D97-AF65-F5344CB8AC3E}">
@@ -16331,12 +19698,17 @@
         <p:spPr>
           <a:xfrm>
             <a:off x="90466" y="3530593"/>
-            <a:ext cx="8639198" cy="3323987"/>
+            <a:ext cx="9225812" cy="3108543"/>
           </a:xfrm>
           <a:prstGeom prst="rect">
             <a:avLst/>
           </a:prstGeom>
-          <a:noFill/>
+          <a:solidFill>
+            <a:schemeClr val="accent4">
+              <a:lumMod val="20000"/>
+              <a:lumOff val="80000"/>
+            </a:schemeClr>
+          </a:solidFill>
         </p:spPr>
         <p:txBody>
           <a:bodyPr wrap="square" rtlCol="0">
@@ -16346,7 +19718,19 @@
           <a:p>
             <a:r>
               <a:rPr lang="en-US" dirty="0"/>
-              <a:t>When conducting multiple tests, the chance of getting a significant (type 1) error increases by pure chance. </a:t>
+              <a:t>When conducting </a:t>
+            </a:r>
+            <a:r>
+              <a:rPr lang="en-US" b="1" dirty="0">
+                <a:solidFill>
+                  <a:srgbClr val="00B050"/>
+                </a:solidFill>
+              </a:rPr>
+              <a:t>multiple tests</a:t>
+            </a:r>
+            <a:r>
+              <a:rPr lang="en-US" dirty="0"/>
+              <a:t>, the chance of getting a significant error increases by pure chance. </a:t>
             </a:r>
           </a:p>
           <a:p>
@@ -16367,13 +19751,13 @@
           <a:p>
             <a:r>
               <a:rPr lang="en-US" dirty="0"/>
-              <a:t>Suppose we have Ng = 5 treatment groups.</a:t>
+              <a:t>Suppose we have five treatment groups: Ng = 5.</a:t>
             </a:r>
           </a:p>
           <a:p>
             <a:r>
               <a:rPr lang="en-US" dirty="0"/>
-              <a:t>Hull hypothesis is that group members are "equal" in all groups.</a:t>
+              <a:t>The Null Hypothesis (H0) is that group members are "equal" in all groups.</a:t>
             </a:r>
           </a:p>
           <a:p>
@@ -16394,13 +19778,7 @@
           <a:p>
             <a:r>
               <a:rPr lang="en-US" dirty="0"/>
-              <a:t>    1 to 2, 2 to 3, 3 to 4, 4 to 5, 1 to 3, 2 to 4, 3 to 5, 4 to 1,</a:t>
-            </a:r>
-          </a:p>
-          <a:p>
-            <a:r>
-              <a:rPr lang="en-US" dirty="0"/>
-              <a:t>    (1 &amp; 2) to (3 &amp; 4), (1 &amp; 2) to (4 &amp; 5)</a:t>
+              <a:t>    1 to 2,     2 to 3,     3 to 4,     4 to 5,     1 to 3,     2 to 4,     3 to 5,     4 to 1,    (1 &amp; 2) to (3 &amp; 4),     (1 &amp; 2) to (4 &amp; 5)</a:t>
             </a:r>
           </a:p>
           <a:p>
@@ -16462,7 +19840,12 @@
           <a:prstGeom prst="rect">
             <a:avLst/>
           </a:prstGeom>
-          <a:noFill/>
+          <a:solidFill>
+            <a:schemeClr val="accent4">
+              <a:lumMod val="20000"/>
+              <a:lumOff val="80000"/>
+            </a:schemeClr>
+          </a:solidFill>
         </p:spPr>
         <p:txBody>
           <a:bodyPr wrap="square" rtlCol="0">
@@ -16539,7 +19922,7 @@
         </p:blipFill>
         <p:spPr bwMode="auto">
           <a:xfrm>
-            <a:off x="4369196" y="64079"/>
+            <a:off x="5214568" y="65793"/>
             <a:ext cx="1449909" cy="907574"/>
           </a:xfrm>
           <a:prstGeom prst="rect">
@@ -16612,7 +19995,12 @@
           <a:prstGeom prst="rect">
             <a:avLst/>
           </a:prstGeom>
-          <a:noFill/>
+          <a:solidFill>
+            <a:schemeClr val="accent4">
+              <a:lumMod val="20000"/>
+              <a:lumOff val="80000"/>
+            </a:schemeClr>
+          </a:solidFill>
         </p:spPr>
         <p:txBody>
           <a:bodyPr wrap="square" rtlCol="0">
@@ -16663,7 +20051,7 @@
           <p:nvPr/>
         </p:nvPicPr>
         <p:blipFill>
-          <a:blip r:embed="rId3">
+          <a:blip r:embed="rId3" cstate="email">
             <a:extLst>
               <a:ext uri="{28A0092B-C50C-407E-A947-70E740481C1C}">
                 <a14:useLocalDpi xmlns:a14="http://schemas.microsoft.com/office/drawing/2010/main"/>
@@ -16677,8 +20065,8 @@
         </p:blipFill>
         <p:spPr bwMode="auto">
           <a:xfrm>
-            <a:off x="9310607" y="49778"/>
-            <a:ext cx="2032000" cy="3136900"/>
+            <a:off x="10095730" y="618534"/>
+            <a:ext cx="1458853" cy="2252105"/>
           </a:xfrm>
           <a:prstGeom prst="rect">
             <a:avLst/>
@@ -16709,7 +20097,7 @@
         </p:nvSpPr>
         <p:spPr>
           <a:xfrm>
-            <a:off x="9136015" y="3212688"/>
+            <a:off x="9634564" y="2904833"/>
             <a:ext cx="2381184" cy="830997"/>
           </a:xfrm>
           <a:prstGeom prst="rect">
@@ -16759,7 +20147,7 @@
         </p:nvSpPr>
         <p:spPr>
           <a:xfrm>
-            <a:off x="6631776" y="1311966"/>
+            <a:off x="6989585" y="1523998"/>
             <a:ext cx="1111216" cy="1235588"/>
           </a:xfrm>
           <a:prstGeom prst="rect">
@@ -16814,7 +20202,7 @@
         </p:nvSpPr>
         <p:spPr>
           <a:xfrm>
-            <a:off x="6630240" y="1056304"/>
+            <a:off x="6988049" y="1268336"/>
             <a:ext cx="1111216" cy="255662"/>
           </a:xfrm>
           <a:prstGeom prst="rect">
@@ -16875,7 +20263,7 @@
         </p:nvSpPr>
         <p:spPr>
           <a:xfrm>
-            <a:off x="6632060" y="2547554"/>
+            <a:off x="6989869" y="2759586"/>
             <a:ext cx="1111216" cy="255662"/>
           </a:xfrm>
           <a:prstGeom prst="rect">
@@ -16936,7 +20324,7 @@
         </p:nvSpPr>
         <p:spPr>
           <a:xfrm>
-            <a:off x="6755917" y="1648679"/>
+            <a:off x="7113726" y="1860711"/>
             <a:ext cx="891048" cy="461665"/>
           </a:xfrm>
           <a:prstGeom prst="rect">
@@ -16971,7 +20359,7 @@
         </p:nvSpPr>
         <p:spPr>
           <a:xfrm>
-            <a:off x="7026486" y="2446517"/>
+            <a:off x="7384295" y="2658549"/>
             <a:ext cx="340743" cy="461665"/>
           </a:xfrm>
           <a:prstGeom prst="rect">
@@ -17006,7 +20394,7 @@
         </p:nvSpPr>
         <p:spPr>
           <a:xfrm>
-            <a:off x="7016326" y="954577"/>
+            <a:off x="7374135" y="1166609"/>
             <a:ext cx="340743" cy="461665"/>
           </a:xfrm>
           <a:prstGeom prst="rect">
@@ -17041,7 +20429,7 @@
         </p:nvSpPr>
         <p:spPr>
           <a:xfrm>
-            <a:off x="4588603" y="1308617"/>
+            <a:off x="4946412" y="1520649"/>
             <a:ext cx="1744290" cy="1235588"/>
           </a:xfrm>
           <a:prstGeom prst="rect">
@@ -17096,7 +20484,7 @@
         </p:nvSpPr>
         <p:spPr>
           <a:xfrm>
-            <a:off x="4587067" y="1052955"/>
+            <a:off x="4944876" y="1264987"/>
             <a:ext cx="1744290" cy="255662"/>
           </a:xfrm>
           <a:prstGeom prst="rect">
@@ -17157,7 +20545,7 @@
         </p:nvSpPr>
         <p:spPr>
           <a:xfrm>
-            <a:off x="4588887" y="2544205"/>
+            <a:off x="4946696" y="2756237"/>
             <a:ext cx="1744290" cy="255662"/>
           </a:xfrm>
           <a:prstGeom prst="rect">
@@ -17218,7 +20606,7 @@
         </p:nvSpPr>
         <p:spPr>
           <a:xfrm>
-            <a:off x="5013688" y="1645330"/>
+            <a:off x="5371497" y="1857362"/>
             <a:ext cx="891048" cy="461665"/>
           </a:xfrm>
           <a:prstGeom prst="rect">
@@ -17253,7 +20641,7 @@
         </p:nvSpPr>
         <p:spPr>
           <a:xfrm>
-            <a:off x="5284257" y="2443168"/>
+            <a:off x="5642066" y="2655200"/>
             <a:ext cx="340743" cy="461665"/>
           </a:xfrm>
           <a:prstGeom prst="rect">
@@ -17288,7 +20676,7 @@
         </p:nvSpPr>
         <p:spPr>
           <a:xfrm>
-            <a:off x="5274097" y="951228"/>
+            <a:off x="5631906" y="1163260"/>
             <a:ext cx="340743" cy="461665"/>
           </a:xfrm>
           <a:prstGeom prst="rect">
@@ -17323,7 +20711,7 @@
         </p:nvSpPr>
         <p:spPr>
           <a:xfrm>
-            <a:off x="7751496" y="1053026"/>
+            <a:off x="8109305" y="1265058"/>
             <a:ext cx="880188" cy="1746842"/>
           </a:xfrm>
           <a:prstGeom prst="rect">
@@ -17897,8 +21285,8 @@
         </p:nvSpPr>
         <p:spPr>
           <a:xfrm>
-            <a:off x="4800731" y="4169514"/>
-            <a:ext cx="4378046" cy="2482057"/>
+            <a:off x="4371747" y="4245137"/>
+            <a:ext cx="5029055" cy="2482057"/>
           </a:xfrm>
           <a:prstGeom prst="rect">
             <a:avLst/>
@@ -17928,13 +21316,16 @@
                 <a:solidFill>
                   <a:schemeClr val="dk1"/>
                 </a:solidFill>
-                <a:latin typeface="Calibri"/>
-                <a:cs typeface="Calibri"/>
+                <a:latin typeface="Arial" panose="020B0604020202020204" pitchFamily="34" charset="0"/>
+                <a:cs typeface="Arial" panose="020B0604020202020204" pitchFamily="34" charset="0"/>
                 <a:sym typeface="Calibri"/>
               </a:rPr>
               <a:t>A = Happy, B = Rich</a:t>
             </a:r>
-            <a:endParaRPr dirty="0"/>
+            <a:endParaRPr dirty="0">
+              <a:latin typeface="Arial" panose="020B0604020202020204" pitchFamily="34" charset="0"/>
+              <a:cs typeface="Arial" panose="020B0604020202020204" pitchFamily="34" charset="0"/>
+            </a:endParaRPr>
           </a:p>
           <a:p>
             <a:pPr marL="0" marR="0" lvl="0" indent="0" algn="l" rtl="0">
@@ -17951,9 +21342,9 @@
                 <a:solidFill>
                   <a:schemeClr val="dk1"/>
                 </a:solidFill>
-                <a:latin typeface="Calibri"/>
-                <a:ea typeface="Calibri"/>
-                <a:cs typeface="Calibri"/>
+                <a:latin typeface="Arial" panose="020B0604020202020204" pitchFamily="34" charset="0"/>
+                <a:ea typeface="Calibri"/>
+                <a:cs typeface="Arial" panose="020B0604020202020204" pitchFamily="34" charset="0"/>
                 <a:sym typeface="Calibri"/>
               </a:rPr>
               <a:t>P(A) = 40% = probability of being happy (Yellow)</a:t>
@@ -17974,9 +21365,9 @@
                 <a:solidFill>
                   <a:schemeClr val="dk1"/>
                 </a:solidFill>
-                <a:latin typeface="Calibri"/>
-                <a:ea typeface="Calibri"/>
-                <a:cs typeface="Calibri"/>
+                <a:latin typeface="Arial" panose="020B0604020202020204" pitchFamily="34" charset="0"/>
+                <a:ea typeface="Calibri"/>
+                <a:cs typeface="Arial" panose="020B0604020202020204" pitchFamily="34" charset="0"/>
                 <a:sym typeface="Calibri"/>
               </a:rPr>
               <a:t>P(B) = 5% = probability of being rich (Blue)</a:t>
@@ -17996,9 +21387,9 @@
               <a:solidFill>
                 <a:schemeClr val="dk1"/>
               </a:solidFill>
-              <a:latin typeface="Calibri"/>
+              <a:latin typeface="Arial" panose="020B0604020202020204" pitchFamily="34" charset="0"/>
               <a:ea typeface="Calibri"/>
-              <a:cs typeface="Calibri"/>
+              <a:cs typeface="Arial" panose="020B0604020202020204" pitchFamily="34" charset="0"/>
               <a:sym typeface="Calibri"/>
             </a:endParaRPr>
           </a:p>
@@ -18009,9 +21400,9 @@
                 <a:solidFill>
                   <a:schemeClr val="dk1"/>
                 </a:solidFill>
-                <a:latin typeface="Calibri"/>
-                <a:ea typeface="Calibri"/>
-                <a:cs typeface="Calibri"/>
+                <a:latin typeface="Arial" panose="020B0604020202020204" pitchFamily="34" charset="0"/>
+                <a:ea typeface="Calibri"/>
+                <a:cs typeface="Arial" panose="020B0604020202020204" pitchFamily="34" charset="0"/>
                 <a:sym typeface="Calibri"/>
               </a:rPr>
               <a:t>P(B|A) = 10% = probability of being rich given that Happy</a:t>
@@ -18024,9 +21415,9 @@
                 <a:solidFill>
                   <a:schemeClr val="dk1"/>
                 </a:solidFill>
-                <a:latin typeface="Calibri"/>
-                <a:ea typeface="Calibri"/>
-                <a:cs typeface="Calibri"/>
+                <a:latin typeface="Arial" panose="020B0604020202020204" pitchFamily="34" charset="0"/>
+                <a:ea typeface="Calibri"/>
+                <a:cs typeface="Arial" panose="020B0604020202020204" pitchFamily="34" charset="0"/>
                 <a:sym typeface="Calibri"/>
               </a:rPr>
               <a:t>P(A|B) = 80% = probability of being happy given that rich</a:t>
@@ -18046,9 +21437,9 @@
               <a:solidFill>
                 <a:schemeClr val="dk1"/>
               </a:solidFill>
-              <a:latin typeface="Calibri"/>
+              <a:latin typeface="Arial" panose="020B0604020202020204" pitchFamily="34" charset="0"/>
               <a:ea typeface="Calibri"/>
-              <a:cs typeface="Calibri"/>
+              <a:cs typeface="Arial" panose="020B0604020202020204" pitchFamily="34" charset="0"/>
               <a:sym typeface="Calibri"/>
             </a:endParaRPr>
           </a:p>
@@ -18067,9 +21458,9 @@
                 <a:solidFill>
                   <a:schemeClr val="dk1"/>
                 </a:solidFill>
-                <a:latin typeface="Calibri"/>
-                <a:ea typeface="Calibri"/>
-                <a:cs typeface="Calibri"/>
+                <a:latin typeface="Arial" panose="020B0604020202020204" pitchFamily="34" charset="0"/>
+                <a:ea typeface="Calibri"/>
+                <a:cs typeface="Arial" panose="020B0604020202020204" pitchFamily="34" charset="0"/>
                 <a:sym typeface="Calibri"/>
               </a:rPr>
               <a:t>Intersection:</a:t>
@@ -18081,9 +21472,9 @@
                 <a:solidFill>
                   <a:schemeClr val="dk1"/>
                 </a:solidFill>
-                <a:latin typeface="Calibri"/>
-                <a:ea typeface="Calibri"/>
-                <a:cs typeface="Calibri"/>
+                <a:latin typeface="Arial" panose="020B0604020202020204" pitchFamily="34" charset="0"/>
+                <a:ea typeface="Calibri"/>
+                <a:cs typeface="Arial" panose="020B0604020202020204" pitchFamily="34" charset="0"/>
                 <a:sym typeface="Calibri"/>
               </a:rPr>
               <a:t>P(A &amp; B) = 4% = probability of rich &amp; happy (Green)</a:t>
@@ -18104,9 +21495,9 @@
                 <a:solidFill>
                   <a:schemeClr val="dk1"/>
                 </a:solidFill>
-                <a:latin typeface="Calibri"/>
-                <a:ea typeface="Calibri"/>
-                <a:cs typeface="Calibri"/>
+                <a:latin typeface="Arial" panose="020B0604020202020204" pitchFamily="34" charset="0"/>
+                <a:ea typeface="Calibri"/>
+                <a:cs typeface="Arial" panose="020B0604020202020204" pitchFamily="34" charset="0"/>
                 <a:sym typeface="Calibri"/>
               </a:rPr>
               <a:t>P(A|B)*P(B) = 80%*5% = 4%</a:t>
@@ -18115,9 +21506,9 @@
               <a:solidFill>
                 <a:schemeClr val="dk1"/>
               </a:solidFill>
-              <a:latin typeface="Calibri"/>
+              <a:latin typeface="Arial" panose="020B0604020202020204" pitchFamily="34" charset="0"/>
               <a:ea typeface="Calibri"/>
-              <a:cs typeface="Calibri"/>
+              <a:cs typeface="Arial" panose="020B0604020202020204" pitchFamily="34" charset="0"/>
               <a:sym typeface="Calibri"/>
             </a:endParaRPr>
           </a:p>
@@ -18136,9 +21527,9 @@
                 <a:solidFill>
                   <a:schemeClr val="dk1"/>
                 </a:solidFill>
-                <a:latin typeface="Calibri"/>
-                <a:ea typeface="Calibri"/>
-                <a:cs typeface="Calibri"/>
+                <a:latin typeface="Arial" panose="020B0604020202020204" pitchFamily="34" charset="0"/>
+                <a:ea typeface="Calibri"/>
+                <a:cs typeface="Arial" panose="020B0604020202020204" pitchFamily="34" charset="0"/>
                 <a:sym typeface="Calibri"/>
               </a:rPr>
               <a:t>P(B|A)*P(A) = 10%*40% = 4%</a:t>
@@ -18154,7 +21545,7 @@
         </p:nvSpPr>
         <p:spPr>
           <a:xfrm>
-            <a:off x="93257" y="-77443"/>
+            <a:off x="2614" y="28999"/>
             <a:ext cx="7972927" cy="954107"/>
           </a:xfrm>
           <a:prstGeom prst="rect">
@@ -18240,7 +21631,7 @@
         </p:nvSpPr>
         <p:spPr>
           <a:xfrm>
-            <a:off x="10130582" y="2213811"/>
+            <a:off x="10130582" y="2386087"/>
             <a:ext cx="1588170" cy="646331"/>
           </a:xfrm>
           <a:prstGeom prst="rect">
@@ -18333,7 +21724,7 @@
         </p:blipFill>
         <p:spPr>
           <a:xfrm>
-            <a:off x="10005418" y="0"/>
+            <a:off x="10005418" y="172276"/>
             <a:ext cx="1818487" cy="2213811"/>
           </a:xfrm>
           <a:prstGeom prst="rect">
@@ -18353,8 +21744,8 @@
         </p:nvSpPr>
         <p:spPr>
           <a:xfrm>
-            <a:off x="124872" y="4295617"/>
-            <a:ext cx="4588042" cy="2229852"/>
+            <a:off x="154113" y="4371240"/>
+            <a:ext cx="4129818" cy="2229852"/>
           </a:xfrm>
           <a:prstGeom prst="rect">
             <a:avLst/>
@@ -18407,7 +21798,7 @@
         </p:nvSpPr>
         <p:spPr>
           <a:xfrm>
-            <a:off x="768355" y="4600417"/>
+            <a:off x="339372" y="4676040"/>
             <a:ext cx="3224463" cy="1764631"/>
           </a:xfrm>
           <a:prstGeom prst="ellipse">
@@ -18461,7 +21852,7 @@
         </p:nvSpPr>
         <p:spPr>
           <a:xfrm>
-            <a:off x="2944273" y="5032264"/>
+            <a:off x="2515290" y="5107887"/>
             <a:ext cx="1397874" cy="900935"/>
           </a:xfrm>
           <a:prstGeom prst="ellipse">
@@ -18517,7 +21908,7 @@
         </p:nvSpPr>
         <p:spPr>
           <a:xfrm>
-            <a:off x="1669819" y="5032264"/>
+            <a:off x="1240836" y="5107887"/>
             <a:ext cx="1274454" cy="900935"/>
           </a:xfrm>
           <a:prstGeom prst="rect">
@@ -18598,7 +21989,7 @@
         </p:nvSpPr>
         <p:spPr>
           <a:xfrm>
-            <a:off x="3989078" y="5200812"/>
+            <a:off x="3560095" y="5276435"/>
             <a:ext cx="727576" cy="753546"/>
           </a:xfrm>
           <a:prstGeom prst="rect">
@@ -18679,7 +22070,7 @@
         </p:nvSpPr>
         <p:spPr>
           <a:xfrm>
-            <a:off x="3294709" y="4278060"/>
+            <a:off x="2865726" y="4353683"/>
             <a:ext cx="1530878" cy="461665"/>
           </a:xfrm>
           <a:prstGeom prst="rect">
@@ -18783,7 +22174,7 @@
         <p:spPr>
           <a:xfrm>
             <a:off x="9397063" y="4569363"/>
-            <a:ext cx="2670065" cy="1384995"/>
+            <a:ext cx="2670065" cy="1600438"/>
           </a:xfrm>
           <a:prstGeom prst="rect">
             <a:avLst/>
@@ -18845,6 +22236,19 @@
                 <a:cs typeface="Menlo" panose="020B0609030804020204" pitchFamily="49" charset="0"/>
               </a:rPr>
               <a:t>|Rich |   4    |   1  |</a:t>
+            </a:r>
+          </a:p>
+          <a:p>
+            <a:r>
+              <a:rPr lang="en-US" b="1" dirty="0">
+                <a:solidFill>
+                  <a:srgbClr val="00B050"/>
+                </a:solidFill>
+                <a:latin typeface="Menlo" panose="020B0609030804020204" pitchFamily="49" charset="0"/>
+                <a:ea typeface="Menlo" panose="020B0609030804020204" pitchFamily="49" charset="0"/>
+                <a:cs typeface="Menlo" panose="020B0609030804020204" pitchFamily="49" charset="0"/>
+              </a:rPr>
+              <a:t>+-----+--------+------+</a:t>
             </a:r>
           </a:p>
           <a:p>
@@ -18889,7 +22293,7 @@
         </p:nvSpPr>
         <p:spPr>
           <a:xfrm>
-            <a:off x="9849491" y="2860142"/>
+            <a:off x="9849491" y="3032418"/>
             <a:ext cx="2217637" cy="1384995"/>
           </a:xfrm>
           <a:prstGeom prst="rect">
@@ -21051,18 +24455,34 @@
           <a:p>
             <a:r>
               <a:rPr lang="en-US" dirty="0"/>
-              <a:t>   if we repeat experiment multiple times</a:t>
-            </a:r>
-          </a:p>
-          <a:p>
-            <a:r>
-              <a:rPr lang="en-US" dirty="0"/>
+              <a:t>  </a:t>
+            </a:r>
+            <a:r>
+              <a:rPr lang="en-US" b="1" dirty="0">
+                <a:solidFill>
+                  <a:srgbClr val="00B050"/>
+                </a:solidFill>
+              </a:rPr>
+              <a:t> if we repeat experiment multiple times</a:t>
+            </a:r>
+          </a:p>
+          <a:p>
+            <a:r>
+              <a:rPr lang="en-US" b="1" dirty="0">
+                <a:solidFill>
+                  <a:srgbClr val="00B050"/>
+                </a:solidFill>
+              </a:rPr>
               <a:t>   then 95% of such confidence intervals</a:t>
             </a:r>
           </a:p>
           <a:p>
             <a:r>
-              <a:rPr lang="en-US" dirty="0"/>
+              <a:rPr lang="en-US" b="1" dirty="0">
+                <a:solidFill>
+                  <a:srgbClr val="00B050"/>
+                </a:solidFill>
+              </a:rPr>
               <a:t>   will contain the true value.</a:t>
             </a:r>
           </a:p>

--- a/statistics_01_probability.pptx
+++ b/statistics_01_probability.pptx
@@ -5,22 +5,23 @@
     <p:sldMasterId id="2147483659" r:id="rId1"/>
   </p:sldMasterIdLst>
   <p:notesMasterIdLst>
-    <p:notesMasterId r:id="rId15"/>
+    <p:notesMasterId r:id="rId16"/>
   </p:notesMasterIdLst>
   <p:sldIdLst>
-    <p:sldId id="298" r:id="rId2"/>
-    <p:sldId id="262" r:id="rId3"/>
-    <p:sldId id="263" r:id="rId4"/>
-    <p:sldId id="264" r:id="rId5"/>
-    <p:sldId id="294" r:id="rId6"/>
-    <p:sldId id="256" r:id="rId7"/>
-    <p:sldId id="295" r:id="rId8"/>
-    <p:sldId id="296" r:id="rId9"/>
-    <p:sldId id="297" r:id="rId10"/>
-    <p:sldId id="265" r:id="rId11"/>
-    <p:sldId id="301" r:id="rId12"/>
-    <p:sldId id="257" r:id="rId13"/>
-    <p:sldId id="299" r:id="rId14"/>
+    <p:sldId id="302" r:id="rId2"/>
+    <p:sldId id="298" r:id="rId3"/>
+    <p:sldId id="262" r:id="rId4"/>
+    <p:sldId id="263" r:id="rId5"/>
+    <p:sldId id="264" r:id="rId6"/>
+    <p:sldId id="294" r:id="rId7"/>
+    <p:sldId id="256" r:id="rId8"/>
+    <p:sldId id="295" r:id="rId9"/>
+    <p:sldId id="296" r:id="rId10"/>
+    <p:sldId id="297" r:id="rId11"/>
+    <p:sldId id="265" r:id="rId12"/>
+    <p:sldId id="301" r:id="rId13"/>
+    <p:sldId id="257" r:id="rId14"/>
+    <p:sldId id="299" r:id="rId15"/>
   </p:sldIdLst>
   <p:sldSz cx="12192000" cy="6858000"/>
   <p:notesSz cx="6858000" cy="9144000"/>
@@ -1699,7 +1700,7 @@
             </a:pPr>
             <a:fld id="{00000000-1234-1234-1234-123412341234}" type="slidenum">
               <a:rPr lang="en-US"/>
-              <a:t>12</a:t>
+              <a:t>13</a:t>
             </a:fld>
             <a:endParaRPr/>
           </a:p>
@@ -14464,62 +14465,10 @@
       </p:grpSpPr>
       <p:sp>
         <p:nvSpPr>
-          <p:cNvPr id="11" name="Rectangle 10">
+          <p:cNvPr id="2" name="TextBox 1">
             <a:extLst>
               <a:ext uri="{FF2B5EF4-FFF2-40B4-BE49-F238E27FC236}">
-                <a16:creationId xmlns:a16="http://schemas.microsoft.com/office/drawing/2014/main" id="{FA6B1060-DCF7-C167-AABC-47472161A881}"/>
-              </a:ext>
-            </a:extLst>
-          </p:cNvPr>
-          <p:cNvSpPr/>
-          <p:nvPr/>
-        </p:nvSpPr>
-        <p:spPr>
-          <a:xfrm>
-            <a:off x="3750366" y="3310437"/>
-            <a:ext cx="8362122" cy="3324316"/>
-          </a:xfrm>
-          <a:prstGeom prst="rect">
-            <a:avLst/>
-          </a:prstGeom>
-          <a:solidFill>
-            <a:schemeClr val="accent4">
-              <a:lumMod val="20000"/>
-              <a:lumOff val="80000"/>
-            </a:schemeClr>
-          </a:solidFill>
-        </p:spPr>
-        <p:style>
-          <a:lnRef idx="2">
-            <a:schemeClr val="accent1">
-              <a:shade val="50000"/>
-            </a:schemeClr>
-          </a:lnRef>
-          <a:fillRef idx="1">
-            <a:schemeClr val="accent1"/>
-          </a:fillRef>
-          <a:effectRef idx="0">
-            <a:schemeClr val="accent1"/>
-          </a:effectRef>
-          <a:fontRef idx="minor">
-            <a:schemeClr val="lt1"/>
-          </a:fontRef>
-        </p:style>
-        <p:txBody>
-          <a:bodyPr rtlCol="0" anchor="ctr"/>
-          <a:lstStyle/>
-          <a:p>
-            <a:pPr algn="ctr"/>
-            <a:endParaRPr lang="en-US"/>
-          </a:p>
-        </p:txBody>
-      </p:sp>
-      <p:sp>
-        <p:nvSpPr>
-          <p:cNvPr id="3" name="TextBox 2">
-            <a:extLst>
-              <a:ext uri="{FF2B5EF4-FFF2-40B4-BE49-F238E27FC236}">
-                <a16:creationId xmlns:a16="http://schemas.microsoft.com/office/drawing/2014/main" id="{4B0129C1-3D76-E742-9440-D08150B4FCB0}"/>
+                <a16:creationId xmlns:a16="http://schemas.microsoft.com/office/drawing/2014/main" id="{1B73061C-39FD-C383-133A-CC156F75E2C6}"/>
               </a:ext>
             </a:extLst>
           </p:cNvPr>
@@ -14528,8 +14477,8 @@
         </p:nvSpPr>
         <p:spPr>
           <a:xfrm>
-            <a:off x="65801" y="1054545"/>
-            <a:ext cx="5630778" cy="1600438"/>
+            <a:off x="1160780" y="1747520"/>
+            <a:ext cx="9870440" cy="1938992"/>
           </a:xfrm>
           <a:prstGeom prst="rect">
             <a:avLst/>
@@ -14542,86 +14491,70 @@
           </a:bodyPr>
           <a:lstStyle/>
           <a:p>
-            <a:r>
-              <a:rPr lang="en-US" b="1">
-                <a:solidFill>
-                  <a:srgbClr val="FF0000"/>
-                </a:solidFill>
+            <a:pPr algn="ctr"/>
+            <a:r>
+              <a:rPr lang="en-US" sz="4000" b="1">
+                <a:latin typeface="Calibri" panose="020F0502020204030204" pitchFamily="34" charset="0"/>
+                <a:cs typeface="Calibri" panose="020F0502020204030204" pitchFamily="34" charset="0"/>
               </a:rPr>
-              <a:t>Statistics</a:t>
-            </a:r>
-            <a:r>
-              <a:rPr lang="en-US"/>
-              <a:t> – the mathematical science dealing with the </a:t>
-            </a:r>
-            <a:r>
-              <a:rPr lang="en-US" b="1">
-                <a:solidFill>
-                  <a:srgbClr val="00B050"/>
-                </a:solidFill>
+              <a:t>Statistics 01</a:t>
+            </a:r>
+          </a:p>
+          <a:p>
+            <a:pPr algn="ctr"/>
+            <a:endParaRPr lang="en-US" sz="4000" b="1">
+              <a:latin typeface="Calibri" panose="020F0502020204030204" pitchFamily="34" charset="0"/>
+              <a:cs typeface="Calibri" panose="020F0502020204030204" pitchFamily="34" charset="0"/>
+            </a:endParaRPr>
+          </a:p>
+          <a:p>
+            <a:pPr algn="ctr"/>
+            <a:r>
+              <a:rPr lang="en-US" sz="4000" b="1">
+                <a:latin typeface="Calibri" panose="020F0502020204030204" pitchFamily="34" charset="0"/>
+                <a:cs typeface="Calibri" panose="020F0502020204030204" pitchFamily="34" charset="0"/>
               </a:rPr>
-              <a:t>collection, description, analysis, interpretation, and presentation</a:t>
-            </a:r>
-            <a:r>
-              <a:rPr lang="en-US"/>
-              <a:t> of masses of numerical data.</a:t>
-            </a:r>
-          </a:p>
-          <a:p>
-            <a:endParaRPr lang="en-US"/>
-          </a:p>
-          <a:p>
-            <a:r>
-              <a:rPr lang="en-US"/>
-              <a:t>Typically we are given a </a:t>
-            </a:r>
-            <a:r>
-              <a:rPr lang="en-US" b="1">
-                <a:solidFill>
-                  <a:srgbClr val="FF0000"/>
-                </a:solidFill>
-              </a:rPr>
-              <a:t>sample of data</a:t>
-            </a:r>
-            <a:r>
-              <a:rPr lang="en-US"/>
-              <a:t>, </a:t>
-            </a:r>
-            <a:br>
-              <a:rPr lang="en-US"/>
-            </a:br>
-            <a:r>
-              <a:rPr lang="en-US"/>
-              <a:t>and we are trying to make some </a:t>
-            </a:r>
-            <a:r>
-              <a:rPr lang="en-US" b="1">
-                <a:solidFill>
-                  <a:srgbClr val="FF0000"/>
-                </a:solidFill>
-              </a:rPr>
-              <a:t>conclusions or predictions</a:t>
-            </a:r>
-            <a:r>
-              <a:rPr lang="en-US"/>
-              <a:t> </a:t>
-            </a:r>
-            <a:br>
-              <a:rPr lang="en-US"/>
-            </a:br>
-            <a:r>
-              <a:rPr lang="en-US"/>
-              <a:t>based on this particular sample of data.</a:t>
+              <a:t>Probability</a:t>
             </a:r>
           </a:p>
         </p:txBody>
       </p:sp>
+    </p:spTree>
+    <p:extLst>
+      <p:ext uri="{BB962C8B-B14F-4D97-AF65-F5344CB8AC3E}">
+        <p14:creationId xmlns:p14="http://schemas.microsoft.com/office/powerpoint/2010/main" val="2237090172"/>
+      </p:ext>
+    </p:extLst>
+  </p:cSld>
+  <p:clrMapOvr>
+    <a:masterClrMapping/>
+  </p:clrMapOvr>
+</p:sld>
+</file>
+
+<file path=ppt/slides/slide10.xml><?xml version="1.0" encoding="utf-8"?>
+<p:sld xmlns:a="http://schemas.openxmlformats.org/drawingml/2006/main" xmlns:r="http://schemas.openxmlformats.org/officeDocument/2006/relationships" xmlns:p="http://schemas.openxmlformats.org/presentationml/2006/main">
+  <p:cSld>
+    <p:spTree>
+      <p:nvGrpSpPr>
+        <p:cNvPr id="1" name=""/>
+        <p:cNvGrpSpPr/>
+        <p:nvPr/>
+      </p:nvGrpSpPr>
+      <p:grpSpPr>
+        <a:xfrm>
+          <a:off x="0" y="0"/>
+          <a:ext cx="0" cy="0"/>
+          <a:chOff x="0" y="0"/>
+          <a:chExt cx="0" cy="0"/>
+        </a:xfrm>
+      </p:grpSpPr>
       <p:sp>
         <p:nvSpPr>
-          <p:cNvPr id="2" name="TextBox 1">
+          <p:cNvPr id="5" name="Google Shape;93;p13">
             <a:extLst>
               <a:ext uri="{FF2B5EF4-FFF2-40B4-BE49-F238E27FC236}">
-                <a16:creationId xmlns:a16="http://schemas.microsoft.com/office/drawing/2014/main" id="{D27FE722-FC6A-E94D-9EDD-308335431558}"/>
+                <a16:creationId xmlns:a16="http://schemas.microsoft.com/office/drawing/2014/main" id="{F5066C6A-F841-BB4E-888A-251B4AF760F4}"/>
               </a:ext>
             </a:extLst>
           </p:cNvPr>
@@ -14630,8 +14563,161 @@
         </p:nvSpPr>
         <p:spPr>
           <a:xfrm>
-            <a:off x="84221" y="120316"/>
-            <a:ext cx="6172200" cy="800219"/>
+            <a:off x="2748641" y="1644652"/>
+            <a:ext cx="6694715" cy="1637391"/>
+          </a:xfrm>
+          <a:prstGeom prst="rect">
+            <a:avLst/>
+          </a:prstGeom>
+          <a:noFill/>
+          <a:ln w="63500">
+            <a:solidFill>
+              <a:schemeClr val="accent6">
+                <a:lumMod val="40000"/>
+                <a:lumOff val="60000"/>
+              </a:schemeClr>
+            </a:solidFill>
+          </a:ln>
+        </p:spPr>
+        <p:txBody>
+          <a:bodyPr spcFirstLastPara="1" wrap="square" lIns="91425" tIns="45700" rIns="91425" bIns="45700" anchor="t" anchorCtr="0">
+            <a:noAutofit/>
+          </a:bodyPr>
+          <a:lstStyle/>
+          <a:p>
+            <a:pPr marL="0" marR="0" lvl="0" indent="0" algn="l" rtl="0">
+              <a:spcBef>
+                <a:spcPts val="0"/>
+              </a:spcBef>
+              <a:spcAft>
+                <a:spcPts val="0"/>
+              </a:spcAft>
+              <a:buNone/>
+            </a:pPr>
+            <a:r>
+              <a:rPr lang="en-US" sz="2400" b="1" dirty="0">
+                <a:solidFill>
+                  <a:schemeClr val="accent1"/>
+                </a:solidFill>
+                <a:latin typeface="Calibri" panose="020F0502020204030204" pitchFamily="34" charset="0"/>
+                <a:cs typeface="Calibri" panose="020F0502020204030204" pitchFamily="34" charset="0"/>
+                <a:sym typeface="Calibri"/>
+              </a:rPr>
+              <a:t>Frequentist interpretation of Bayes’ theorem.</a:t>
+            </a:r>
+            <a:endParaRPr sz="2400" b="1" dirty="0">
+              <a:solidFill>
+                <a:schemeClr val="accent1"/>
+              </a:solidFill>
+              <a:latin typeface="Calibri" panose="020F0502020204030204" pitchFamily="34" charset="0"/>
+              <a:cs typeface="Calibri" panose="020F0502020204030204" pitchFamily="34" charset="0"/>
+            </a:endParaRPr>
+          </a:p>
+          <a:p>
+            <a:pPr marL="0" marR="0" lvl="0" indent="0" algn="l" rtl="0">
+              <a:spcBef>
+                <a:spcPts val="0"/>
+              </a:spcBef>
+              <a:spcAft>
+                <a:spcPts val="0"/>
+              </a:spcAft>
+              <a:buNone/>
+            </a:pPr>
+            <a:r>
+              <a:rPr lang="en-US" sz="1800" b="1" dirty="0">
+                <a:solidFill>
+                  <a:srgbClr val="00B050"/>
+                </a:solidFill>
+                <a:latin typeface="Calibri" panose="020F0502020204030204" pitchFamily="34" charset="0"/>
+                <a:cs typeface="Calibri" panose="020F0502020204030204" pitchFamily="34" charset="0"/>
+                <a:sym typeface="Calibri"/>
+              </a:rPr>
+              <a:t>Probability measures a proportion of outcomes.</a:t>
+            </a:r>
+            <a:endParaRPr sz="1800" b="1" dirty="0">
+              <a:solidFill>
+                <a:srgbClr val="00B050"/>
+              </a:solidFill>
+              <a:latin typeface="Calibri" panose="020F0502020204030204" pitchFamily="34" charset="0"/>
+              <a:cs typeface="Calibri" panose="020F0502020204030204" pitchFamily="34" charset="0"/>
+              <a:sym typeface="Calibri"/>
+            </a:endParaRPr>
+          </a:p>
+          <a:p>
+            <a:pPr marL="0" marR="0" lvl="0" indent="0" algn="l" rtl="0">
+              <a:spcBef>
+                <a:spcPts val="0"/>
+              </a:spcBef>
+              <a:spcAft>
+                <a:spcPts val="0"/>
+              </a:spcAft>
+              <a:buNone/>
+            </a:pPr>
+            <a:r>
+              <a:rPr lang="en-US" sz="1800" dirty="0">
+                <a:solidFill>
+                  <a:schemeClr val="dk1"/>
+                </a:solidFill>
+                <a:latin typeface="Calibri" panose="020F0502020204030204" pitchFamily="34" charset="0"/>
+                <a:cs typeface="Calibri" panose="020F0502020204030204" pitchFamily="34" charset="0"/>
+                <a:sym typeface="Calibri"/>
+              </a:rPr>
+              <a:t>P(A) - proportions of outcomes A</a:t>
+            </a:r>
+          </a:p>
+          <a:p>
+            <a:r>
+              <a:rPr lang="en-US" sz="1800" dirty="0">
+                <a:solidFill>
+                  <a:schemeClr val="dk1"/>
+                </a:solidFill>
+                <a:latin typeface="Calibri" panose="020F0502020204030204" pitchFamily="34" charset="0"/>
+                <a:cs typeface="Calibri" panose="020F0502020204030204" pitchFamily="34" charset="0"/>
+                <a:sym typeface="Calibri"/>
+              </a:rPr>
+              <a:t>P(B) - proportions of outcomes B</a:t>
+            </a:r>
+          </a:p>
+          <a:p>
+            <a:pPr marL="0" marR="0" lvl="0" indent="0" algn="l" rtl="0">
+              <a:spcBef>
+                <a:spcPts val="0"/>
+              </a:spcBef>
+              <a:spcAft>
+                <a:spcPts val="0"/>
+              </a:spcAft>
+              <a:buNone/>
+            </a:pPr>
+            <a:r>
+              <a:rPr lang="en-US" sz="1800" dirty="0">
+                <a:solidFill>
+                  <a:schemeClr val="dk1"/>
+                </a:solidFill>
+                <a:latin typeface="Calibri" panose="020F0502020204030204" pitchFamily="34" charset="0"/>
+                <a:cs typeface="Calibri" panose="020F0502020204030204" pitchFamily="34" charset="0"/>
+                <a:sym typeface="Calibri"/>
+              </a:rPr>
+              <a:t>P(B|A) is the proportion of outcomes B out of outcomes A</a:t>
+            </a:r>
+          </a:p>
+        </p:txBody>
+      </p:sp>
+      <p:sp>
+        <p:nvSpPr>
+          <p:cNvPr id="7" name="TextBox 6">
+            <a:extLst>
+              <a:ext uri="{FF2B5EF4-FFF2-40B4-BE49-F238E27FC236}">
+                <a16:creationId xmlns:a16="http://schemas.microsoft.com/office/drawing/2014/main" id="{925C92EE-03D8-DB44-AE43-BDAD05469BE7}"/>
+              </a:ext>
+            </a:extLst>
+          </p:cNvPr>
+          <p:cNvSpPr txBox="1"/>
+          <p:nvPr/>
+        </p:nvSpPr>
+        <p:spPr>
+          <a:xfrm>
+            <a:off x="-1" y="37572"/>
+            <a:ext cx="6694715" cy="523220"/>
           </a:xfrm>
           <a:prstGeom prst="rect">
             <a:avLst/>
@@ -14645,89 +14731,18 @@
           <a:lstStyle/>
           <a:p>
             <a:r>
-              <a:rPr lang="en-US" sz="2800" b="1"/>
-              <a:t>Statistics</a:t>
-            </a:r>
-          </a:p>
-          <a:p>
-            <a:r>
-              <a:rPr lang="en-US" sz="1800" b="1"/>
-              <a:t>    </a:t>
-            </a:r>
-            <a:r>
-              <a:rPr lang="en-US" sz="1800" b="1">
-                <a:solidFill>
-                  <a:srgbClr val="FF0000"/>
-                </a:solidFill>
-              </a:rPr>
-              <a:t>sample data </a:t>
-            </a:r>
-            <a:r>
-              <a:rPr lang="en-US" sz="1800" b="1">
-                <a:solidFill>
-                  <a:srgbClr val="FF0000"/>
-                </a:solidFill>
-                <a:sym typeface="Wingdings" pitchFamily="2" charset="2"/>
-              </a:rPr>
-              <a:t>   conclusions and predictions</a:t>
-            </a:r>
-            <a:r>
-              <a:rPr lang="en-US" sz="1800" b="1">
-                <a:sym typeface="Wingdings" pitchFamily="2" charset="2"/>
-              </a:rPr>
-              <a:t> </a:t>
-            </a:r>
-            <a:endParaRPr lang="en-US" sz="1800" b="1"/>
+              <a:rPr lang="en-US" sz="2800" b="1" dirty="0"/>
+              <a:t>Frequentist vs Bayesian </a:t>
+            </a:r>
           </a:p>
         </p:txBody>
       </p:sp>
-      <p:pic>
-        <p:nvPicPr>
-          <p:cNvPr id="5" name="Picture 4">
+      <p:sp>
+        <p:nvSpPr>
+          <p:cNvPr id="8" name="Google Shape;93;p13">
             <a:extLst>
               <a:ext uri="{FF2B5EF4-FFF2-40B4-BE49-F238E27FC236}">
-                <a16:creationId xmlns:a16="http://schemas.microsoft.com/office/drawing/2014/main" id="{D55C7F62-4DAE-B846-B173-162C2E84901A}"/>
-              </a:ext>
-            </a:extLst>
-          </p:cNvPr>
-          <p:cNvPicPr>
-            <a:picLocks noChangeAspect="1"/>
-          </p:cNvPicPr>
-          <p:nvPr/>
-        </p:nvPicPr>
-        <p:blipFill>
-          <a:blip r:embed="rId2" cstate="email">
-            <a:extLst>
-              <a:ext uri="{28A0092B-C50C-407E-A947-70E740481C1C}">
-                <a14:useLocalDpi xmlns:a14="http://schemas.microsoft.com/office/drawing/2010/main"/>
-              </a:ext>
-            </a:extLst>
-          </a:blip>
-          <a:stretch>
-            <a:fillRect/>
-          </a:stretch>
-        </p:blipFill>
-        <p:spPr>
-          <a:xfrm>
-            <a:off x="7268647" y="106740"/>
-            <a:ext cx="4839132" cy="2928353"/>
-          </a:xfrm>
-          <a:prstGeom prst="rect">
-            <a:avLst/>
-          </a:prstGeom>
-          <a:ln>
-            <a:solidFill>
-              <a:schemeClr val="accent1"/>
-            </a:solidFill>
-          </a:ln>
-        </p:spPr>
-      </p:pic>
-      <p:sp>
-        <p:nvSpPr>
-          <p:cNvPr id="4" name="TextBox 3">
-            <a:extLst>
-              <a:ext uri="{FF2B5EF4-FFF2-40B4-BE49-F238E27FC236}">
-                <a16:creationId xmlns:a16="http://schemas.microsoft.com/office/drawing/2014/main" id="{076957E4-DBB9-0C88-8C92-A98960E64F4E}"/>
+                <a16:creationId xmlns:a16="http://schemas.microsoft.com/office/drawing/2014/main" id="{63B1458D-308E-4C42-81E2-BCB6757E15B7}"/>
               </a:ext>
             </a:extLst>
           </p:cNvPr>
@@ -14736,469 +14751,196 @@
         </p:nvSpPr>
         <p:spPr>
           <a:xfrm>
-            <a:off x="3929875" y="4087983"/>
-            <a:ext cx="4252737" cy="738664"/>
+            <a:off x="2748642" y="4114801"/>
+            <a:ext cx="6694715" cy="1637390"/>
           </a:xfrm>
           <a:prstGeom prst="rect">
             <a:avLst/>
           </a:prstGeom>
           <a:noFill/>
-          <a:ln>
+          <a:ln w="63500">
             <a:solidFill>
-              <a:schemeClr val="accent1"/>
+              <a:schemeClr val="accent6">
+                <a:lumMod val="40000"/>
+                <a:lumOff val="60000"/>
+              </a:schemeClr>
             </a:solidFill>
           </a:ln>
         </p:spPr>
         <p:txBody>
-          <a:bodyPr wrap="square" rtlCol="0">
-            <a:spAutoFit/>
+          <a:bodyPr spcFirstLastPara="1" wrap="square" lIns="91425" tIns="45700" rIns="91425" bIns="45700" anchor="t" anchorCtr="0">
+            <a:noAutofit/>
           </a:bodyPr>
           <a:lstStyle/>
           <a:p>
-            <a:pPr marL="285750" indent="-285750">
-              <a:buFont typeface="Arial" panose="020B0604020202020204" pitchFamily="34" charset="0"/>
-              <a:buChar char="•"/>
+            <a:r>
+              <a:rPr lang="en-US" sz="2400" b="1" dirty="0">
+                <a:solidFill>
+                  <a:schemeClr val="accent1"/>
+                </a:solidFill>
+                <a:latin typeface="Calibri" panose="020F0502020204030204" pitchFamily="34" charset="0"/>
+                <a:cs typeface="Calibri" panose="020F0502020204030204" pitchFamily="34" charset="0"/>
+                <a:sym typeface="Calibri"/>
+              </a:rPr>
+              <a:t>Bayesian interpretation of Bayes’ theorem.</a:t>
+            </a:r>
+            <a:endParaRPr lang="en-US" sz="2400" b="1" dirty="0">
+              <a:solidFill>
+                <a:schemeClr val="accent1"/>
+              </a:solidFill>
+              <a:latin typeface="Calibri" panose="020F0502020204030204" pitchFamily="34" charset="0"/>
+              <a:cs typeface="Calibri" panose="020F0502020204030204" pitchFamily="34" charset="0"/>
+            </a:endParaRPr>
+          </a:p>
+          <a:p>
+            <a:pPr lvl="0"/>
+            <a:r>
+              <a:rPr lang="en-US" sz="1800" b="1" dirty="0">
+                <a:solidFill>
+                  <a:srgbClr val="00B050"/>
+                </a:solidFill>
+                <a:latin typeface="Calibri" panose="020F0502020204030204" pitchFamily="34" charset="0"/>
+                <a:cs typeface="Calibri" panose="020F0502020204030204" pitchFamily="34" charset="0"/>
+                <a:sym typeface="Calibri"/>
+              </a:rPr>
+              <a:t>Probability measures a degree of belief.</a:t>
+            </a:r>
+            <a:br>
+              <a:rPr lang="en-US" sz="1800" b="1" dirty="0">
+                <a:solidFill>
+                  <a:srgbClr val="00B050"/>
+                </a:solidFill>
+                <a:latin typeface="Calibri" panose="020F0502020204030204" pitchFamily="34" charset="0"/>
+                <a:cs typeface="Calibri" panose="020F0502020204030204" pitchFamily="34" charset="0"/>
+                <a:sym typeface="Calibri"/>
+              </a:rPr>
+            </a:br>
+            <a:r>
+              <a:rPr lang="en-US" sz="1800" dirty="0">
+                <a:solidFill>
+                  <a:schemeClr val="dk1"/>
+                </a:solidFill>
+                <a:latin typeface="Calibri" panose="020F0502020204030204" pitchFamily="34" charset="0"/>
+                <a:cs typeface="Calibri" panose="020F0502020204030204" pitchFamily="34" charset="0"/>
+                <a:sym typeface="Calibri"/>
+              </a:rPr>
+              <a:t>P(A), the </a:t>
+            </a:r>
+            <a:r>
+              <a:rPr lang="en-US" sz="1800" b="1" dirty="0">
+                <a:solidFill>
+                  <a:schemeClr val="accent1"/>
+                </a:solidFill>
+                <a:latin typeface="Calibri" panose="020F0502020204030204" pitchFamily="34" charset="0"/>
+                <a:cs typeface="Calibri" panose="020F0502020204030204" pitchFamily="34" charset="0"/>
+                <a:sym typeface="Calibri"/>
+              </a:rPr>
+              <a:t>prior</a:t>
+            </a:r>
+            <a:r>
+              <a:rPr lang="en-US" sz="1800" dirty="0">
+                <a:solidFill>
+                  <a:schemeClr val="dk1"/>
+                </a:solidFill>
+                <a:latin typeface="Calibri" panose="020F0502020204030204" pitchFamily="34" charset="0"/>
+                <a:cs typeface="Calibri" panose="020F0502020204030204" pitchFamily="34" charset="0"/>
+                <a:sym typeface="Calibri"/>
+              </a:rPr>
+              <a:t>, is the initial degree of belief in A.</a:t>
+            </a:r>
+            <a:endParaRPr lang="en-US" sz="1800" dirty="0">
+              <a:solidFill>
+                <a:schemeClr val="dk1"/>
+              </a:solidFill>
+              <a:latin typeface="Calibri" panose="020F0502020204030204" pitchFamily="34" charset="0"/>
+              <a:cs typeface="Calibri" panose="020F0502020204030204" pitchFamily="34" charset="0"/>
+            </a:endParaRPr>
+          </a:p>
+          <a:p>
+            <a:pPr lvl="0"/>
+            <a:r>
+              <a:rPr lang="en-US" sz="1800" dirty="0">
+                <a:solidFill>
+                  <a:schemeClr val="dk1"/>
+                </a:solidFill>
+                <a:latin typeface="Calibri" panose="020F0502020204030204" pitchFamily="34" charset="0"/>
+                <a:cs typeface="Calibri" panose="020F0502020204030204" pitchFamily="34" charset="0"/>
+                <a:sym typeface="Calibri"/>
+              </a:rPr>
+              <a:t>P(A|B), the </a:t>
+            </a:r>
+            <a:r>
+              <a:rPr lang="en-US" sz="1800" b="1" dirty="0">
+                <a:solidFill>
+                  <a:schemeClr val="accent1"/>
+                </a:solidFill>
+                <a:latin typeface="Calibri" panose="020F0502020204030204" pitchFamily="34" charset="0"/>
+                <a:cs typeface="Calibri" panose="020F0502020204030204" pitchFamily="34" charset="0"/>
+                <a:sym typeface="Calibri"/>
+              </a:rPr>
+              <a:t>posterior</a:t>
+            </a:r>
+            <a:r>
+              <a:rPr lang="en-US" sz="1800" dirty="0">
+                <a:solidFill>
+                  <a:schemeClr val="dk1"/>
+                </a:solidFill>
+                <a:latin typeface="Calibri" panose="020F0502020204030204" pitchFamily="34" charset="0"/>
+                <a:cs typeface="Calibri" panose="020F0502020204030204" pitchFamily="34" charset="0"/>
+                <a:sym typeface="Calibri"/>
+              </a:rPr>
+              <a:t>, is the degree of belief having accounted for B.</a:t>
+            </a:r>
+            <a:br>
+              <a:rPr lang="en-US" sz="1800" dirty="0">
+                <a:solidFill>
+                  <a:schemeClr val="dk1"/>
+                </a:solidFill>
+                <a:latin typeface="Calibri" panose="020F0502020204030204" pitchFamily="34" charset="0"/>
+                <a:cs typeface="Calibri" panose="020F0502020204030204" pitchFamily="34" charset="0"/>
+                <a:sym typeface="Calibri"/>
+              </a:rPr>
+            </a:br>
+            <a:r>
+              <a:rPr lang="en-US" sz="1800" dirty="0">
+                <a:solidFill>
+                  <a:schemeClr val="dk1"/>
+                </a:solidFill>
+                <a:latin typeface="Calibri" panose="020F0502020204030204" pitchFamily="34" charset="0"/>
+                <a:cs typeface="Calibri" panose="020F0502020204030204" pitchFamily="34" charset="0"/>
+                <a:sym typeface="Calibri"/>
+              </a:rPr>
+              <a:t>P(B|A)/P(B) – represents the support that B provides for A.</a:t>
+            </a:r>
+            <a:endParaRPr lang="en-US" sz="1800" dirty="0">
+              <a:solidFill>
+                <a:schemeClr val="dk1"/>
+              </a:solidFill>
+              <a:latin typeface="Calibri" panose="020F0502020204030204" pitchFamily="34" charset="0"/>
+              <a:cs typeface="Calibri" panose="020F0502020204030204" pitchFamily="34" charset="0"/>
+            </a:endParaRPr>
+          </a:p>
+          <a:p>
+            <a:pPr marL="0" marR="0" lvl="0" indent="0" algn="l" rtl="0">
+              <a:spcBef>
+                <a:spcPts val="0"/>
+              </a:spcBef>
+              <a:spcAft>
+                <a:spcPts val="0"/>
+              </a:spcAft>
+              <a:buNone/>
             </a:pPr>
-            <a:r>
-              <a:rPr lang="en-US" b="1">
-                <a:solidFill>
-                  <a:srgbClr val="FF0000"/>
-                </a:solidFill>
-              </a:rPr>
-              <a:t>mean</a:t>
-            </a:r>
-            <a:r>
-              <a:rPr lang="en-US"/>
-              <a:t> = the average of a data set</a:t>
-            </a:r>
-          </a:p>
-          <a:p>
-            <a:pPr marL="285750" indent="-285750">
-              <a:buFont typeface="Arial" panose="020B0604020202020204" pitchFamily="34" charset="0"/>
-              <a:buChar char="•"/>
-            </a:pPr>
-            <a:r>
-              <a:rPr lang="en-US" b="1">
-                <a:solidFill>
-                  <a:srgbClr val="FF0000"/>
-                </a:solidFill>
-              </a:rPr>
-              <a:t>median</a:t>
-            </a:r>
-            <a:r>
-              <a:rPr lang="en-US"/>
-              <a:t> = the middle of the set of numbers</a:t>
-            </a:r>
-          </a:p>
-          <a:p>
-            <a:pPr marL="285750" indent="-285750">
-              <a:buFont typeface="Arial" panose="020B0604020202020204" pitchFamily="34" charset="0"/>
-              <a:buChar char="•"/>
-            </a:pPr>
-            <a:r>
-              <a:rPr lang="en-US" b="1">
-                <a:solidFill>
-                  <a:srgbClr val="FF0000"/>
-                </a:solidFill>
-              </a:rPr>
-              <a:t>mode</a:t>
-            </a:r>
-            <a:r>
-              <a:rPr lang="en-US"/>
-              <a:t> = the most common number in a data set</a:t>
-            </a:r>
-          </a:p>
-        </p:txBody>
-      </p:sp>
-      <p:sp>
-        <p:nvSpPr>
-          <p:cNvPr id="6" name="TextBox 5">
-            <a:extLst>
-              <a:ext uri="{FF2B5EF4-FFF2-40B4-BE49-F238E27FC236}">
-                <a16:creationId xmlns:a16="http://schemas.microsoft.com/office/drawing/2014/main" id="{1EE18733-4169-72E8-0A73-595A28519447}"/>
-              </a:ext>
-            </a:extLst>
-          </p:cNvPr>
-          <p:cNvSpPr txBox="1"/>
-          <p:nvPr/>
-        </p:nvSpPr>
-        <p:spPr>
-          <a:xfrm>
-            <a:off x="8745542" y="4355954"/>
-            <a:ext cx="3124591" cy="738664"/>
-          </a:xfrm>
-          <a:prstGeom prst="rect">
-            <a:avLst/>
-          </a:prstGeom>
-          <a:noFill/>
-          <a:ln>
-            <a:solidFill>
-              <a:schemeClr val="accent1"/>
-            </a:solidFill>
-          </a:ln>
-        </p:spPr>
-        <p:txBody>
-          <a:bodyPr wrap="square" rtlCol="0">
-            <a:spAutoFit/>
-          </a:bodyPr>
-          <a:lstStyle/>
-          <a:p>
-            <a:pPr marL="285750" indent="-285750">
-              <a:buFont typeface="Arial" panose="020B0604020202020204" pitchFamily="34" charset="0"/>
-              <a:buChar char="•"/>
-            </a:pPr>
-            <a:r>
-              <a:rPr lang="en-US">
-                <a:solidFill>
-                  <a:schemeClr val="tx1"/>
-                </a:solidFill>
-              </a:rPr>
-              <a:t>The 25th percentile = 1</a:t>
-            </a:r>
-            <a:r>
-              <a:rPr lang="en-US" baseline="30000">
-                <a:solidFill>
-                  <a:schemeClr val="tx1"/>
-                </a:solidFill>
-              </a:rPr>
-              <a:t>st</a:t>
-            </a:r>
-            <a:r>
-              <a:rPr lang="en-US">
-                <a:solidFill>
-                  <a:schemeClr val="tx1"/>
-                </a:solidFill>
-              </a:rPr>
-              <a:t> quartile</a:t>
-            </a:r>
-          </a:p>
-          <a:p>
-            <a:pPr marL="285750" indent="-285750">
-              <a:buFont typeface="Arial" panose="020B0604020202020204" pitchFamily="34" charset="0"/>
-              <a:buChar char="•"/>
-            </a:pPr>
-            <a:r>
-              <a:rPr lang="en-US">
-                <a:solidFill>
-                  <a:schemeClr val="tx1"/>
-                </a:solidFill>
-              </a:rPr>
-              <a:t>The 50th percentile = median</a:t>
-            </a:r>
-          </a:p>
-          <a:p>
-            <a:pPr marL="285750" indent="-285750">
-              <a:buFont typeface="Arial" panose="020B0604020202020204" pitchFamily="34" charset="0"/>
-              <a:buChar char="•"/>
-            </a:pPr>
-            <a:r>
-              <a:rPr lang="en-US">
-                <a:solidFill>
-                  <a:schemeClr val="tx1"/>
-                </a:solidFill>
-              </a:rPr>
-              <a:t>The 75th percentile = 3</a:t>
-            </a:r>
-            <a:r>
-              <a:rPr lang="en-US" baseline="30000">
-                <a:solidFill>
-                  <a:schemeClr val="tx1"/>
-                </a:solidFill>
-              </a:rPr>
-              <a:t>rd</a:t>
-            </a:r>
-            <a:r>
-              <a:rPr lang="en-US">
-                <a:solidFill>
-                  <a:schemeClr val="tx1"/>
-                </a:solidFill>
-              </a:rPr>
-              <a:t> quartile</a:t>
-            </a:r>
-          </a:p>
-        </p:txBody>
-      </p:sp>
-      <p:pic>
-        <p:nvPicPr>
-          <p:cNvPr id="7" name="Picture 6">
-            <a:extLst>
-              <a:ext uri="{FF2B5EF4-FFF2-40B4-BE49-F238E27FC236}">
-                <a16:creationId xmlns:a16="http://schemas.microsoft.com/office/drawing/2014/main" id="{E809A2F8-1F98-78A8-0396-444036160DF5}"/>
-              </a:ext>
-            </a:extLst>
-          </p:cNvPr>
-          <p:cNvPicPr>
-            <a:picLocks noChangeAspect="1"/>
-          </p:cNvPicPr>
-          <p:nvPr/>
-        </p:nvPicPr>
-        <p:blipFill>
-          <a:blip r:embed="rId3" cstate="email">
-            <a:extLst>
-              <a:ext uri="{28A0092B-C50C-407E-A947-70E740481C1C}">
-                <a14:useLocalDpi xmlns:a14="http://schemas.microsoft.com/office/drawing/2010/main"/>
-              </a:ext>
-            </a:extLst>
-          </a:blip>
-          <a:stretch>
-            <a:fillRect/>
-          </a:stretch>
-        </p:blipFill>
-        <p:spPr>
-          <a:xfrm>
-            <a:off x="3992247" y="4977387"/>
-            <a:ext cx="1850608" cy="1604358"/>
-          </a:xfrm>
-          <a:prstGeom prst="rect">
-            <a:avLst/>
-          </a:prstGeom>
-        </p:spPr>
-      </p:pic>
-      <p:pic>
-        <p:nvPicPr>
-          <p:cNvPr id="8" name="Picture 7">
-            <a:extLst>
-              <a:ext uri="{FF2B5EF4-FFF2-40B4-BE49-F238E27FC236}">
-                <a16:creationId xmlns:a16="http://schemas.microsoft.com/office/drawing/2014/main" id="{AE17C928-9A3F-AA0E-DD82-46504805DC82}"/>
-              </a:ext>
-            </a:extLst>
-          </p:cNvPr>
-          <p:cNvPicPr>
-            <a:picLocks noChangeAspect="1"/>
-          </p:cNvPicPr>
-          <p:nvPr/>
-        </p:nvPicPr>
-        <p:blipFill>
-          <a:blip r:embed="rId4" cstate="email">
-            <a:extLst>
-              <a:ext uri="{28A0092B-C50C-407E-A947-70E740481C1C}">
-                <a14:useLocalDpi xmlns:a14="http://schemas.microsoft.com/office/drawing/2010/main"/>
-              </a:ext>
-            </a:extLst>
-          </a:blip>
-          <a:stretch>
-            <a:fillRect/>
-          </a:stretch>
-        </p:blipFill>
-        <p:spPr>
-          <a:xfrm>
-            <a:off x="8547653" y="5156690"/>
-            <a:ext cx="3520370" cy="1431280"/>
-          </a:xfrm>
-          <a:prstGeom prst="rect">
-            <a:avLst/>
-          </a:prstGeom>
-        </p:spPr>
-      </p:pic>
-      <p:sp>
-        <p:nvSpPr>
-          <p:cNvPr id="10" name="TextBox 9">
-            <a:extLst>
-              <a:ext uri="{FF2B5EF4-FFF2-40B4-BE49-F238E27FC236}">
-                <a16:creationId xmlns:a16="http://schemas.microsoft.com/office/drawing/2014/main" id="{54F166B1-25A3-B3B6-1170-4955D3E0E0CA}"/>
-              </a:ext>
-            </a:extLst>
-          </p:cNvPr>
-          <p:cNvSpPr txBox="1"/>
-          <p:nvPr/>
-        </p:nvSpPr>
-        <p:spPr>
-          <a:xfrm>
-            <a:off x="65801" y="2950280"/>
-            <a:ext cx="3684091" cy="3323987"/>
-          </a:xfrm>
-          <a:prstGeom prst="rect">
-            <a:avLst/>
-          </a:prstGeom>
-          <a:noFill/>
-        </p:spPr>
-        <p:txBody>
-          <a:bodyPr wrap="square" rtlCol="0">
-            <a:spAutoFit/>
-          </a:bodyPr>
-          <a:lstStyle/>
-          <a:p>
-            <a:r>
-              <a:rPr lang="en-US" b="1">
-                <a:solidFill>
-                  <a:srgbClr val="0070C0"/>
-                </a:solidFill>
-              </a:rPr>
-              <a:t>Statistics: Descriptive vs Inferential</a:t>
-            </a:r>
-          </a:p>
-          <a:p>
-            <a:endParaRPr lang="en-US" b="1">
-              <a:solidFill>
-                <a:srgbClr val="0070C0"/>
-              </a:solidFill>
+            <a:endParaRPr sz="1800" dirty="0">
+              <a:latin typeface="Calibri" panose="020F0502020204030204" pitchFamily="34" charset="0"/>
+              <a:cs typeface="Calibri" panose="020F0502020204030204" pitchFamily="34" charset="0"/>
             </a:endParaRPr>
-          </a:p>
-          <a:p>
-            <a:r>
-              <a:rPr lang="en-US" b="1">
-                <a:solidFill>
-                  <a:srgbClr val="0070C0"/>
-                </a:solidFill>
-              </a:rPr>
-              <a:t>Vocabulary of Statistics:</a:t>
-            </a:r>
-          </a:p>
-          <a:p>
-            <a:endParaRPr lang="en-US"/>
-          </a:p>
-          <a:p>
-            <a:pPr marL="342900" indent="-342900">
-              <a:buFont typeface="+mj-lt"/>
-              <a:buAutoNum type="arabicPeriod"/>
-            </a:pPr>
-            <a:r>
-              <a:rPr lang="en-US"/>
-              <a:t>Measures of Frequency </a:t>
-            </a:r>
-            <a:br>
-              <a:rPr lang="en-US"/>
-            </a:br>
-            <a:r>
-              <a:rPr lang="en-US"/>
-              <a:t>(how often something occurs):</a:t>
-            </a:r>
-            <a:br>
-              <a:rPr lang="en-US"/>
-            </a:br>
-            <a:r>
-              <a:rPr lang="en-US" b="1">
-                <a:solidFill>
-                  <a:srgbClr val="FF0000"/>
-                </a:solidFill>
-              </a:rPr>
-              <a:t>Count, Percent, Frequency</a:t>
-            </a:r>
-            <a:endParaRPr lang="en-US"/>
-          </a:p>
-          <a:p>
-            <a:pPr marL="342900" indent="-342900">
-              <a:buFont typeface="+mj-lt"/>
-              <a:buAutoNum type="arabicPeriod"/>
-            </a:pPr>
-            <a:r>
-              <a:rPr lang="en-US"/>
-              <a:t>Measures of Central Tendency </a:t>
-            </a:r>
-            <a:br>
-              <a:rPr lang="en-US"/>
-            </a:br>
-            <a:r>
-              <a:rPr lang="en-US"/>
-              <a:t>(where the data mostly is):</a:t>
-            </a:r>
-            <a:br>
-              <a:rPr lang="en-US"/>
-            </a:br>
-            <a:r>
-              <a:rPr lang="en-US" b="1">
-                <a:solidFill>
-                  <a:srgbClr val="FF0000"/>
-                </a:solidFill>
-              </a:rPr>
-              <a:t>Mean, Median, and Mode</a:t>
-            </a:r>
-            <a:endParaRPr lang="en-US"/>
-          </a:p>
-          <a:p>
-            <a:pPr marL="342900" indent="-342900">
-              <a:buFont typeface="+mj-lt"/>
-              <a:buAutoNum type="arabicPeriod"/>
-            </a:pPr>
-            <a:r>
-              <a:rPr lang="en-US"/>
-              <a:t>Measures of Dispersion or Variation </a:t>
-            </a:r>
-            <a:br>
-              <a:rPr lang="en-US"/>
-            </a:br>
-            <a:r>
-              <a:rPr lang="en-US"/>
-              <a:t>(how is data "spread out"): </a:t>
-            </a:r>
-            <a:br>
-              <a:rPr lang="en-US"/>
-            </a:br>
-            <a:r>
-              <a:rPr lang="en-US" b="1">
-                <a:solidFill>
-                  <a:srgbClr val="FF0000"/>
-                </a:solidFill>
-              </a:rPr>
-              <a:t>Range, Variance, Standard Deviation</a:t>
-            </a:r>
-          </a:p>
-          <a:p>
-            <a:pPr marL="342900" indent="-342900">
-              <a:buFont typeface="+mj-lt"/>
-              <a:buAutoNum type="arabicPeriod"/>
-            </a:pPr>
-            <a:r>
-              <a:rPr lang="en-US"/>
-              <a:t>Measures of Position (standard scores):</a:t>
-            </a:r>
-            <a:br>
-              <a:rPr lang="en-US"/>
-            </a:br>
-            <a:r>
-              <a:rPr lang="en-US" b="1">
-                <a:solidFill>
-                  <a:srgbClr val="FF0000"/>
-                </a:solidFill>
-              </a:rPr>
-              <a:t>Percentile Ranks, Quartile Ranks</a:t>
-            </a:r>
-          </a:p>
-        </p:txBody>
-      </p:sp>
-      <p:sp>
-        <p:nvSpPr>
-          <p:cNvPr id="9" name="TextBox 8">
-            <a:extLst>
-              <a:ext uri="{FF2B5EF4-FFF2-40B4-BE49-F238E27FC236}">
-                <a16:creationId xmlns:a16="http://schemas.microsoft.com/office/drawing/2014/main" id="{EBF7AA7E-D640-1982-0DFA-5E2F568B690C}"/>
-              </a:ext>
-            </a:extLst>
-          </p:cNvPr>
-          <p:cNvSpPr txBox="1"/>
-          <p:nvPr/>
-        </p:nvSpPr>
-        <p:spPr>
-          <a:xfrm>
-            <a:off x="7301948" y="3350193"/>
-            <a:ext cx="3909392" cy="523220"/>
-          </a:xfrm>
-          <a:prstGeom prst="rect">
-            <a:avLst/>
-          </a:prstGeom>
-          <a:noFill/>
-        </p:spPr>
-        <p:txBody>
-          <a:bodyPr wrap="square" rtlCol="0">
-            <a:spAutoFit/>
-          </a:bodyPr>
-          <a:lstStyle/>
-          <a:p>
-            <a:r>
-              <a:rPr lang="en-US" sz="2800" b="1">
-                <a:solidFill>
-                  <a:srgbClr val="00D200"/>
-                </a:solidFill>
-              </a:rPr>
-              <a:t>Descriptive Statistics</a:t>
-            </a:r>
           </a:p>
         </p:txBody>
       </p:sp>
     </p:spTree>
     <p:extLst>
       <p:ext uri="{BB962C8B-B14F-4D97-AF65-F5344CB8AC3E}">
-        <p14:creationId xmlns:p14="http://schemas.microsoft.com/office/powerpoint/2010/main" val="1499877235"/>
+        <p14:creationId xmlns:p14="http://schemas.microsoft.com/office/powerpoint/2010/main" val="1824935014"/>
       </p:ext>
     </p:extLst>
   </p:cSld>
@@ -15208,7 +14950,7 @@
 </p:sld>
 </file>
 
-<file path=ppt/slides/slide10.xml><?xml version="1.0" encoding="utf-8"?>
+<file path=ppt/slides/slide11.xml><?xml version="1.0" encoding="utf-8"?>
 <p:sld xmlns:a="http://schemas.openxmlformats.org/drawingml/2006/main" xmlns:r="http://schemas.openxmlformats.org/officeDocument/2006/relationships" xmlns:p="http://schemas.openxmlformats.org/presentationml/2006/main">
   <p:cSld>
     <p:spTree>
@@ -15855,7 +15597,7 @@
 </p:sld>
 </file>
 
-<file path=ppt/slides/slide11.xml><?xml version="1.0" encoding="utf-8"?>
+<file path=ppt/slides/slide12.xml><?xml version="1.0" encoding="utf-8"?>
 <p:sld xmlns:a="http://schemas.openxmlformats.org/drawingml/2006/main" xmlns:r="http://schemas.openxmlformats.org/officeDocument/2006/relationships" xmlns:p="http://schemas.openxmlformats.org/presentationml/2006/main">
   <p:cSld>
     <p:spTree>
@@ -16364,7 +16106,7 @@
 </p:sld>
 </file>
 
-<file path=ppt/slides/slide12.xml><?xml version="1.0" encoding="utf-8"?>
+<file path=ppt/slides/slide13.xml><?xml version="1.0" encoding="utf-8"?>
 <p:sld xmlns:a="http://schemas.openxmlformats.org/drawingml/2006/main" xmlns:r="http://schemas.openxmlformats.org/officeDocument/2006/relationships" xmlns:p="http://schemas.openxmlformats.org/presentationml/2006/main">
   <p:cSld>
     <p:spTree>
@@ -17507,7 +17249,7 @@
 </p:sld>
 </file>
 
-<file path=ppt/slides/slide13.xml><?xml version="1.0" encoding="utf-8"?>
+<file path=ppt/slides/slide14.xml><?xml version="1.0" encoding="utf-8"?>
 <p:sld xmlns:a="http://schemas.openxmlformats.org/drawingml/2006/main" xmlns:r="http://schemas.openxmlformats.org/officeDocument/2006/relationships" xmlns:p="http://schemas.openxmlformats.org/presentationml/2006/main">
   <p:cSld>
     <p:spTree>
@@ -17990,6 +17732,769 @@
       </p:grpSpPr>
       <p:sp>
         <p:nvSpPr>
+          <p:cNvPr id="11" name="Rectangle 10">
+            <a:extLst>
+              <a:ext uri="{FF2B5EF4-FFF2-40B4-BE49-F238E27FC236}">
+                <a16:creationId xmlns:a16="http://schemas.microsoft.com/office/drawing/2014/main" id="{FA6B1060-DCF7-C167-AABC-47472161A881}"/>
+              </a:ext>
+            </a:extLst>
+          </p:cNvPr>
+          <p:cNvSpPr/>
+          <p:nvPr/>
+        </p:nvSpPr>
+        <p:spPr>
+          <a:xfrm>
+            <a:off x="3750366" y="3310437"/>
+            <a:ext cx="8362122" cy="3324316"/>
+          </a:xfrm>
+          <a:prstGeom prst="rect">
+            <a:avLst/>
+          </a:prstGeom>
+          <a:solidFill>
+            <a:schemeClr val="accent4">
+              <a:lumMod val="20000"/>
+              <a:lumOff val="80000"/>
+            </a:schemeClr>
+          </a:solidFill>
+        </p:spPr>
+        <p:style>
+          <a:lnRef idx="2">
+            <a:schemeClr val="accent1">
+              <a:shade val="50000"/>
+            </a:schemeClr>
+          </a:lnRef>
+          <a:fillRef idx="1">
+            <a:schemeClr val="accent1"/>
+          </a:fillRef>
+          <a:effectRef idx="0">
+            <a:schemeClr val="accent1"/>
+          </a:effectRef>
+          <a:fontRef idx="minor">
+            <a:schemeClr val="lt1"/>
+          </a:fontRef>
+        </p:style>
+        <p:txBody>
+          <a:bodyPr rtlCol="0" anchor="ctr"/>
+          <a:lstStyle/>
+          <a:p>
+            <a:pPr algn="ctr"/>
+            <a:endParaRPr lang="en-US"/>
+          </a:p>
+        </p:txBody>
+      </p:sp>
+      <p:sp>
+        <p:nvSpPr>
+          <p:cNvPr id="3" name="TextBox 2">
+            <a:extLst>
+              <a:ext uri="{FF2B5EF4-FFF2-40B4-BE49-F238E27FC236}">
+                <a16:creationId xmlns:a16="http://schemas.microsoft.com/office/drawing/2014/main" id="{4B0129C1-3D76-E742-9440-D08150B4FCB0}"/>
+              </a:ext>
+            </a:extLst>
+          </p:cNvPr>
+          <p:cNvSpPr txBox="1"/>
+          <p:nvPr/>
+        </p:nvSpPr>
+        <p:spPr>
+          <a:xfrm>
+            <a:off x="65801" y="1054545"/>
+            <a:ext cx="5630778" cy="1600438"/>
+          </a:xfrm>
+          <a:prstGeom prst="rect">
+            <a:avLst/>
+          </a:prstGeom>
+          <a:noFill/>
+        </p:spPr>
+        <p:txBody>
+          <a:bodyPr wrap="square" rtlCol="0">
+            <a:spAutoFit/>
+          </a:bodyPr>
+          <a:lstStyle/>
+          <a:p>
+            <a:r>
+              <a:rPr lang="en-US" b="1">
+                <a:solidFill>
+                  <a:srgbClr val="FF0000"/>
+                </a:solidFill>
+              </a:rPr>
+              <a:t>Statistics</a:t>
+            </a:r>
+            <a:r>
+              <a:rPr lang="en-US"/>
+              <a:t> – the mathematical science dealing with the </a:t>
+            </a:r>
+            <a:r>
+              <a:rPr lang="en-US" b="1">
+                <a:solidFill>
+                  <a:srgbClr val="00B050"/>
+                </a:solidFill>
+              </a:rPr>
+              <a:t>collection, description, analysis, interpretation, and presentation</a:t>
+            </a:r>
+            <a:r>
+              <a:rPr lang="en-US"/>
+              <a:t> of masses of numerical data.</a:t>
+            </a:r>
+          </a:p>
+          <a:p>
+            <a:endParaRPr lang="en-US"/>
+          </a:p>
+          <a:p>
+            <a:r>
+              <a:rPr lang="en-US"/>
+              <a:t>Typically we are given a </a:t>
+            </a:r>
+            <a:r>
+              <a:rPr lang="en-US" b="1">
+                <a:solidFill>
+                  <a:srgbClr val="FF0000"/>
+                </a:solidFill>
+              </a:rPr>
+              <a:t>sample of data</a:t>
+            </a:r>
+            <a:r>
+              <a:rPr lang="en-US"/>
+              <a:t>, </a:t>
+            </a:r>
+            <a:br>
+              <a:rPr lang="en-US"/>
+            </a:br>
+            <a:r>
+              <a:rPr lang="en-US"/>
+              <a:t>and we are trying to make some </a:t>
+            </a:r>
+            <a:r>
+              <a:rPr lang="en-US" b="1">
+                <a:solidFill>
+                  <a:srgbClr val="FF0000"/>
+                </a:solidFill>
+              </a:rPr>
+              <a:t>conclusions or predictions</a:t>
+            </a:r>
+            <a:r>
+              <a:rPr lang="en-US"/>
+              <a:t> </a:t>
+            </a:r>
+            <a:br>
+              <a:rPr lang="en-US"/>
+            </a:br>
+            <a:r>
+              <a:rPr lang="en-US"/>
+              <a:t>based on this particular sample of data.</a:t>
+            </a:r>
+          </a:p>
+        </p:txBody>
+      </p:sp>
+      <p:sp>
+        <p:nvSpPr>
+          <p:cNvPr id="2" name="TextBox 1">
+            <a:extLst>
+              <a:ext uri="{FF2B5EF4-FFF2-40B4-BE49-F238E27FC236}">
+                <a16:creationId xmlns:a16="http://schemas.microsoft.com/office/drawing/2014/main" id="{D27FE722-FC6A-E94D-9EDD-308335431558}"/>
+              </a:ext>
+            </a:extLst>
+          </p:cNvPr>
+          <p:cNvSpPr txBox="1"/>
+          <p:nvPr/>
+        </p:nvSpPr>
+        <p:spPr>
+          <a:xfrm>
+            <a:off x="84221" y="120316"/>
+            <a:ext cx="6172200" cy="800219"/>
+          </a:xfrm>
+          <a:prstGeom prst="rect">
+            <a:avLst/>
+          </a:prstGeom>
+          <a:noFill/>
+        </p:spPr>
+        <p:txBody>
+          <a:bodyPr wrap="square" rtlCol="0">
+            <a:spAutoFit/>
+          </a:bodyPr>
+          <a:lstStyle/>
+          <a:p>
+            <a:r>
+              <a:rPr lang="en-US" sz="2800" b="1"/>
+              <a:t>Statistics</a:t>
+            </a:r>
+          </a:p>
+          <a:p>
+            <a:r>
+              <a:rPr lang="en-US" sz="1800" b="1"/>
+              <a:t>    </a:t>
+            </a:r>
+            <a:r>
+              <a:rPr lang="en-US" sz="1800" b="1">
+                <a:solidFill>
+                  <a:srgbClr val="FF0000"/>
+                </a:solidFill>
+              </a:rPr>
+              <a:t>sample data </a:t>
+            </a:r>
+            <a:r>
+              <a:rPr lang="en-US" sz="1800" b="1">
+                <a:solidFill>
+                  <a:srgbClr val="FF0000"/>
+                </a:solidFill>
+                <a:sym typeface="Wingdings" pitchFamily="2" charset="2"/>
+              </a:rPr>
+              <a:t>   conclusions and predictions</a:t>
+            </a:r>
+            <a:r>
+              <a:rPr lang="en-US" sz="1800" b="1">
+                <a:sym typeface="Wingdings" pitchFamily="2" charset="2"/>
+              </a:rPr>
+              <a:t> </a:t>
+            </a:r>
+            <a:endParaRPr lang="en-US" sz="1800" b="1"/>
+          </a:p>
+        </p:txBody>
+      </p:sp>
+      <p:pic>
+        <p:nvPicPr>
+          <p:cNvPr id="5" name="Picture 4">
+            <a:extLst>
+              <a:ext uri="{FF2B5EF4-FFF2-40B4-BE49-F238E27FC236}">
+                <a16:creationId xmlns:a16="http://schemas.microsoft.com/office/drawing/2014/main" id="{D55C7F62-4DAE-B846-B173-162C2E84901A}"/>
+              </a:ext>
+            </a:extLst>
+          </p:cNvPr>
+          <p:cNvPicPr>
+            <a:picLocks noChangeAspect="1"/>
+          </p:cNvPicPr>
+          <p:nvPr/>
+        </p:nvPicPr>
+        <p:blipFill>
+          <a:blip r:embed="rId2" cstate="email">
+            <a:extLst>
+              <a:ext uri="{28A0092B-C50C-407E-A947-70E740481C1C}">
+                <a14:useLocalDpi xmlns:a14="http://schemas.microsoft.com/office/drawing/2010/main"/>
+              </a:ext>
+            </a:extLst>
+          </a:blip>
+          <a:stretch>
+            <a:fillRect/>
+          </a:stretch>
+        </p:blipFill>
+        <p:spPr>
+          <a:xfrm>
+            <a:off x="7268647" y="106740"/>
+            <a:ext cx="4839132" cy="2928353"/>
+          </a:xfrm>
+          <a:prstGeom prst="rect">
+            <a:avLst/>
+          </a:prstGeom>
+          <a:ln>
+            <a:solidFill>
+              <a:schemeClr val="accent1"/>
+            </a:solidFill>
+          </a:ln>
+        </p:spPr>
+      </p:pic>
+      <p:sp>
+        <p:nvSpPr>
+          <p:cNvPr id="4" name="TextBox 3">
+            <a:extLst>
+              <a:ext uri="{FF2B5EF4-FFF2-40B4-BE49-F238E27FC236}">
+                <a16:creationId xmlns:a16="http://schemas.microsoft.com/office/drawing/2014/main" id="{076957E4-DBB9-0C88-8C92-A98960E64F4E}"/>
+              </a:ext>
+            </a:extLst>
+          </p:cNvPr>
+          <p:cNvSpPr txBox="1"/>
+          <p:nvPr/>
+        </p:nvSpPr>
+        <p:spPr>
+          <a:xfrm>
+            <a:off x="3929875" y="4087983"/>
+            <a:ext cx="4252737" cy="738664"/>
+          </a:xfrm>
+          <a:prstGeom prst="rect">
+            <a:avLst/>
+          </a:prstGeom>
+          <a:noFill/>
+          <a:ln>
+            <a:solidFill>
+              <a:schemeClr val="accent1"/>
+            </a:solidFill>
+          </a:ln>
+        </p:spPr>
+        <p:txBody>
+          <a:bodyPr wrap="square" rtlCol="0">
+            <a:spAutoFit/>
+          </a:bodyPr>
+          <a:lstStyle/>
+          <a:p>
+            <a:pPr marL="285750" indent="-285750">
+              <a:buFont typeface="Arial" panose="020B0604020202020204" pitchFamily="34" charset="0"/>
+              <a:buChar char="•"/>
+            </a:pPr>
+            <a:r>
+              <a:rPr lang="en-US" b="1">
+                <a:solidFill>
+                  <a:srgbClr val="FF0000"/>
+                </a:solidFill>
+              </a:rPr>
+              <a:t>mean</a:t>
+            </a:r>
+            <a:r>
+              <a:rPr lang="en-US"/>
+              <a:t> = the average of a data set</a:t>
+            </a:r>
+          </a:p>
+          <a:p>
+            <a:pPr marL="285750" indent="-285750">
+              <a:buFont typeface="Arial" panose="020B0604020202020204" pitchFamily="34" charset="0"/>
+              <a:buChar char="•"/>
+            </a:pPr>
+            <a:r>
+              <a:rPr lang="en-US" b="1">
+                <a:solidFill>
+                  <a:srgbClr val="FF0000"/>
+                </a:solidFill>
+              </a:rPr>
+              <a:t>median</a:t>
+            </a:r>
+            <a:r>
+              <a:rPr lang="en-US"/>
+              <a:t> = the middle of the set of numbers</a:t>
+            </a:r>
+          </a:p>
+          <a:p>
+            <a:pPr marL="285750" indent="-285750">
+              <a:buFont typeface="Arial" panose="020B0604020202020204" pitchFamily="34" charset="0"/>
+              <a:buChar char="•"/>
+            </a:pPr>
+            <a:r>
+              <a:rPr lang="en-US" b="1">
+                <a:solidFill>
+                  <a:srgbClr val="FF0000"/>
+                </a:solidFill>
+              </a:rPr>
+              <a:t>mode</a:t>
+            </a:r>
+            <a:r>
+              <a:rPr lang="en-US"/>
+              <a:t> = the most common number in a data set</a:t>
+            </a:r>
+          </a:p>
+        </p:txBody>
+      </p:sp>
+      <p:sp>
+        <p:nvSpPr>
+          <p:cNvPr id="6" name="TextBox 5">
+            <a:extLst>
+              <a:ext uri="{FF2B5EF4-FFF2-40B4-BE49-F238E27FC236}">
+                <a16:creationId xmlns:a16="http://schemas.microsoft.com/office/drawing/2014/main" id="{1EE18733-4169-72E8-0A73-595A28519447}"/>
+              </a:ext>
+            </a:extLst>
+          </p:cNvPr>
+          <p:cNvSpPr txBox="1"/>
+          <p:nvPr/>
+        </p:nvSpPr>
+        <p:spPr>
+          <a:xfrm>
+            <a:off x="8745542" y="4355954"/>
+            <a:ext cx="3124591" cy="738664"/>
+          </a:xfrm>
+          <a:prstGeom prst="rect">
+            <a:avLst/>
+          </a:prstGeom>
+          <a:noFill/>
+          <a:ln>
+            <a:solidFill>
+              <a:schemeClr val="accent1"/>
+            </a:solidFill>
+          </a:ln>
+        </p:spPr>
+        <p:txBody>
+          <a:bodyPr wrap="square" rtlCol="0">
+            <a:spAutoFit/>
+          </a:bodyPr>
+          <a:lstStyle/>
+          <a:p>
+            <a:pPr marL="285750" indent="-285750">
+              <a:buFont typeface="Arial" panose="020B0604020202020204" pitchFamily="34" charset="0"/>
+              <a:buChar char="•"/>
+            </a:pPr>
+            <a:r>
+              <a:rPr lang="en-US">
+                <a:solidFill>
+                  <a:schemeClr val="tx1"/>
+                </a:solidFill>
+              </a:rPr>
+              <a:t>The 25th percentile = 1</a:t>
+            </a:r>
+            <a:r>
+              <a:rPr lang="en-US" baseline="30000">
+                <a:solidFill>
+                  <a:schemeClr val="tx1"/>
+                </a:solidFill>
+              </a:rPr>
+              <a:t>st</a:t>
+            </a:r>
+            <a:r>
+              <a:rPr lang="en-US">
+                <a:solidFill>
+                  <a:schemeClr val="tx1"/>
+                </a:solidFill>
+              </a:rPr>
+              <a:t> quartile</a:t>
+            </a:r>
+          </a:p>
+          <a:p>
+            <a:pPr marL="285750" indent="-285750">
+              <a:buFont typeface="Arial" panose="020B0604020202020204" pitchFamily="34" charset="0"/>
+              <a:buChar char="•"/>
+            </a:pPr>
+            <a:r>
+              <a:rPr lang="en-US">
+                <a:solidFill>
+                  <a:schemeClr val="tx1"/>
+                </a:solidFill>
+              </a:rPr>
+              <a:t>The 50th percentile = median</a:t>
+            </a:r>
+          </a:p>
+          <a:p>
+            <a:pPr marL="285750" indent="-285750">
+              <a:buFont typeface="Arial" panose="020B0604020202020204" pitchFamily="34" charset="0"/>
+              <a:buChar char="•"/>
+            </a:pPr>
+            <a:r>
+              <a:rPr lang="en-US">
+                <a:solidFill>
+                  <a:schemeClr val="tx1"/>
+                </a:solidFill>
+              </a:rPr>
+              <a:t>The 75th percentile = 3</a:t>
+            </a:r>
+            <a:r>
+              <a:rPr lang="en-US" baseline="30000">
+                <a:solidFill>
+                  <a:schemeClr val="tx1"/>
+                </a:solidFill>
+              </a:rPr>
+              <a:t>rd</a:t>
+            </a:r>
+            <a:r>
+              <a:rPr lang="en-US">
+                <a:solidFill>
+                  <a:schemeClr val="tx1"/>
+                </a:solidFill>
+              </a:rPr>
+              <a:t> quartile</a:t>
+            </a:r>
+          </a:p>
+        </p:txBody>
+      </p:sp>
+      <p:pic>
+        <p:nvPicPr>
+          <p:cNvPr id="7" name="Picture 6">
+            <a:extLst>
+              <a:ext uri="{FF2B5EF4-FFF2-40B4-BE49-F238E27FC236}">
+                <a16:creationId xmlns:a16="http://schemas.microsoft.com/office/drawing/2014/main" id="{E809A2F8-1F98-78A8-0396-444036160DF5}"/>
+              </a:ext>
+            </a:extLst>
+          </p:cNvPr>
+          <p:cNvPicPr>
+            <a:picLocks noChangeAspect="1"/>
+          </p:cNvPicPr>
+          <p:nvPr/>
+        </p:nvPicPr>
+        <p:blipFill>
+          <a:blip r:embed="rId3" cstate="email">
+            <a:extLst>
+              <a:ext uri="{28A0092B-C50C-407E-A947-70E740481C1C}">
+                <a14:useLocalDpi xmlns:a14="http://schemas.microsoft.com/office/drawing/2010/main"/>
+              </a:ext>
+            </a:extLst>
+          </a:blip>
+          <a:stretch>
+            <a:fillRect/>
+          </a:stretch>
+        </p:blipFill>
+        <p:spPr>
+          <a:xfrm>
+            <a:off x="3992247" y="4977387"/>
+            <a:ext cx="1850608" cy="1604358"/>
+          </a:xfrm>
+          <a:prstGeom prst="rect">
+            <a:avLst/>
+          </a:prstGeom>
+        </p:spPr>
+      </p:pic>
+      <p:pic>
+        <p:nvPicPr>
+          <p:cNvPr id="8" name="Picture 7">
+            <a:extLst>
+              <a:ext uri="{FF2B5EF4-FFF2-40B4-BE49-F238E27FC236}">
+                <a16:creationId xmlns:a16="http://schemas.microsoft.com/office/drawing/2014/main" id="{AE17C928-9A3F-AA0E-DD82-46504805DC82}"/>
+              </a:ext>
+            </a:extLst>
+          </p:cNvPr>
+          <p:cNvPicPr>
+            <a:picLocks noChangeAspect="1"/>
+          </p:cNvPicPr>
+          <p:nvPr/>
+        </p:nvPicPr>
+        <p:blipFill>
+          <a:blip r:embed="rId4" cstate="email">
+            <a:extLst>
+              <a:ext uri="{28A0092B-C50C-407E-A947-70E740481C1C}">
+                <a14:useLocalDpi xmlns:a14="http://schemas.microsoft.com/office/drawing/2010/main"/>
+              </a:ext>
+            </a:extLst>
+          </a:blip>
+          <a:stretch>
+            <a:fillRect/>
+          </a:stretch>
+        </p:blipFill>
+        <p:spPr>
+          <a:xfrm>
+            <a:off x="8547653" y="5156690"/>
+            <a:ext cx="3520370" cy="1431280"/>
+          </a:xfrm>
+          <a:prstGeom prst="rect">
+            <a:avLst/>
+          </a:prstGeom>
+        </p:spPr>
+      </p:pic>
+      <p:sp>
+        <p:nvSpPr>
+          <p:cNvPr id="10" name="TextBox 9">
+            <a:extLst>
+              <a:ext uri="{FF2B5EF4-FFF2-40B4-BE49-F238E27FC236}">
+                <a16:creationId xmlns:a16="http://schemas.microsoft.com/office/drawing/2014/main" id="{54F166B1-25A3-B3B6-1170-4955D3E0E0CA}"/>
+              </a:ext>
+            </a:extLst>
+          </p:cNvPr>
+          <p:cNvSpPr txBox="1"/>
+          <p:nvPr/>
+        </p:nvSpPr>
+        <p:spPr>
+          <a:xfrm>
+            <a:off x="65801" y="2950280"/>
+            <a:ext cx="3684091" cy="3323987"/>
+          </a:xfrm>
+          <a:prstGeom prst="rect">
+            <a:avLst/>
+          </a:prstGeom>
+          <a:noFill/>
+        </p:spPr>
+        <p:txBody>
+          <a:bodyPr wrap="square" rtlCol="0">
+            <a:spAutoFit/>
+          </a:bodyPr>
+          <a:lstStyle/>
+          <a:p>
+            <a:r>
+              <a:rPr lang="en-US" b="1">
+                <a:solidFill>
+                  <a:srgbClr val="0070C0"/>
+                </a:solidFill>
+              </a:rPr>
+              <a:t>Statistics: Descriptive vs Inferential</a:t>
+            </a:r>
+          </a:p>
+          <a:p>
+            <a:endParaRPr lang="en-US" b="1">
+              <a:solidFill>
+                <a:srgbClr val="0070C0"/>
+              </a:solidFill>
+            </a:endParaRPr>
+          </a:p>
+          <a:p>
+            <a:r>
+              <a:rPr lang="en-US" b="1">
+                <a:solidFill>
+                  <a:srgbClr val="0070C0"/>
+                </a:solidFill>
+              </a:rPr>
+              <a:t>Vocabulary of Statistics:</a:t>
+            </a:r>
+          </a:p>
+          <a:p>
+            <a:endParaRPr lang="en-US"/>
+          </a:p>
+          <a:p>
+            <a:pPr marL="342900" indent="-342900">
+              <a:buFont typeface="+mj-lt"/>
+              <a:buAutoNum type="arabicPeriod"/>
+            </a:pPr>
+            <a:r>
+              <a:rPr lang="en-US"/>
+              <a:t>Measures of Frequency </a:t>
+            </a:r>
+            <a:br>
+              <a:rPr lang="en-US"/>
+            </a:br>
+            <a:r>
+              <a:rPr lang="en-US"/>
+              <a:t>(how often something occurs):</a:t>
+            </a:r>
+            <a:br>
+              <a:rPr lang="en-US"/>
+            </a:br>
+            <a:r>
+              <a:rPr lang="en-US" b="1">
+                <a:solidFill>
+                  <a:srgbClr val="FF0000"/>
+                </a:solidFill>
+              </a:rPr>
+              <a:t>Count, Percent, Frequency</a:t>
+            </a:r>
+            <a:endParaRPr lang="en-US"/>
+          </a:p>
+          <a:p>
+            <a:pPr marL="342900" indent="-342900">
+              <a:buFont typeface="+mj-lt"/>
+              <a:buAutoNum type="arabicPeriod"/>
+            </a:pPr>
+            <a:r>
+              <a:rPr lang="en-US"/>
+              <a:t>Measures of Central Tendency </a:t>
+            </a:r>
+            <a:br>
+              <a:rPr lang="en-US"/>
+            </a:br>
+            <a:r>
+              <a:rPr lang="en-US"/>
+              <a:t>(where the data mostly is):</a:t>
+            </a:r>
+            <a:br>
+              <a:rPr lang="en-US"/>
+            </a:br>
+            <a:r>
+              <a:rPr lang="en-US" b="1">
+                <a:solidFill>
+                  <a:srgbClr val="FF0000"/>
+                </a:solidFill>
+              </a:rPr>
+              <a:t>Mean, Median, and Mode</a:t>
+            </a:r>
+            <a:endParaRPr lang="en-US"/>
+          </a:p>
+          <a:p>
+            <a:pPr marL="342900" indent="-342900">
+              <a:buFont typeface="+mj-lt"/>
+              <a:buAutoNum type="arabicPeriod"/>
+            </a:pPr>
+            <a:r>
+              <a:rPr lang="en-US"/>
+              <a:t>Measures of Dispersion or Variation </a:t>
+            </a:r>
+            <a:br>
+              <a:rPr lang="en-US"/>
+            </a:br>
+            <a:r>
+              <a:rPr lang="en-US"/>
+              <a:t>(how is data "spread out"): </a:t>
+            </a:r>
+            <a:br>
+              <a:rPr lang="en-US"/>
+            </a:br>
+            <a:r>
+              <a:rPr lang="en-US" b="1">
+                <a:solidFill>
+                  <a:srgbClr val="FF0000"/>
+                </a:solidFill>
+              </a:rPr>
+              <a:t>Range, Variance, Standard Deviation</a:t>
+            </a:r>
+          </a:p>
+          <a:p>
+            <a:pPr marL="342900" indent="-342900">
+              <a:buFont typeface="+mj-lt"/>
+              <a:buAutoNum type="arabicPeriod"/>
+            </a:pPr>
+            <a:r>
+              <a:rPr lang="en-US"/>
+              <a:t>Measures of Position (standard scores):</a:t>
+            </a:r>
+            <a:br>
+              <a:rPr lang="en-US"/>
+            </a:br>
+            <a:r>
+              <a:rPr lang="en-US" b="1">
+                <a:solidFill>
+                  <a:srgbClr val="FF0000"/>
+                </a:solidFill>
+              </a:rPr>
+              <a:t>Percentile Ranks, Quartile Ranks</a:t>
+            </a:r>
+          </a:p>
+        </p:txBody>
+      </p:sp>
+      <p:sp>
+        <p:nvSpPr>
+          <p:cNvPr id="9" name="TextBox 8">
+            <a:extLst>
+              <a:ext uri="{FF2B5EF4-FFF2-40B4-BE49-F238E27FC236}">
+                <a16:creationId xmlns:a16="http://schemas.microsoft.com/office/drawing/2014/main" id="{EBF7AA7E-D640-1982-0DFA-5E2F568B690C}"/>
+              </a:ext>
+            </a:extLst>
+          </p:cNvPr>
+          <p:cNvSpPr txBox="1"/>
+          <p:nvPr/>
+        </p:nvSpPr>
+        <p:spPr>
+          <a:xfrm>
+            <a:off x="7301948" y="3350193"/>
+            <a:ext cx="3909392" cy="523220"/>
+          </a:xfrm>
+          <a:prstGeom prst="rect">
+            <a:avLst/>
+          </a:prstGeom>
+          <a:noFill/>
+        </p:spPr>
+        <p:txBody>
+          <a:bodyPr wrap="square" rtlCol="0">
+            <a:spAutoFit/>
+          </a:bodyPr>
+          <a:lstStyle/>
+          <a:p>
+            <a:r>
+              <a:rPr lang="en-US" sz="2800" b="1">
+                <a:solidFill>
+                  <a:srgbClr val="00D200"/>
+                </a:solidFill>
+              </a:rPr>
+              <a:t>Descriptive Statistics</a:t>
+            </a:r>
+          </a:p>
+        </p:txBody>
+      </p:sp>
+    </p:spTree>
+    <p:extLst>
+      <p:ext uri="{BB962C8B-B14F-4D97-AF65-F5344CB8AC3E}">
+        <p14:creationId xmlns:p14="http://schemas.microsoft.com/office/powerpoint/2010/main" val="1499877235"/>
+      </p:ext>
+    </p:extLst>
+  </p:cSld>
+  <p:clrMapOvr>
+    <a:masterClrMapping/>
+  </p:clrMapOvr>
+</p:sld>
+</file>
+
+<file path=ppt/slides/slide3.xml><?xml version="1.0" encoding="utf-8"?>
+<p:sld xmlns:a="http://schemas.openxmlformats.org/drawingml/2006/main" xmlns:r="http://schemas.openxmlformats.org/officeDocument/2006/relationships" xmlns:p="http://schemas.openxmlformats.org/presentationml/2006/main">
+  <p:cSld>
+    <p:spTree>
+      <p:nvGrpSpPr>
+        <p:cNvPr id="1" name=""/>
+        <p:cNvGrpSpPr/>
+        <p:nvPr/>
+      </p:nvGrpSpPr>
+      <p:grpSpPr>
+        <a:xfrm>
+          <a:off x="0" y="0"/>
+          <a:ext cx="0" cy="0"/>
+          <a:chOff x="0" y="0"/>
+          <a:chExt cx="0" cy="0"/>
+        </a:xfrm>
+      </p:grpSpPr>
+      <p:sp>
+        <p:nvSpPr>
           <p:cNvPr id="4" name="TextBox 3">
             <a:extLst>
               <a:ext uri="{FF2B5EF4-FFF2-40B4-BE49-F238E27FC236}">
@@ -18084,7 +18589,7 @@
           <a:p>
             <a:r>
               <a:rPr lang="en-US" dirty="0"/>
-              <a:t>the event will occur (in some experiment). </a:t>
+              <a:t>the event will occur (in some experiment)</a:t>
             </a:r>
           </a:p>
           <a:p>
@@ -18101,21 +18606,7 @@
             </a:r>
             <a:r>
               <a:rPr lang="en-US" dirty="0"/>
-              <a:t> is a number between 0 and 1. </a:t>
-            </a:r>
-          </a:p>
-          <a:p>
-            <a:r>
-              <a:rPr lang="en-US" dirty="0"/>
-              <a:t>But sometimes people express probability using </a:t>
-            </a:r>
-            <a:r>
-              <a:rPr lang="en-US" dirty="0" err="1"/>
-              <a:t>percents</a:t>
-            </a:r>
-            <a:r>
-              <a:rPr lang="en-US" dirty="0"/>
-              <a:t>.</a:t>
+              <a:t> is a number between 0 and 1 (or 0 – 100%)</a:t>
             </a:r>
           </a:p>
           <a:p>
@@ -18136,7 +18627,7 @@
           <a:p>
             <a:r>
               <a:rPr lang="en-US" dirty="0"/>
-              <a:t>    1 – event will certainly happen, 100%.</a:t>
+              <a:t>    1 – event will certainly happen ( 100% )</a:t>
             </a:r>
           </a:p>
           <a:p>
@@ -18168,7 +18659,25 @@
             </a:r>
             <a:r>
               <a:rPr lang="en-US" dirty="0"/>
-              <a:t> can be combinations of individual events. For example, if we throw one dice cube – there are 6 possible outcomes (1,2,3,4,5,6), each one has same probability – 1/6.</a:t>
+              <a:t> can be combinations of individual events. </a:t>
+            </a:r>
+          </a:p>
+          <a:p>
+            <a:r>
+              <a:rPr lang="en-US" dirty="0"/>
+              <a:t>For example, if we throw one dice cube, </a:t>
+            </a:r>
+          </a:p>
+          <a:p>
+            <a:r>
+              <a:rPr lang="en-US" dirty="0"/>
+              <a:t>there are 6 possible outcomes (1,2,3,4,5,6), </a:t>
+            </a:r>
+          </a:p>
+          <a:p>
+            <a:r>
+              <a:rPr lang="en-US" dirty="0"/>
+              <a:t>each one has same probability:  1/6</a:t>
             </a:r>
           </a:p>
         </p:txBody>
@@ -18187,8 +18696,8 @@
         </p:nvSpPr>
         <p:spPr>
           <a:xfrm>
-            <a:off x="5938345" y="701179"/>
-            <a:ext cx="6096000" cy="5816977"/>
+            <a:off x="6096000" y="491040"/>
+            <a:ext cx="5641910" cy="6032421"/>
           </a:xfrm>
           <a:prstGeom prst="rect">
             <a:avLst/>
@@ -18221,7 +18730,7 @@
           <a:p>
             <a:r>
               <a:rPr lang="en-US" dirty="0"/>
-              <a:t>Probability of each combination is the same – 1/36.</a:t>
+              <a:t>Probability of each combination is the same:  1/36</a:t>
             </a:r>
           </a:p>
           <a:p>
@@ -18447,7 +18956,7 @@
           <a:p>
             <a:r>
               <a:rPr lang="en-US" dirty="0"/>
-              <a:t>from more combinations, thus have higher probability of happening.</a:t>
+              <a:t>from more combinations, thus have higher probability of happening</a:t>
             </a:r>
           </a:p>
           <a:p>
@@ -18456,13 +18965,19 @@
           <a:p>
             <a:r>
               <a:rPr lang="en-US" dirty="0"/>
-              <a:t>Note: Events can be mutually exclusive, or not. </a:t>
+              <a:t>Note: </a:t>
             </a:r>
           </a:p>
           <a:p>
             <a:r>
               <a:rPr lang="en-US" dirty="0"/>
-              <a:t>Also, events may be independent, or dependent on each other.</a:t>
+              <a:t>   Events can be mutually exclusive, or not</a:t>
+            </a:r>
+          </a:p>
+          <a:p>
+            <a:r>
+              <a:rPr lang="en-US" dirty="0"/>
+              <a:t>   Also, events may be independent, or dependent on each other</a:t>
             </a:r>
           </a:p>
         </p:txBody>
@@ -18516,7 +19031,7 @@
 </p:sld>
 </file>
 
-<file path=ppt/slides/slide3.xml><?xml version="1.0" encoding="utf-8"?>
+<file path=ppt/slides/slide4.xml><?xml version="1.0" encoding="utf-8"?>
 <p:sld xmlns:a="http://schemas.openxmlformats.org/drawingml/2006/main" xmlns:r="http://schemas.openxmlformats.org/officeDocument/2006/relationships" xmlns:p="http://schemas.openxmlformats.org/presentationml/2006/main">
   <p:cSld>
     <p:spTree>
@@ -18709,7 +19224,7 @@
                   <a:srgbClr val="0070C0"/>
                 </a:solidFill>
               </a:rPr>
-              <a:t>Example 3. Job Search.</a:t>
+              <a:t>Example 3. Job Search</a:t>
             </a:r>
           </a:p>
           <a:p>
@@ -18867,7 +19382,7 @@
           <a:p>
             <a:r>
               <a:rPr lang="en-US" dirty="0"/>
-              <a:t>So each probability = 1/6 = 0.167 3.</a:t>
+              <a:t>So each probability = 1/6 = 0.167</a:t>
             </a:r>
           </a:p>
         </p:txBody>
@@ -19194,7 +19709,7 @@
 </p:sld>
 </file>
 
-<file path=ppt/slides/slide4.xml><?xml version="1.0" encoding="utf-8"?>
+<file path=ppt/slides/slide5.xml><?xml version="1.0" encoding="utf-8"?>
 <p:sld xmlns:a="http://schemas.openxmlformats.org/drawingml/2006/main" xmlns:r="http://schemas.openxmlformats.org/officeDocument/2006/relationships" xmlns:p="http://schemas.openxmlformats.org/presentationml/2006/main">
   <p:cSld>
     <p:spTree>
@@ -19631,7 +20146,7 @@
 </p:sld>
 </file>
 
-<file path=ppt/slides/slide5.xml><?xml version="1.0" encoding="utf-8"?>
+<file path=ppt/slides/slide6.xml><?xml version="1.0" encoding="utf-8"?>
 <p:sld xmlns:a="http://schemas.openxmlformats.org/drawingml/2006/main" xmlns:r="http://schemas.openxmlformats.org/officeDocument/2006/relationships" xmlns:p="http://schemas.openxmlformats.org/presentationml/2006/main">
   <p:cSld>
     <p:spTree>
@@ -20764,7 +21279,7 @@
 </p:sld>
 </file>
 
-<file path=ppt/slides/slide6.xml><?xml version="1.0" encoding="utf-8"?>
+<file path=ppt/slides/slide7.xml><?xml version="1.0" encoding="utf-8"?>
 <p:sld xmlns:a="http://schemas.openxmlformats.org/drawingml/2006/main" xmlns:r="http://schemas.openxmlformats.org/officeDocument/2006/relationships" xmlns:p="http://schemas.openxmlformats.org/presentationml/2006/main">
   <p:cSld>
     <p:spTree>
@@ -22468,7 +22983,7 @@
 </p:sld>
 </file>
 
-<file path=ppt/slides/slide7.xml><?xml version="1.0" encoding="utf-8"?>
+<file path=ppt/slides/slide8.xml><?xml version="1.0" encoding="utf-8"?>
 <p:sld xmlns:a="http://schemas.openxmlformats.org/drawingml/2006/main" xmlns:r="http://schemas.openxmlformats.org/officeDocument/2006/relationships" xmlns:p="http://schemas.openxmlformats.org/presentationml/2006/main">
   <p:cSld>
     <p:spTree>
@@ -22752,7 +23267,7 @@
 </p:sld>
 </file>
 
-<file path=ppt/slides/slide8.xml><?xml version="1.0" encoding="utf-8"?>
+<file path=ppt/slides/slide9.xml><?xml version="1.0" encoding="utf-8"?>
 <p:sld xmlns:a="http://schemas.openxmlformats.org/drawingml/2006/main" xmlns:r="http://schemas.openxmlformats.org/officeDocument/2006/relationships" xmlns:p="http://schemas.openxmlformats.org/presentationml/2006/main">
   <p:cSld>
     <p:spTree>
@@ -24557,424 +25072,6 @@
     <p:extLst>
       <p:ext uri="{BB962C8B-B14F-4D97-AF65-F5344CB8AC3E}">
         <p14:creationId xmlns:p14="http://schemas.microsoft.com/office/powerpoint/2010/main" val="333321039"/>
-      </p:ext>
-    </p:extLst>
-  </p:cSld>
-  <p:clrMapOvr>
-    <a:masterClrMapping/>
-  </p:clrMapOvr>
-</p:sld>
-</file>
-
-<file path=ppt/slides/slide9.xml><?xml version="1.0" encoding="utf-8"?>
-<p:sld xmlns:a="http://schemas.openxmlformats.org/drawingml/2006/main" xmlns:r="http://schemas.openxmlformats.org/officeDocument/2006/relationships" xmlns:p="http://schemas.openxmlformats.org/presentationml/2006/main">
-  <p:cSld>
-    <p:spTree>
-      <p:nvGrpSpPr>
-        <p:cNvPr id="1" name=""/>
-        <p:cNvGrpSpPr/>
-        <p:nvPr/>
-      </p:nvGrpSpPr>
-      <p:grpSpPr>
-        <a:xfrm>
-          <a:off x="0" y="0"/>
-          <a:ext cx="0" cy="0"/>
-          <a:chOff x="0" y="0"/>
-          <a:chExt cx="0" cy="0"/>
-        </a:xfrm>
-      </p:grpSpPr>
-      <p:sp>
-        <p:nvSpPr>
-          <p:cNvPr id="5" name="Google Shape;93;p13">
-            <a:extLst>
-              <a:ext uri="{FF2B5EF4-FFF2-40B4-BE49-F238E27FC236}">
-                <a16:creationId xmlns:a16="http://schemas.microsoft.com/office/drawing/2014/main" id="{F5066C6A-F841-BB4E-888A-251B4AF760F4}"/>
-              </a:ext>
-            </a:extLst>
-          </p:cNvPr>
-          <p:cNvSpPr txBox="1"/>
-          <p:nvPr/>
-        </p:nvSpPr>
-        <p:spPr>
-          <a:xfrm>
-            <a:off x="2748641" y="1644652"/>
-            <a:ext cx="6694715" cy="1637391"/>
-          </a:xfrm>
-          <a:prstGeom prst="rect">
-            <a:avLst/>
-          </a:prstGeom>
-          <a:noFill/>
-          <a:ln w="63500">
-            <a:solidFill>
-              <a:schemeClr val="accent6">
-                <a:lumMod val="40000"/>
-                <a:lumOff val="60000"/>
-              </a:schemeClr>
-            </a:solidFill>
-          </a:ln>
-        </p:spPr>
-        <p:txBody>
-          <a:bodyPr spcFirstLastPara="1" wrap="square" lIns="91425" tIns="45700" rIns="91425" bIns="45700" anchor="t" anchorCtr="0">
-            <a:noAutofit/>
-          </a:bodyPr>
-          <a:lstStyle/>
-          <a:p>
-            <a:pPr marL="0" marR="0" lvl="0" indent="0" algn="l" rtl="0">
-              <a:spcBef>
-                <a:spcPts val="0"/>
-              </a:spcBef>
-              <a:spcAft>
-                <a:spcPts val="0"/>
-              </a:spcAft>
-              <a:buNone/>
-            </a:pPr>
-            <a:r>
-              <a:rPr lang="en-US" sz="2400" b="1" dirty="0">
-                <a:solidFill>
-                  <a:schemeClr val="accent1"/>
-                </a:solidFill>
-                <a:latin typeface="Calibri" panose="020F0502020204030204" pitchFamily="34" charset="0"/>
-                <a:cs typeface="Calibri" panose="020F0502020204030204" pitchFamily="34" charset="0"/>
-                <a:sym typeface="Calibri"/>
-              </a:rPr>
-              <a:t>Frequentist interpretation of Bayes’ theorem.</a:t>
-            </a:r>
-            <a:endParaRPr sz="2400" b="1" dirty="0">
-              <a:solidFill>
-                <a:schemeClr val="accent1"/>
-              </a:solidFill>
-              <a:latin typeface="Calibri" panose="020F0502020204030204" pitchFamily="34" charset="0"/>
-              <a:cs typeface="Calibri" panose="020F0502020204030204" pitchFamily="34" charset="0"/>
-            </a:endParaRPr>
-          </a:p>
-          <a:p>
-            <a:pPr marL="0" marR="0" lvl="0" indent="0" algn="l" rtl="0">
-              <a:spcBef>
-                <a:spcPts val="0"/>
-              </a:spcBef>
-              <a:spcAft>
-                <a:spcPts val="0"/>
-              </a:spcAft>
-              <a:buNone/>
-            </a:pPr>
-            <a:r>
-              <a:rPr lang="en-US" sz="1800" b="1" dirty="0">
-                <a:solidFill>
-                  <a:srgbClr val="00B050"/>
-                </a:solidFill>
-                <a:latin typeface="Calibri" panose="020F0502020204030204" pitchFamily="34" charset="0"/>
-                <a:cs typeface="Calibri" panose="020F0502020204030204" pitchFamily="34" charset="0"/>
-                <a:sym typeface="Calibri"/>
-              </a:rPr>
-              <a:t>Probability measures a proportion of outcomes.</a:t>
-            </a:r>
-            <a:endParaRPr sz="1800" b="1" dirty="0">
-              <a:solidFill>
-                <a:srgbClr val="00B050"/>
-              </a:solidFill>
-              <a:latin typeface="Calibri" panose="020F0502020204030204" pitchFamily="34" charset="0"/>
-              <a:cs typeface="Calibri" panose="020F0502020204030204" pitchFamily="34" charset="0"/>
-              <a:sym typeface="Calibri"/>
-            </a:endParaRPr>
-          </a:p>
-          <a:p>
-            <a:pPr marL="0" marR="0" lvl="0" indent="0" algn="l" rtl="0">
-              <a:spcBef>
-                <a:spcPts val="0"/>
-              </a:spcBef>
-              <a:spcAft>
-                <a:spcPts val="0"/>
-              </a:spcAft>
-              <a:buNone/>
-            </a:pPr>
-            <a:r>
-              <a:rPr lang="en-US" sz="1800" dirty="0">
-                <a:solidFill>
-                  <a:schemeClr val="dk1"/>
-                </a:solidFill>
-                <a:latin typeface="Calibri" panose="020F0502020204030204" pitchFamily="34" charset="0"/>
-                <a:cs typeface="Calibri" panose="020F0502020204030204" pitchFamily="34" charset="0"/>
-                <a:sym typeface="Calibri"/>
-              </a:rPr>
-              <a:t>P(A) - proportions of outcomes A</a:t>
-            </a:r>
-          </a:p>
-          <a:p>
-            <a:r>
-              <a:rPr lang="en-US" sz="1800" dirty="0">
-                <a:solidFill>
-                  <a:schemeClr val="dk1"/>
-                </a:solidFill>
-                <a:latin typeface="Calibri" panose="020F0502020204030204" pitchFamily="34" charset="0"/>
-                <a:cs typeface="Calibri" panose="020F0502020204030204" pitchFamily="34" charset="0"/>
-                <a:sym typeface="Calibri"/>
-              </a:rPr>
-              <a:t>P(B) - proportions of outcomes B</a:t>
-            </a:r>
-          </a:p>
-          <a:p>
-            <a:pPr marL="0" marR="0" lvl="0" indent="0" algn="l" rtl="0">
-              <a:spcBef>
-                <a:spcPts val="0"/>
-              </a:spcBef>
-              <a:spcAft>
-                <a:spcPts val="0"/>
-              </a:spcAft>
-              <a:buNone/>
-            </a:pPr>
-            <a:r>
-              <a:rPr lang="en-US" sz="1800" dirty="0">
-                <a:solidFill>
-                  <a:schemeClr val="dk1"/>
-                </a:solidFill>
-                <a:latin typeface="Calibri" panose="020F0502020204030204" pitchFamily="34" charset="0"/>
-                <a:cs typeface="Calibri" panose="020F0502020204030204" pitchFamily="34" charset="0"/>
-                <a:sym typeface="Calibri"/>
-              </a:rPr>
-              <a:t>P(B|A) is the proportion of outcomes B out of outcomes A</a:t>
-            </a:r>
-          </a:p>
-        </p:txBody>
-      </p:sp>
-      <p:sp>
-        <p:nvSpPr>
-          <p:cNvPr id="7" name="TextBox 6">
-            <a:extLst>
-              <a:ext uri="{FF2B5EF4-FFF2-40B4-BE49-F238E27FC236}">
-                <a16:creationId xmlns:a16="http://schemas.microsoft.com/office/drawing/2014/main" id="{925C92EE-03D8-DB44-AE43-BDAD05469BE7}"/>
-              </a:ext>
-            </a:extLst>
-          </p:cNvPr>
-          <p:cNvSpPr txBox="1"/>
-          <p:nvPr/>
-        </p:nvSpPr>
-        <p:spPr>
-          <a:xfrm>
-            <a:off x="-1" y="37572"/>
-            <a:ext cx="6694715" cy="523220"/>
-          </a:xfrm>
-          <a:prstGeom prst="rect">
-            <a:avLst/>
-          </a:prstGeom>
-          <a:noFill/>
-        </p:spPr>
-        <p:txBody>
-          <a:bodyPr wrap="square" rtlCol="0">
-            <a:spAutoFit/>
-          </a:bodyPr>
-          <a:lstStyle/>
-          <a:p>
-            <a:r>
-              <a:rPr lang="en-US" sz="2800" b="1" dirty="0"/>
-              <a:t>Frequentist vs Bayesian </a:t>
-            </a:r>
-          </a:p>
-        </p:txBody>
-      </p:sp>
-      <p:sp>
-        <p:nvSpPr>
-          <p:cNvPr id="8" name="Google Shape;93;p13">
-            <a:extLst>
-              <a:ext uri="{FF2B5EF4-FFF2-40B4-BE49-F238E27FC236}">
-                <a16:creationId xmlns:a16="http://schemas.microsoft.com/office/drawing/2014/main" id="{63B1458D-308E-4C42-81E2-BCB6757E15B7}"/>
-              </a:ext>
-            </a:extLst>
-          </p:cNvPr>
-          <p:cNvSpPr txBox="1"/>
-          <p:nvPr/>
-        </p:nvSpPr>
-        <p:spPr>
-          <a:xfrm>
-            <a:off x="2748642" y="4114801"/>
-            <a:ext cx="6694715" cy="1637390"/>
-          </a:xfrm>
-          <a:prstGeom prst="rect">
-            <a:avLst/>
-          </a:prstGeom>
-          <a:noFill/>
-          <a:ln w="63500">
-            <a:solidFill>
-              <a:schemeClr val="accent6">
-                <a:lumMod val="40000"/>
-                <a:lumOff val="60000"/>
-              </a:schemeClr>
-            </a:solidFill>
-          </a:ln>
-        </p:spPr>
-        <p:txBody>
-          <a:bodyPr spcFirstLastPara="1" wrap="square" lIns="91425" tIns="45700" rIns="91425" bIns="45700" anchor="t" anchorCtr="0">
-            <a:noAutofit/>
-          </a:bodyPr>
-          <a:lstStyle/>
-          <a:p>
-            <a:r>
-              <a:rPr lang="en-US" sz="2400" b="1" dirty="0">
-                <a:solidFill>
-                  <a:schemeClr val="accent1"/>
-                </a:solidFill>
-                <a:latin typeface="Calibri" panose="020F0502020204030204" pitchFamily="34" charset="0"/>
-                <a:cs typeface="Calibri" panose="020F0502020204030204" pitchFamily="34" charset="0"/>
-                <a:sym typeface="Calibri"/>
-              </a:rPr>
-              <a:t>Bayesian interpretation of Bayes’ theorem.</a:t>
-            </a:r>
-            <a:endParaRPr lang="en-US" sz="2400" b="1" dirty="0">
-              <a:solidFill>
-                <a:schemeClr val="accent1"/>
-              </a:solidFill>
-              <a:latin typeface="Calibri" panose="020F0502020204030204" pitchFamily="34" charset="0"/>
-              <a:cs typeface="Calibri" panose="020F0502020204030204" pitchFamily="34" charset="0"/>
-            </a:endParaRPr>
-          </a:p>
-          <a:p>
-            <a:pPr lvl="0"/>
-            <a:r>
-              <a:rPr lang="en-US" sz="1800" b="1" dirty="0">
-                <a:solidFill>
-                  <a:srgbClr val="00B050"/>
-                </a:solidFill>
-                <a:latin typeface="Calibri" panose="020F0502020204030204" pitchFamily="34" charset="0"/>
-                <a:cs typeface="Calibri" panose="020F0502020204030204" pitchFamily="34" charset="0"/>
-                <a:sym typeface="Calibri"/>
-              </a:rPr>
-              <a:t>Probability measures a degree of belief.</a:t>
-            </a:r>
-            <a:br>
-              <a:rPr lang="en-US" sz="1800" b="1" dirty="0">
-                <a:solidFill>
-                  <a:srgbClr val="00B050"/>
-                </a:solidFill>
-                <a:latin typeface="Calibri" panose="020F0502020204030204" pitchFamily="34" charset="0"/>
-                <a:cs typeface="Calibri" panose="020F0502020204030204" pitchFamily="34" charset="0"/>
-                <a:sym typeface="Calibri"/>
-              </a:rPr>
-            </a:br>
-            <a:r>
-              <a:rPr lang="en-US" sz="1800" dirty="0">
-                <a:solidFill>
-                  <a:schemeClr val="dk1"/>
-                </a:solidFill>
-                <a:latin typeface="Calibri" panose="020F0502020204030204" pitchFamily="34" charset="0"/>
-                <a:cs typeface="Calibri" panose="020F0502020204030204" pitchFamily="34" charset="0"/>
-                <a:sym typeface="Calibri"/>
-              </a:rPr>
-              <a:t>P(A), the </a:t>
-            </a:r>
-            <a:r>
-              <a:rPr lang="en-US" sz="1800" b="1" dirty="0">
-                <a:solidFill>
-                  <a:schemeClr val="accent1"/>
-                </a:solidFill>
-                <a:latin typeface="Calibri" panose="020F0502020204030204" pitchFamily="34" charset="0"/>
-                <a:cs typeface="Calibri" panose="020F0502020204030204" pitchFamily="34" charset="0"/>
-                <a:sym typeface="Calibri"/>
-              </a:rPr>
-              <a:t>prior</a:t>
-            </a:r>
-            <a:r>
-              <a:rPr lang="en-US" sz="1800" dirty="0">
-                <a:solidFill>
-                  <a:schemeClr val="dk1"/>
-                </a:solidFill>
-                <a:latin typeface="Calibri" panose="020F0502020204030204" pitchFamily="34" charset="0"/>
-                <a:cs typeface="Calibri" panose="020F0502020204030204" pitchFamily="34" charset="0"/>
-                <a:sym typeface="Calibri"/>
-              </a:rPr>
-              <a:t>, is the initial degree of belief in A.</a:t>
-            </a:r>
-            <a:endParaRPr lang="en-US" sz="1800" dirty="0">
-              <a:solidFill>
-                <a:schemeClr val="dk1"/>
-              </a:solidFill>
-              <a:latin typeface="Calibri" panose="020F0502020204030204" pitchFamily="34" charset="0"/>
-              <a:cs typeface="Calibri" panose="020F0502020204030204" pitchFamily="34" charset="0"/>
-            </a:endParaRPr>
-          </a:p>
-          <a:p>
-            <a:pPr lvl="0"/>
-            <a:r>
-              <a:rPr lang="en-US" sz="1800" dirty="0">
-                <a:solidFill>
-                  <a:schemeClr val="dk1"/>
-                </a:solidFill>
-                <a:latin typeface="Calibri" panose="020F0502020204030204" pitchFamily="34" charset="0"/>
-                <a:cs typeface="Calibri" panose="020F0502020204030204" pitchFamily="34" charset="0"/>
-                <a:sym typeface="Calibri"/>
-              </a:rPr>
-              <a:t>P(A|B), the </a:t>
-            </a:r>
-            <a:r>
-              <a:rPr lang="en-US" sz="1800" b="1" dirty="0">
-                <a:solidFill>
-                  <a:schemeClr val="accent1"/>
-                </a:solidFill>
-                <a:latin typeface="Calibri" panose="020F0502020204030204" pitchFamily="34" charset="0"/>
-                <a:cs typeface="Calibri" panose="020F0502020204030204" pitchFamily="34" charset="0"/>
-                <a:sym typeface="Calibri"/>
-              </a:rPr>
-              <a:t>posterior</a:t>
-            </a:r>
-            <a:r>
-              <a:rPr lang="en-US" sz="1800" dirty="0">
-                <a:solidFill>
-                  <a:schemeClr val="dk1"/>
-                </a:solidFill>
-                <a:latin typeface="Calibri" panose="020F0502020204030204" pitchFamily="34" charset="0"/>
-                <a:cs typeface="Calibri" panose="020F0502020204030204" pitchFamily="34" charset="0"/>
-                <a:sym typeface="Calibri"/>
-              </a:rPr>
-              <a:t>, is the degree of belief having accounted for B.</a:t>
-            </a:r>
-            <a:br>
-              <a:rPr lang="en-US" sz="1800" dirty="0">
-                <a:solidFill>
-                  <a:schemeClr val="dk1"/>
-                </a:solidFill>
-                <a:latin typeface="Calibri" panose="020F0502020204030204" pitchFamily="34" charset="0"/>
-                <a:cs typeface="Calibri" panose="020F0502020204030204" pitchFamily="34" charset="0"/>
-                <a:sym typeface="Calibri"/>
-              </a:rPr>
-            </a:br>
-            <a:r>
-              <a:rPr lang="en-US" sz="1800" dirty="0">
-                <a:solidFill>
-                  <a:schemeClr val="dk1"/>
-                </a:solidFill>
-                <a:latin typeface="Calibri" panose="020F0502020204030204" pitchFamily="34" charset="0"/>
-                <a:cs typeface="Calibri" panose="020F0502020204030204" pitchFamily="34" charset="0"/>
-                <a:sym typeface="Calibri"/>
-              </a:rPr>
-              <a:t>P(B|A)/P(B) – represents the support B provides for A.</a:t>
-            </a:r>
-            <a:endParaRPr lang="en-US" sz="1800" dirty="0">
-              <a:solidFill>
-                <a:schemeClr val="dk1"/>
-              </a:solidFill>
-              <a:latin typeface="Calibri" panose="020F0502020204030204" pitchFamily="34" charset="0"/>
-              <a:cs typeface="Calibri" panose="020F0502020204030204" pitchFamily="34" charset="0"/>
-            </a:endParaRPr>
-          </a:p>
-          <a:p>
-            <a:pPr marL="0" marR="0" lvl="0" indent="0" algn="l" rtl="0">
-              <a:spcBef>
-                <a:spcPts val="0"/>
-              </a:spcBef>
-              <a:spcAft>
-                <a:spcPts val="0"/>
-              </a:spcAft>
-              <a:buNone/>
-            </a:pPr>
-            <a:endParaRPr sz="1800" dirty="0">
-              <a:latin typeface="Calibri" panose="020F0502020204030204" pitchFamily="34" charset="0"/>
-              <a:cs typeface="Calibri" panose="020F0502020204030204" pitchFamily="34" charset="0"/>
-            </a:endParaRPr>
-          </a:p>
-        </p:txBody>
-      </p:sp>
-    </p:spTree>
-    <p:extLst>
-      <p:ext uri="{BB962C8B-B14F-4D97-AF65-F5344CB8AC3E}">
-        <p14:creationId xmlns:p14="http://schemas.microsoft.com/office/powerpoint/2010/main" val="1824935014"/>
       </p:ext>
     </p:extLst>
   </p:cSld>
